--- a/AI_推进汇报_2026上半年.pptx
+++ b/AI_推进汇报_2026上半年.pptx
@@ -13,6 +13,9 @@
     <p:sldId id="261" r:id="rId12"/>
     <p:sldId id="262" r:id="rId13"/>
     <p:sldId id="263" r:id="rId14"/>
+    <p:sldId id="264" r:id="rId15"/>
+    <p:sldId id="265" r:id="rId16"/>
+    <p:sldId id="266" r:id="rId17"/>
   </p:sldIdLst>
   <p:sldSz cx="9144000" cy="5143500" type="screen4x3"/>
   <p:notesSz cx="6858000" cy="9144000"/>
@@ -3151,7 +3154,7 @@
         </p:nvSpPr>
         <p:spPr>
           <a:xfrm>
-            <a:off x="457200" y="2011680"/>
+            <a:off x="457200" y="1920240"/>
             <a:ext cx="8229600" cy="822960"/>
           </a:xfrm>
           <a:prstGeom prst="rect">
@@ -3167,14 +3170,15 @@
           <a:p>
             <a:pPr algn="ctr"/>
             <a:r>
-              <a:rPr sz="3200" b="1">
+              <a:rPr sz="3400" b="1">
                 <a:solidFill>
                   <a:srgbClr val="FFFFFF"/>
                 </a:solidFill>
                 <a:latin typeface="微软雅黑"/>
                 <a:ea typeface="微软雅黑"/>
-              </a:rPr>
-              <a:t>AI 落地推进 · 2026 上半年汇报</a:t>
+                <a:cs typeface="微软雅黑"/>
+              </a:rPr>
+              <a:t>2026 上半年汇报</a:t>
             </a:r>
           </a:p>
         </p:txBody>
@@ -3182,6 +3186,43 @@
       <p:sp>
         <p:nvSpPr>
           <p:cNvPr id="5" name="TextBox 4"/>
+          <p:cNvSpPr txBox="1"/>
+          <p:nvPr/>
+        </p:nvSpPr>
+        <p:spPr>
+          <a:xfrm>
+            <a:off x="457200" y="3017520"/>
+            <a:ext cx="8229600" cy="457200"/>
+          </a:xfrm>
+          <a:prstGeom prst="rect">
+            <a:avLst/>
+          </a:prstGeom>
+          <a:noFill/>
+        </p:spPr>
+        <p:txBody>
+          <a:bodyPr wrap="none" lIns="0">
+            <a:spAutoFit/>
+          </a:bodyPr>
+          <a:lstStyle/>
+          <a:p>
+            <a:pPr algn="ctr"/>
+            <a:r>
+              <a:rPr sz="1500">
+                <a:solidFill>
+                  <a:srgbClr val="C4D5EC"/>
+                </a:solidFill>
+                <a:latin typeface="微软雅黑"/>
+                <a:ea typeface="微软雅黑"/>
+                <a:cs typeface="微软雅黑"/>
+              </a:rPr>
+              <a:t>凯莱英 · Mid-Year Review 2026</a:t>
+            </a:r>
+          </a:p>
+        </p:txBody>
+      </p:sp>
+      <p:sp>
+        <p:nvSpPr>
+          <p:cNvPr id="6" name="TextBox 5"/>
           <p:cNvSpPr txBox="1"/>
           <p:nvPr/>
         </p:nvSpPr>
@@ -3218,7 +3259,7 @@
       </p:sp>
       <p:sp>
         <p:nvSpPr>
-          <p:cNvPr id="6" name="TextBox 5"/>
+          <p:cNvPr id="7" name="TextBox 6"/>
           <p:cNvSpPr txBox="1"/>
           <p:nvPr/>
         </p:nvSpPr>
@@ -3255,7 +3296,7 @@
       </p:sp>
       <p:sp>
         <p:nvSpPr>
-          <p:cNvPr id="7" name="TextBox 6"/>
+          <p:cNvPr id="8" name="TextBox 7"/>
           <p:cNvSpPr txBox="1"/>
           <p:nvPr/>
         </p:nvSpPr>
@@ -3286,6 +3327,2687 @@
                 <a:cs typeface="微软雅黑"/>
               </a:rPr>
               <a:t>1</a:t>
+            </a:r>
+          </a:p>
+        </p:txBody>
+      </p:sp>
+    </p:spTree>
+  </p:cSld>
+  <p:clrMapOvr>
+    <a:masterClrMapping/>
+  </p:clrMapOvr>
+</p:sld>
+</file>
+
+<file path=ppt/slides/slide10.xml><?xml version="1.0" encoding="utf-8"?>
+<p:sld xmlns:a="http://schemas.openxmlformats.org/drawingml/2006/main" xmlns:p="http://schemas.openxmlformats.org/presentationml/2006/main" xmlns:r="http://schemas.openxmlformats.org/officeDocument/2006/relationships">
+  <p:cSld>
+    <p:spTree>
+      <p:nvGrpSpPr>
+        <p:cNvPr id="1" name=""/>
+        <p:cNvGrpSpPr/>
+        <p:nvPr/>
+      </p:nvGrpSpPr>
+      <p:grpSpPr/>
+      <p:sp>
+        <p:nvSpPr>
+          <p:cNvPr id="2" name="TextBox 1"/>
+          <p:cNvSpPr txBox="1"/>
+          <p:nvPr/>
+        </p:nvSpPr>
+        <p:spPr>
+          <a:xfrm>
+            <a:off x="3200400" y="182880"/>
+            <a:ext cx="5760720" cy="457200"/>
+          </a:xfrm>
+          <a:prstGeom prst="rect">
+            <a:avLst/>
+          </a:prstGeom>
+          <a:noFill/>
+        </p:spPr>
+        <p:txBody>
+          <a:bodyPr wrap="none" lIns="0">
+            <a:spAutoFit/>
+          </a:bodyPr>
+          <a:lstStyle/>
+          <a:p>
+            <a:pPr algn="r"/>
+            <a:r>
+              <a:rPr sz="2000" b="1">
+                <a:solidFill>
+                  <a:srgbClr val="00366A"/>
+                </a:solidFill>
+                <a:latin typeface="微软雅黑"/>
+                <a:ea typeface="微软雅黑"/>
+                <a:cs typeface="微软雅黑"/>
+              </a:rPr>
+              <a:t>PdM 三方方案对比与启动准备</a:t>
+            </a:r>
+          </a:p>
+        </p:txBody>
+      </p:sp>
+      <p:sp>
+        <p:nvSpPr>
+          <p:cNvPr id="3" name="Rectangle 2"/>
+          <p:cNvSpPr/>
+          <p:nvPr/>
+        </p:nvSpPr>
+        <p:spPr>
+          <a:xfrm>
+            <a:off x="274320" y="777240"/>
+            <a:ext cx="8595360" cy="30000"/>
+          </a:xfrm>
+          <a:prstGeom prst="rect">
+            <a:avLst/>
+          </a:prstGeom>
+          <a:solidFill>
+            <a:srgbClr val="FF7E3D"/>
+          </a:solidFill>
+          <a:ln>
+            <a:noFill/>
+          </a:ln>
+        </p:spPr>
+        <p:style>
+          <a:lnRef idx="1">
+            <a:schemeClr val="accent1"/>
+          </a:lnRef>
+          <a:fillRef idx="3">
+            <a:schemeClr val="accent1"/>
+          </a:fillRef>
+          <a:effectRef idx="2">
+            <a:schemeClr val="accent1"/>
+          </a:effectRef>
+          <a:fontRef idx="minor">
+            <a:schemeClr val="lt1"/>
+          </a:fontRef>
+        </p:style>
+        <p:txBody>
+          <a:bodyPr rtlCol="0" anchor="ctr"/>
+          <a:lstStyle/>
+          <a:p>
+            <a:pPr algn="ctr"/>
+          </a:p>
+        </p:txBody>
+      </p:sp>
+      <p:sp>
+        <p:nvSpPr>
+          <p:cNvPr id="4" name="TextBox 3"/>
+          <p:cNvSpPr txBox="1"/>
+          <p:nvPr/>
+        </p:nvSpPr>
+        <p:spPr>
+          <a:xfrm>
+            <a:off x="274320" y="4892040"/>
+            <a:ext cx="2103120" cy="182880"/>
+          </a:xfrm>
+          <a:prstGeom prst="rect">
+            <a:avLst/>
+          </a:prstGeom>
+          <a:noFill/>
+        </p:spPr>
+        <p:txBody>
+          <a:bodyPr wrap="square" lIns="0" rIns="0" tIns="0" bIns="0">
+            <a:spAutoFit/>
+          </a:bodyPr>
+          <a:lstStyle/>
+          <a:p>
+            <a:pPr algn="l"/>
+            <a:r>
+              <a:rPr sz="750" b="0">
+                <a:solidFill>
+                  <a:srgbClr val="7A89A8"/>
+                </a:solidFill>
+                <a:latin typeface="Arial"/>
+                <a:ea typeface="微软雅黑"/>
+                <a:cs typeface="微软雅黑"/>
+              </a:rPr>
+              <a:t>www.asymchem.com.cn</a:t>
+            </a:r>
+          </a:p>
+        </p:txBody>
+      </p:sp>
+      <p:sp>
+        <p:nvSpPr>
+          <p:cNvPr id="5" name="TextBox 4"/>
+          <p:cNvSpPr txBox="1"/>
+          <p:nvPr/>
+        </p:nvSpPr>
+        <p:spPr>
+          <a:xfrm>
+            <a:off x="2377440" y="4892040"/>
+            <a:ext cx="2286000" cy="182880"/>
+          </a:xfrm>
+          <a:prstGeom prst="rect">
+            <a:avLst/>
+          </a:prstGeom>
+          <a:noFill/>
+        </p:spPr>
+        <p:txBody>
+          <a:bodyPr wrap="square" lIns="0" rIns="0" tIns="0" bIns="0">
+            <a:spAutoFit/>
+          </a:bodyPr>
+          <a:lstStyle/>
+          <a:p>
+            <a:pPr algn="l"/>
+            <a:r>
+              <a:rPr sz="700" b="0">
+                <a:solidFill>
+                  <a:srgbClr val="7A89A8"/>
+                </a:solidFill>
+                <a:latin typeface="Arial"/>
+                <a:ea typeface="微软雅黑"/>
+                <a:cs typeface="微软雅黑"/>
+              </a:rPr>
+              <a:t>Stock Code: 002821.SZ / 6821.HK</a:t>
+            </a:r>
+          </a:p>
+        </p:txBody>
+      </p:sp>
+      <p:sp>
+        <p:nvSpPr>
+          <p:cNvPr id="6" name="TextBox 5"/>
+          <p:cNvSpPr txBox="1"/>
+          <p:nvPr/>
+        </p:nvSpPr>
+        <p:spPr>
+          <a:xfrm>
+            <a:off x="8595360" y="4892040"/>
+            <a:ext cx="457200" cy="182880"/>
+          </a:xfrm>
+          <a:prstGeom prst="rect">
+            <a:avLst/>
+          </a:prstGeom>
+          <a:noFill/>
+        </p:spPr>
+        <p:txBody>
+          <a:bodyPr wrap="square" lIns="0" rIns="0" tIns="0" bIns="0">
+            <a:spAutoFit/>
+          </a:bodyPr>
+          <a:lstStyle/>
+          <a:p>
+            <a:pPr algn="r"/>
+            <a:r>
+              <a:rPr sz="800" b="0">
+                <a:solidFill>
+                  <a:srgbClr val="7A89A8"/>
+                </a:solidFill>
+                <a:latin typeface="Arial"/>
+                <a:ea typeface="微软雅黑"/>
+                <a:cs typeface="微软雅黑"/>
+              </a:rPr>
+              <a:t>10</a:t>
+            </a:r>
+          </a:p>
+        </p:txBody>
+      </p:sp>
+      <p:sp>
+        <p:nvSpPr>
+          <p:cNvPr id="7" name="Rectangle 6"/>
+          <p:cNvSpPr/>
+          <p:nvPr/>
+        </p:nvSpPr>
+        <p:spPr>
+          <a:xfrm>
+            <a:off x="274320" y="1051560"/>
+            <a:ext cx="4297680" cy="411480"/>
+          </a:xfrm>
+          <a:prstGeom prst="rect">
+            <a:avLst/>
+          </a:prstGeom>
+          <a:solidFill>
+            <a:srgbClr val="00366A"/>
+          </a:solidFill>
+          <a:ln>
+            <a:noFill/>
+          </a:ln>
+        </p:spPr>
+        <p:style>
+          <a:lnRef idx="1">
+            <a:schemeClr val="accent1"/>
+          </a:lnRef>
+          <a:fillRef idx="3">
+            <a:schemeClr val="accent1"/>
+          </a:fillRef>
+          <a:effectRef idx="2">
+            <a:schemeClr val="accent1"/>
+          </a:effectRef>
+          <a:fontRef idx="minor">
+            <a:schemeClr val="lt1"/>
+          </a:fontRef>
+        </p:style>
+        <p:txBody>
+          <a:bodyPr rtlCol="0" anchor="ctr" lIns="50000" rIns="50000" tIns="30000" bIns="30000"/>
+          <a:lstStyle/>
+          <a:p>
+            <a:pPr algn="ctr"/>
+            <a:r>
+              <a:rPr sz="1200" b="1">
+                <a:solidFill>
+                  <a:srgbClr val="FFFFFF"/>
+                </a:solidFill>
+                <a:latin typeface="微软雅黑"/>
+                <a:ea typeface="微软雅黑"/>
+                <a:cs typeface="微软雅黑"/>
+              </a:rPr>
+              <a:t>PdM 三方方案对比</a:t>
+            </a:r>
+          </a:p>
+        </p:txBody>
+      </p:sp>
+      <p:sp>
+        <p:nvSpPr>
+          <p:cNvPr id="8" name="Rectangle 7"/>
+          <p:cNvSpPr/>
+          <p:nvPr/>
+        </p:nvSpPr>
+        <p:spPr>
+          <a:xfrm>
+            <a:off x="274320" y="1463039"/>
+            <a:ext cx="4297680" cy="3108960"/>
+          </a:xfrm>
+          <a:prstGeom prst="rect">
+            <a:avLst/>
+          </a:prstGeom>
+          <a:solidFill>
+            <a:srgbClr val="FFFFFF"/>
+          </a:solidFill>
+          <a:ln w="9525">
+            <a:solidFill>
+              <a:srgbClr val="DCE3EF"/>
+            </a:solidFill>
+          </a:ln>
+        </p:spPr>
+        <p:style>
+          <a:lnRef idx="1">
+            <a:schemeClr val="accent1"/>
+          </a:lnRef>
+          <a:fillRef idx="3">
+            <a:schemeClr val="accent1"/>
+          </a:fillRef>
+          <a:effectRef idx="2">
+            <a:schemeClr val="accent1"/>
+          </a:effectRef>
+          <a:fontRef idx="minor">
+            <a:schemeClr val="lt1"/>
+          </a:fontRef>
+        </p:style>
+        <p:txBody>
+          <a:bodyPr rtlCol="0" anchor="ctr"/>
+          <a:lstStyle/>
+          <a:p>
+            <a:pPr algn="ctr"/>
+          </a:p>
+        </p:txBody>
+      </p:sp>
+      <p:sp>
+        <p:nvSpPr>
+          <p:cNvPr id="9" name="TextBox 8"/>
+          <p:cNvSpPr txBox="1"/>
+          <p:nvPr/>
+        </p:nvSpPr>
+        <p:spPr>
+          <a:xfrm>
+            <a:off x="347472" y="1508760"/>
+            <a:ext cx="4151376" cy="3017520"/>
+          </a:xfrm>
+          <a:prstGeom prst="rect">
+            <a:avLst/>
+          </a:prstGeom>
+          <a:noFill/>
+        </p:spPr>
+        <p:txBody>
+          <a:bodyPr wrap="square" tIns="50000" lIns="0" rIns="0" bIns="50000">
+            <a:spAutoFit/>
+          </a:bodyPr>
+          <a:lstStyle/>
+          <a:p>
+            <a:pPr>
+              <a:lnSpc>
+                <a:spcPct val="130000"/>
+              </a:lnSpc>
+              <a:spcBef>
+                <a:spcPts val="0"/>
+              </a:spcBef>
+              <a:spcAft>
+                <a:spcPts val="200"/>
+              </a:spcAft>
+            </a:pPr>
+            <a:r>
+              <a:rPr sz="1050" b="1">
+                <a:solidFill>
+                  <a:srgbClr val="3263A7"/>
+                </a:solidFill>
+                <a:latin typeface="微软雅黑"/>
+                <a:ea typeface="微软雅黑"/>
+                <a:cs typeface="微软雅黑"/>
+              </a:rPr>
+              <a:t>杭州和利时 · 已对接方案</a:t>
+            </a:r>
+          </a:p>
+          <a:p>
+            <a:pPr>
+              <a:lnSpc>
+                <a:spcPct val="130000"/>
+              </a:lnSpc>
+              <a:spcBef>
+                <a:spcPts val="0"/>
+              </a:spcBef>
+              <a:spcAft>
+                <a:spcPts val="200"/>
+              </a:spcAft>
+            </a:pPr>
+            <a:r>
+              <a:rPr sz="900" b="0">
+                <a:solidFill>
+                  <a:srgbClr val="0F2B46"/>
+                </a:solidFill>
+                <a:latin typeface="微软雅黑"/>
+                <a:ea typeface="微软雅黑"/>
+                <a:cs typeface="微软雅黑"/>
+              </a:rPr>
+              <a:t>聚焦 DH1 动力站关键动设备 PdM，覆盖冰机、循环泵、凉水塔、真空泵、离心机等的智能监测与故障诊断</a:t>
+            </a:r>
+          </a:p>
+          <a:p>
+            <a:pPr>
+              <a:lnSpc>
+                <a:spcPct val="130000"/>
+              </a:lnSpc>
+              <a:spcBef>
+                <a:spcPts val="0"/>
+              </a:spcBef>
+              <a:spcAft>
+                <a:spcPts val="200"/>
+              </a:spcAft>
+            </a:pPr>
+            <a:r>
+              <a:rPr sz="500" b="0">
+                <a:solidFill>
+                  <a:srgbClr val="0F2B46"/>
+                </a:solidFill>
+                <a:latin typeface="微软雅黑"/>
+                <a:ea typeface="微软雅黑"/>
+                <a:cs typeface="微软雅黑"/>
+              </a:rPr>
+              <a:t/>
+            </a:r>
+          </a:p>
+          <a:p>
+            <a:pPr>
+              <a:lnSpc>
+                <a:spcPct val="130000"/>
+              </a:lnSpc>
+              <a:spcBef>
+                <a:spcPts val="0"/>
+              </a:spcBef>
+              <a:spcAft>
+                <a:spcPts val="200"/>
+              </a:spcAft>
+            </a:pPr>
+            <a:r>
+              <a:rPr sz="1050" b="1">
+                <a:solidFill>
+                  <a:srgbClr val="3263A7"/>
+                </a:solidFill>
+                <a:latin typeface="微软雅黑"/>
+                <a:ea typeface="微软雅黑"/>
+                <a:cs typeface="微软雅黑"/>
+              </a:rPr>
+              <a:t>安徽信力共擎 · 已对接方案</a:t>
+            </a:r>
+          </a:p>
+          <a:p>
+            <a:pPr>
+              <a:lnSpc>
+                <a:spcPct val="130000"/>
+              </a:lnSpc>
+              <a:spcBef>
+                <a:spcPts val="0"/>
+              </a:spcBef>
+              <a:spcAft>
+                <a:spcPts val="200"/>
+              </a:spcAft>
+            </a:pPr>
+            <a:r>
+              <a:rPr sz="900" b="0">
+                <a:solidFill>
+                  <a:srgbClr val="0F2B46"/>
+                </a:solidFill>
+                <a:latin typeface="微软雅黑"/>
+                <a:ea typeface="微软雅黑"/>
+                <a:cs typeface="微软雅黑"/>
+              </a:rPr>
+              <a:t>关键设备智能监测方案，含硬件安装、软件调试、云平台数据分析及算法迭代</a:t>
+            </a:r>
+          </a:p>
+          <a:p>
+            <a:pPr>
+              <a:lnSpc>
+                <a:spcPct val="130000"/>
+              </a:lnSpc>
+              <a:spcBef>
+                <a:spcPts val="0"/>
+              </a:spcBef>
+              <a:spcAft>
+                <a:spcPts val="200"/>
+              </a:spcAft>
+            </a:pPr>
+            <a:r>
+              <a:rPr sz="500" b="0">
+                <a:solidFill>
+                  <a:srgbClr val="0F2B46"/>
+                </a:solidFill>
+                <a:latin typeface="微软雅黑"/>
+                <a:ea typeface="微软雅黑"/>
+                <a:cs typeface="微软雅黑"/>
+              </a:rPr>
+              <a:t/>
+            </a:r>
+          </a:p>
+          <a:p>
+            <a:pPr>
+              <a:lnSpc>
+                <a:spcPct val="130000"/>
+              </a:lnSpc>
+              <a:spcBef>
+                <a:spcPts val="0"/>
+              </a:spcBef>
+              <a:spcAft>
+                <a:spcPts val="200"/>
+              </a:spcAft>
+            </a:pPr>
+            <a:r>
+              <a:rPr sz="1050" b="1">
+                <a:solidFill>
+                  <a:srgbClr val="3263A7"/>
+                </a:solidFill>
+                <a:latin typeface="微软雅黑"/>
+                <a:ea typeface="微软雅黑"/>
+                <a:cs typeface="微软雅黑"/>
+              </a:rPr>
+              <a:t>埃森哲 · 会议交流方案</a:t>
+            </a:r>
+          </a:p>
+          <a:p>
+            <a:pPr>
+              <a:lnSpc>
+                <a:spcPct val="130000"/>
+              </a:lnSpc>
+              <a:spcBef>
+                <a:spcPts val="0"/>
+              </a:spcBef>
+              <a:spcAft>
+                <a:spcPts val="200"/>
+              </a:spcAft>
+            </a:pPr>
+            <a:r>
+              <a:rPr sz="900" b="0">
+                <a:solidFill>
+                  <a:srgbClr val="0F2B46"/>
+                </a:solidFill>
+                <a:latin typeface="微软雅黑"/>
+                <a:ea typeface="微软雅黑"/>
+                <a:cs typeface="微软雅黑"/>
+              </a:rPr>
+              <a:t>5 层架构 + 6 阶段闭环：多源信号 → 健康分 → 业务影响 → 智能体根因分析 → 处置建议 → 人工核查</a:t>
+            </a:r>
+          </a:p>
+          <a:p>
+            <a:pPr>
+              <a:lnSpc>
+                <a:spcPct val="130000"/>
+              </a:lnSpc>
+              <a:spcBef>
+                <a:spcPts val="0"/>
+              </a:spcBef>
+              <a:spcAft>
+                <a:spcPts val="200"/>
+              </a:spcAft>
+            </a:pPr>
+            <a:r>
+              <a:rPr sz="900" b="0">
+                <a:solidFill>
+                  <a:srgbClr val="FF7E3D"/>
+                </a:solidFill>
+                <a:latin typeface="微软雅黑"/>
+                <a:ea typeface="微软雅黑"/>
+                <a:cs typeface="微软雅黑"/>
+              </a:rPr>
+              <a:t>底层：知识图谱与历史数据双向验证机制</a:t>
+            </a:r>
+          </a:p>
+        </p:txBody>
+      </p:sp>
+      <p:sp>
+        <p:nvSpPr>
+          <p:cNvPr id="10" name="Rectangle 9"/>
+          <p:cNvSpPr/>
+          <p:nvPr/>
+        </p:nvSpPr>
+        <p:spPr>
+          <a:xfrm>
+            <a:off x="4754880" y="1051560"/>
+            <a:ext cx="4114800" cy="411480"/>
+          </a:xfrm>
+          <a:prstGeom prst="rect">
+            <a:avLst/>
+          </a:prstGeom>
+          <a:solidFill>
+            <a:srgbClr val="FF7E3D"/>
+          </a:solidFill>
+          <a:ln>
+            <a:noFill/>
+          </a:ln>
+        </p:spPr>
+        <p:style>
+          <a:lnRef idx="1">
+            <a:schemeClr val="accent1"/>
+          </a:lnRef>
+          <a:fillRef idx="3">
+            <a:schemeClr val="accent1"/>
+          </a:fillRef>
+          <a:effectRef idx="2">
+            <a:schemeClr val="accent1"/>
+          </a:effectRef>
+          <a:fontRef idx="minor">
+            <a:schemeClr val="lt1"/>
+          </a:fontRef>
+        </p:style>
+        <p:txBody>
+          <a:bodyPr rtlCol="0" anchor="ctr" lIns="50000" rIns="50000" tIns="30000" bIns="30000"/>
+          <a:lstStyle/>
+          <a:p>
+            <a:pPr algn="ctr"/>
+            <a:r>
+              <a:rPr sz="1200" b="1">
+                <a:solidFill>
+                  <a:srgbClr val="FFFFFF"/>
+                </a:solidFill>
+                <a:latin typeface="微软雅黑"/>
+                <a:ea typeface="微软雅黑"/>
+                <a:cs typeface="微软雅黑"/>
+              </a:rPr>
+              <a:t>启动前需整理 4 类信息</a:t>
+            </a:r>
+          </a:p>
+        </p:txBody>
+      </p:sp>
+      <p:sp>
+        <p:nvSpPr>
+          <p:cNvPr id="11" name="Rectangle 10"/>
+          <p:cNvSpPr/>
+          <p:nvPr/>
+        </p:nvSpPr>
+        <p:spPr>
+          <a:xfrm>
+            <a:off x="4754880" y="1463039"/>
+            <a:ext cx="4114800" cy="3108960"/>
+          </a:xfrm>
+          <a:prstGeom prst="rect">
+            <a:avLst/>
+          </a:prstGeom>
+          <a:solidFill>
+            <a:srgbClr val="FFFFFF"/>
+          </a:solidFill>
+          <a:ln w="9525">
+            <a:solidFill>
+              <a:srgbClr val="DCE3EF"/>
+            </a:solidFill>
+          </a:ln>
+        </p:spPr>
+        <p:style>
+          <a:lnRef idx="1">
+            <a:schemeClr val="accent1"/>
+          </a:lnRef>
+          <a:fillRef idx="3">
+            <a:schemeClr val="accent1"/>
+          </a:fillRef>
+          <a:effectRef idx="2">
+            <a:schemeClr val="accent1"/>
+          </a:effectRef>
+          <a:fontRef idx="minor">
+            <a:schemeClr val="lt1"/>
+          </a:fontRef>
+        </p:style>
+        <p:txBody>
+          <a:bodyPr rtlCol="0" anchor="ctr"/>
+          <a:lstStyle/>
+          <a:p>
+            <a:pPr algn="ctr"/>
+          </a:p>
+        </p:txBody>
+      </p:sp>
+      <p:sp>
+        <p:nvSpPr>
+          <p:cNvPr id="12" name="TextBox 11"/>
+          <p:cNvSpPr txBox="1"/>
+          <p:nvPr/>
+        </p:nvSpPr>
+        <p:spPr>
+          <a:xfrm>
+            <a:off x="4828032" y="1508760"/>
+            <a:ext cx="3968496" cy="3017520"/>
+          </a:xfrm>
+          <a:prstGeom prst="rect">
+            <a:avLst/>
+          </a:prstGeom>
+          <a:noFill/>
+        </p:spPr>
+        <p:txBody>
+          <a:bodyPr wrap="square" tIns="50000" lIns="0" rIns="0" bIns="50000">
+            <a:spAutoFit/>
+          </a:bodyPr>
+          <a:lstStyle/>
+          <a:p>
+            <a:pPr>
+              <a:lnSpc>
+                <a:spcPct val="130000"/>
+              </a:lnSpc>
+              <a:spcBef>
+                <a:spcPts val="0"/>
+              </a:spcBef>
+              <a:spcAft>
+                <a:spcPts val="200"/>
+              </a:spcAft>
+            </a:pPr>
+            <a:r>
+              <a:rPr sz="1100" b="1">
+                <a:solidFill>
+                  <a:srgbClr val="00366A"/>
+                </a:solidFill>
+                <a:latin typeface="微软雅黑"/>
+                <a:ea typeface="微软雅黑"/>
+                <a:cs typeface="微软雅黑"/>
+              </a:rPr>
+              <a:t>① 设备清单</a:t>
+            </a:r>
+          </a:p>
+          <a:p>
+            <a:pPr>
+              <a:lnSpc>
+                <a:spcPct val="130000"/>
+              </a:lnSpc>
+              <a:spcBef>
+                <a:spcPts val="0"/>
+              </a:spcBef>
+              <a:spcAft>
+                <a:spcPts val="200"/>
+              </a:spcAft>
+            </a:pPr>
+            <a:r>
+              <a:rPr sz="950" b="0">
+                <a:solidFill>
+                  <a:srgbClr val="0F2B46"/>
+                </a:solidFill>
+                <a:latin typeface="微软雅黑"/>
+                <a:ea typeface="微软雅黑"/>
+                <a:cs typeface="微软雅黑"/>
+              </a:rPr>
+              <a:t>厂区 + 设备类型 + 数量 + 关键作用 + 当前维护模式</a:t>
+            </a:r>
+          </a:p>
+          <a:p>
+            <a:pPr>
+              <a:lnSpc>
+                <a:spcPct val="130000"/>
+              </a:lnSpc>
+              <a:spcBef>
+                <a:spcPts val="0"/>
+              </a:spcBef>
+              <a:spcAft>
+                <a:spcPts val="200"/>
+              </a:spcAft>
+            </a:pPr>
+            <a:r>
+              <a:rPr sz="600" b="0">
+                <a:solidFill>
+                  <a:srgbClr val="0F2B46"/>
+                </a:solidFill>
+                <a:latin typeface="微软雅黑"/>
+                <a:ea typeface="微软雅黑"/>
+                <a:cs typeface="微软雅黑"/>
+              </a:rPr>
+              <a:t/>
+            </a:r>
+          </a:p>
+          <a:p>
+            <a:pPr>
+              <a:lnSpc>
+                <a:spcPct val="130000"/>
+              </a:lnSpc>
+              <a:spcBef>
+                <a:spcPts val="0"/>
+              </a:spcBef>
+              <a:spcAft>
+                <a:spcPts val="200"/>
+              </a:spcAft>
+            </a:pPr>
+            <a:r>
+              <a:rPr sz="1100" b="1">
+                <a:solidFill>
+                  <a:srgbClr val="00366A"/>
+                </a:solidFill>
+                <a:latin typeface="微软雅黑"/>
+                <a:ea typeface="微软雅黑"/>
+                <a:cs typeface="微软雅黑"/>
+              </a:rPr>
+              <a:t>② 主要故障</a:t>
+            </a:r>
+          </a:p>
+          <a:p>
+            <a:pPr>
+              <a:lnSpc>
+                <a:spcPct val="130000"/>
+              </a:lnSpc>
+              <a:spcBef>
+                <a:spcPts val="0"/>
+              </a:spcBef>
+              <a:spcAft>
+                <a:spcPts val="200"/>
+              </a:spcAft>
+            </a:pPr>
+            <a:r>
+              <a:rPr sz="950" b="0">
+                <a:solidFill>
+                  <a:srgbClr val="0F2B46"/>
+                </a:solidFill>
+                <a:latin typeface="微软雅黑"/>
+                <a:ea typeface="微软雅黑"/>
+                <a:cs typeface="微软雅黑"/>
+              </a:rPr>
+              <a:t>按损失 / OEE 排序 Top 5 类故障 + 频次 + 损失估算</a:t>
+            </a:r>
+          </a:p>
+          <a:p>
+            <a:pPr>
+              <a:lnSpc>
+                <a:spcPct val="130000"/>
+              </a:lnSpc>
+              <a:spcBef>
+                <a:spcPts val="0"/>
+              </a:spcBef>
+              <a:spcAft>
+                <a:spcPts val="200"/>
+              </a:spcAft>
+            </a:pPr>
+            <a:r>
+              <a:rPr sz="600" b="0">
+                <a:solidFill>
+                  <a:srgbClr val="0F2B46"/>
+                </a:solidFill>
+                <a:latin typeface="微软雅黑"/>
+                <a:ea typeface="微软雅黑"/>
+                <a:cs typeface="微软雅黑"/>
+              </a:rPr>
+              <a:t/>
+            </a:r>
+          </a:p>
+          <a:p>
+            <a:pPr>
+              <a:lnSpc>
+                <a:spcPct val="130000"/>
+              </a:lnSpc>
+              <a:spcBef>
+                <a:spcPts val="0"/>
+              </a:spcBef>
+              <a:spcAft>
+                <a:spcPts val="200"/>
+              </a:spcAft>
+            </a:pPr>
+            <a:r>
+              <a:rPr sz="1100" b="1">
+                <a:solidFill>
+                  <a:srgbClr val="00366A"/>
+                </a:solidFill>
+                <a:latin typeface="微软雅黑"/>
+                <a:ea typeface="微软雅黑"/>
+                <a:cs typeface="微软雅黑"/>
+              </a:rPr>
+              <a:t>③ 数据基础</a:t>
+            </a:r>
+          </a:p>
+          <a:p>
+            <a:pPr>
+              <a:lnSpc>
+                <a:spcPct val="130000"/>
+              </a:lnSpc>
+              <a:spcBef>
+                <a:spcPts val="0"/>
+              </a:spcBef>
+              <a:spcAft>
+                <a:spcPts val="200"/>
+              </a:spcAft>
+            </a:pPr>
+            <a:r>
+              <a:rPr sz="950" b="0">
+                <a:solidFill>
+                  <a:srgbClr val="0F2B46"/>
+                </a:solidFill>
+                <a:latin typeface="微软雅黑"/>
+                <a:ea typeface="微软雅黑"/>
+                <a:cs typeface="微软雅黑"/>
+              </a:rPr>
+              <a:t>传感器清单 + 采集频次 + 历史数据时长 + 异常案例数据完整度</a:t>
+            </a:r>
+          </a:p>
+          <a:p>
+            <a:pPr>
+              <a:lnSpc>
+                <a:spcPct val="130000"/>
+              </a:lnSpc>
+              <a:spcBef>
+                <a:spcPts val="0"/>
+              </a:spcBef>
+              <a:spcAft>
+                <a:spcPts val="200"/>
+              </a:spcAft>
+            </a:pPr>
+            <a:r>
+              <a:rPr sz="600" b="0">
+                <a:solidFill>
+                  <a:srgbClr val="0F2B46"/>
+                </a:solidFill>
+                <a:latin typeface="微软雅黑"/>
+                <a:ea typeface="微软雅黑"/>
+                <a:cs typeface="微软雅黑"/>
+              </a:rPr>
+              <a:t/>
+            </a:r>
+          </a:p>
+          <a:p>
+            <a:pPr>
+              <a:lnSpc>
+                <a:spcPct val="130000"/>
+              </a:lnSpc>
+              <a:spcBef>
+                <a:spcPts val="0"/>
+              </a:spcBef>
+              <a:spcAft>
+                <a:spcPts val="200"/>
+              </a:spcAft>
+            </a:pPr>
+            <a:r>
+              <a:rPr sz="1100" b="1">
+                <a:solidFill>
+                  <a:srgbClr val="00366A"/>
+                </a:solidFill>
+                <a:latin typeface="微软雅黑"/>
+                <a:ea typeface="微软雅黑"/>
+                <a:cs typeface="微软雅黑"/>
+              </a:rPr>
+              <a:t>④ 先验知识</a:t>
+            </a:r>
+          </a:p>
+          <a:p>
+            <a:pPr>
+              <a:lnSpc>
+                <a:spcPct val="130000"/>
+              </a:lnSpc>
+              <a:spcBef>
+                <a:spcPts val="0"/>
+              </a:spcBef>
+              <a:spcAft>
+                <a:spcPts val="200"/>
+              </a:spcAft>
+            </a:pPr>
+            <a:r>
+              <a:rPr sz="950" b="0">
+                <a:solidFill>
+                  <a:srgbClr val="0F2B46"/>
+                </a:solidFill>
+                <a:latin typeface="微软雅黑"/>
+                <a:ea typeface="微软雅黑"/>
+                <a:cs typeface="微软雅黑"/>
+              </a:rPr>
+              <a:t>历史 RCA 报告 + 偏差报告 + FTA / FMEA + 供应商技术资料</a:t>
+            </a:r>
+          </a:p>
+        </p:txBody>
+      </p:sp>
+    </p:spTree>
+  </p:cSld>
+  <p:clrMapOvr>
+    <a:masterClrMapping/>
+  </p:clrMapOvr>
+</p:sld>
+</file>
+
+<file path=ppt/slides/slide11.xml><?xml version="1.0" encoding="utf-8"?>
+<p:sld xmlns:a="http://schemas.openxmlformats.org/drawingml/2006/main" xmlns:p="http://schemas.openxmlformats.org/presentationml/2006/main" xmlns:r="http://schemas.openxmlformats.org/officeDocument/2006/relationships">
+  <p:cSld>
+    <p:spTree>
+      <p:nvGrpSpPr>
+        <p:cNvPr id="1" name=""/>
+        <p:cNvGrpSpPr/>
+        <p:nvPr/>
+      </p:nvGrpSpPr>
+      <p:grpSpPr/>
+      <p:sp>
+        <p:nvSpPr>
+          <p:cNvPr id="2" name="TextBox 1"/>
+          <p:cNvSpPr txBox="1"/>
+          <p:nvPr/>
+        </p:nvSpPr>
+        <p:spPr>
+          <a:xfrm>
+            <a:off x="3200400" y="182880"/>
+            <a:ext cx="5760720" cy="457200"/>
+          </a:xfrm>
+          <a:prstGeom prst="rect">
+            <a:avLst/>
+          </a:prstGeom>
+          <a:noFill/>
+        </p:spPr>
+        <p:txBody>
+          <a:bodyPr wrap="none" lIns="0">
+            <a:spAutoFit/>
+          </a:bodyPr>
+          <a:lstStyle/>
+          <a:p>
+            <a:pPr algn="r"/>
+            <a:r>
+              <a:rPr sz="2000" b="1">
+                <a:solidFill>
+                  <a:srgbClr val="00366A"/>
+                </a:solidFill>
+                <a:latin typeface="微软雅黑"/>
+                <a:ea typeface="微软雅黑"/>
+                <a:cs typeface="微软雅黑"/>
+              </a:rPr>
+              <a:t>下半年推进节奏与关键成果</a:t>
+            </a:r>
+          </a:p>
+        </p:txBody>
+      </p:sp>
+      <p:sp>
+        <p:nvSpPr>
+          <p:cNvPr id="3" name="Rectangle 2"/>
+          <p:cNvSpPr/>
+          <p:nvPr/>
+        </p:nvSpPr>
+        <p:spPr>
+          <a:xfrm>
+            <a:off x="274320" y="777240"/>
+            <a:ext cx="8595360" cy="30000"/>
+          </a:xfrm>
+          <a:prstGeom prst="rect">
+            <a:avLst/>
+          </a:prstGeom>
+          <a:solidFill>
+            <a:srgbClr val="FF7E3D"/>
+          </a:solidFill>
+          <a:ln>
+            <a:noFill/>
+          </a:ln>
+        </p:spPr>
+        <p:style>
+          <a:lnRef idx="1">
+            <a:schemeClr val="accent1"/>
+          </a:lnRef>
+          <a:fillRef idx="3">
+            <a:schemeClr val="accent1"/>
+          </a:fillRef>
+          <a:effectRef idx="2">
+            <a:schemeClr val="accent1"/>
+          </a:effectRef>
+          <a:fontRef idx="minor">
+            <a:schemeClr val="lt1"/>
+          </a:fontRef>
+        </p:style>
+        <p:txBody>
+          <a:bodyPr rtlCol="0" anchor="ctr"/>
+          <a:lstStyle/>
+          <a:p>
+            <a:pPr algn="ctr"/>
+          </a:p>
+        </p:txBody>
+      </p:sp>
+      <p:sp>
+        <p:nvSpPr>
+          <p:cNvPr id="4" name="TextBox 3"/>
+          <p:cNvSpPr txBox="1"/>
+          <p:nvPr/>
+        </p:nvSpPr>
+        <p:spPr>
+          <a:xfrm>
+            <a:off x="274320" y="4892040"/>
+            <a:ext cx="2103120" cy="182880"/>
+          </a:xfrm>
+          <a:prstGeom prst="rect">
+            <a:avLst/>
+          </a:prstGeom>
+          <a:noFill/>
+        </p:spPr>
+        <p:txBody>
+          <a:bodyPr wrap="square" lIns="0" rIns="0" tIns="0" bIns="0">
+            <a:spAutoFit/>
+          </a:bodyPr>
+          <a:lstStyle/>
+          <a:p>
+            <a:pPr algn="l"/>
+            <a:r>
+              <a:rPr sz="750" b="0">
+                <a:solidFill>
+                  <a:srgbClr val="7A89A8"/>
+                </a:solidFill>
+                <a:latin typeface="Arial"/>
+                <a:ea typeface="微软雅黑"/>
+                <a:cs typeface="微软雅黑"/>
+              </a:rPr>
+              <a:t>www.asymchem.com.cn</a:t>
+            </a:r>
+          </a:p>
+        </p:txBody>
+      </p:sp>
+      <p:sp>
+        <p:nvSpPr>
+          <p:cNvPr id="5" name="TextBox 4"/>
+          <p:cNvSpPr txBox="1"/>
+          <p:nvPr/>
+        </p:nvSpPr>
+        <p:spPr>
+          <a:xfrm>
+            <a:off x="2377440" y="4892040"/>
+            <a:ext cx="2286000" cy="182880"/>
+          </a:xfrm>
+          <a:prstGeom prst="rect">
+            <a:avLst/>
+          </a:prstGeom>
+          <a:noFill/>
+        </p:spPr>
+        <p:txBody>
+          <a:bodyPr wrap="square" lIns="0" rIns="0" tIns="0" bIns="0">
+            <a:spAutoFit/>
+          </a:bodyPr>
+          <a:lstStyle/>
+          <a:p>
+            <a:pPr algn="l"/>
+            <a:r>
+              <a:rPr sz="700" b="0">
+                <a:solidFill>
+                  <a:srgbClr val="7A89A8"/>
+                </a:solidFill>
+                <a:latin typeface="Arial"/>
+                <a:ea typeface="微软雅黑"/>
+                <a:cs typeface="微软雅黑"/>
+              </a:rPr>
+              <a:t>Stock Code: 002821.SZ / 6821.HK</a:t>
+            </a:r>
+          </a:p>
+        </p:txBody>
+      </p:sp>
+      <p:sp>
+        <p:nvSpPr>
+          <p:cNvPr id="6" name="TextBox 5"/>
+          <p:cNvSpPr txBox="1"/>
+          <p:nvPr/>
+        </p:nvSpPr>
+        <p:spPr>
+          <a:xfrm>
+            <a:off x="8595360" y="4892040"/>
+            <a:ext cx="457200" cy="182880"/>
+          </a:xfrm>
+          <a:prstGeom prst="rect">
+            <a:avLst/>
+          </a:prstGeom>
+          <a:noFill/>
+        </p:spPr>
+        <p:txBody>
+          <a:bodyPr wrap="square" lIns="0" rIns="0" tIns="0" bIns="0">
+            <a:spAutoFit/>
+          </a:bodyPr>
+          <a:lstStyle/>
+          <a:p>
+            <a:pPr algn="r"/>
+            <a:r>
+              <a:rPr sz="800" b="0">
+                <a:solidFill>
+                  <a:srgbClr val="7A89A8"/>
+                </a:solidFill>
+                <a:latin typeface="Arial"/>
+                <a:ea typeface="微软雅黑"/>
+                <a:cs typeface="微软雅黑"/>
+              </a:rPr>
+              <a:t>11</a:t>
+            </a:r>
+          </a:p>
+        </p:txBody>
+      </p:sp>
+      <p:sp>
+        <p:nvSpPr>
+          <p:cNvPr id="7" name="TextBox 6"/>
+          <p:cNvSpPr txBox="1"/>
+          <p:nvPr/>
+        </p:nvSpPr>
+        <p:spPr>
+          <a:xfrm>
+            <a:off x="274320" y="914400"/>
+            <a:ext cx="8595360" cy="457200"/>
+          </a:xfrm>
+          <a:prstGeom prst="rect">
+            <a:avLst/>
+          </a:prstGeom>
+          <a:noFill/>
+        </p:spPr>
+        <p:txBody>
+          <a:bodyPr wrap="none" lIns="0">
+            <a:spAutoFit/>
+          </a:bodyPr>
+          <a:lstStyle/>
+          <a:p>
+            <a:pPr algn="l"/>
+            <a:r>
+              <a:rPr sz="1100">
+                <a:solidFill>
+                  <a:srgbClr val="2C3E50"/>
+                </a:solidFill>
+                <a:latin typeface="微软雅黑"/>
+                <a:ea typeface="微软雅黑"/>
+                <a:cs typeface="微软雅黑"/>
+              </a:rPr>
+              <a:t>以"低风险 + 高显示度"为原则推动落地 —— 完成设备预测性维护 4 类信息整理，同步推动 1-2 个短周期方向 PoC，形成实证支撑集团 AI 战略下一步决策。</a:t>
+            </a:r>
+          </a:p>
+        </p:txBody>
+      </p:sp>
+      <p:sp>
+        <p:nvSpPr>
+          <p:cNvPr id="8" name="TextBox 7"/>
+          <p:cNvSpPr txBox="1"/>
+          <p:nvPr/>
+        </p:nvSpPr>
+        <p:spPr>
+          <a:xfrm>
+            <a:off x="274320" y="1554480"/>
+            <a:ext cx="2743200" cy="274320"/>
+          </a:xfrm>
+          <a:prstGeom prst="rect">
+            <a:avLst/>
+          </a:prstGeom>
+          <a:noFill/>
+        </p:spPr>
+        <p:txBody>
+          <a:bodyPr wrap="none">
+            <a:spAutoFit/>
+          </a:bodyPr>
+          <a:lstStyle/>
+          <a:p>
+            <a:pPr algn="l"/>
+            <a:r>
+              <a:rPr sz="1000" b="1">
+                <a:solidFill>
+                  <a:srgbClr val="FF7E3D"/>
+                </a:solidFill>
+                <a:latin typeface="Arial"/>
+              </a:rPr>
+              <a:t>第 3 季度</a:t>
+            </a:r>
+          </a:p>
+        </p:txBody>
+      </p:sp>
+      <p:sp>
+        <p:nvSpPr>
+          <p:cNvPr id="9" name="Rectangle 8"/>
+          <p:cNvSpPr/>
+          <p:nvPr/>
+        </p:nvSpPr>
+        <p:spPr>
+          <a:xfrm>
+            <a:off x="274320" y="1828800"/>
+            <a:ext cx="2743200" cy="1280160"/>
+          </a:xfrm>
+          <a:prstGeom prst="rect">
+            <a:avLst/>
+          </a:prstGeom>
+          <a:solidFill>
+            <a:srgbClr val="E7EEFB"/>
+          </a:solidFill>
+          <a:ln w="9525">
+            <a:solidFill>
+              <a:srgbClr val="DCE3EF"/>
+            </a:solidFill>
+          </a:ln>
+        </p:spPr>
+        <p:style>
+          <a:lnRef idx="1">
+            <a:schemeClr val="accent1"/>
+          </a:lnRef>
+          <a:fillRef idx="3">
+            <a:schemeClr val="accent1"/>
+          </a:fillRef>
+          <a:effectRef idx="2">
+            <a:schemeClr val="accent1"/>
+          </a:effectRef>
+          <a:fontRef idx="minor">
+            <a:schemeClr val="lt1"/>
+          </a:fontRef>
+        </p:style>
+        <p:txBody>
+          <a:bodyPr rtlCol="0" anchor="ctr"/>
+          <a:lstStyle/>
+          <a:p>
+            <a:pPr algn="ctr"/>
+          </a:p>
+        </p:txBody>
+      </p:sp>
+      <p:sp>
+        <p:nvSpPr>
+          <p:cNvPr id="10" name="Rectangle 9"/>
+          <p:cNvSpPr/>
+          <p:nvPr/>
+        </p:nvSpPr>
+        <p:spPr>
+          <a:xfrm>
+            <a:off x="274320" y="1828800"/>
+            <a:ext cx="2743200" cy="50000"/>
+          </a:xfrm>
+          <a:prstGeom prst="rect">
+            <a:avLst/>
+          </a:prstGeom>
+          <a:solidFill>
+            <a:srgbClr val="FF7E3D"/>
+          </a:solidFill>
+          <a:ln>
+            <a:noFill/>
+          </a:ln>
+        </p:spPr>
+        <p:style>
+          <a:lnRef idx="1">
+            <a:schemeClr val="accent1"/>
+          </a:lnRef>
+          <a:fillRef idx="3">
+            <a:schemeClr val="accent1"/>
+          </a:fillRef>
+          <a:effectRef idx="2">
+            <a:schemeClr val="accent1"/>
+          </a:effectRef>
+          <a:fontRef idx="minor">
+            <a:schemeClr val="lt1"/>
+          </a:fontRef>
+        </p:style>
+        <p:txBody>
+          <a:bodyPr rtlCol="0" anchor="ctr"/>
+          <a:lstStyle/>
+          <a:p>
+            <a:pPr algn="ctr"/>
+          </a:p>
+        </p:txBody>
+      </p:sp>
+      <p:sp>
+        <p:nvSpPr>
+          <p:cNvPr id="11" name="TextBox 10"/>
+          <p:cNvSpPr txBox="1"/>
+          <p:nvPr/>
+        </p:nvSpPr>
+        <p:spPr>
+          <a:xfrm>
+            <a:off x="411479" y="1920240"/>
+            <a:ext cx="2468880" cy="1188720"/>
+          </a:xfrm>
+          <a:prstGeom prst="rect">
+            <a:avLst/>
+          </a:prstGeom>
+          <a:noFill/>
+        </p:spPr>
+        <p:txBody>
+          <a:bodyPr wrap="square" tIns="50000" lIns="0" rIns="0" bIns="50000">
+            <a:spAutoFit/>
+          </a:bodyPr>
+          <a:lstStyle/>
+          <a:p>
+            <a:pPr>
+              <a:lnSpc>
+                <a:spcPct val="130000"/>
+              </a:lnSpc>
+              <a:spcBef>
+                <a:spcPts val="0"/>
+              </a:spcBef>
+              <a:spcAft>
+                <a:spcPts val="200"/>
+              </a:spcAft>
+            </a:pPr>
+            <a:r>
+              <a:rPr sz="1200" b="1">
+                <a:solidFill>
+                  <a:srgbClr val="00366A"/>
+                </a:solidFill>
+                <a:latin typeface="微软雅黑"/>
+                <a:ea typeface="微软雅黑"/>
+                <a:cs typeface="微软雅黑"/>
+              </a:rPr>
+              <a:t>信息整理与方案对齐</a:t>
+            </a:r>
+          </a:p>
+          <a:p>
+            <a:pPr>
+              <a:lnSpc>
+                <a:spcPct val="130000"/>
+              </a:lnSpc>
+              <a:spcBef>
+                <a:spcPts val="0"/>
+              </a:spcBef>
+              <a:spcAft>
+                <a:spcPts val="200"/>
+              </a:spcAft>
+            </a:pPr>
+            <a:r>
+              <a:rPr sz="400" b="0">
+                <a:solidFill>
+                  <a:srgbClr val="0F2B46"/>
+                </a:solidFill>
+                <a:latin typeface="微软雅黑"/>
+                <a:ea typeface="微软雅黑"/>
+                <a:cs typeface="微软雅黑"/>
+              </a:rPr>
+              <a:t/>
+            </a:r>
+          </a:p>
+          <a:p>
+            <a:pPr>
+              <a:lnSpc>
+                <a:spcPct val="130000"/>
+              </a:lnSpc>
+              <a:spcBef>
+                <a:spcPts val="0"/>
+              </a:spcBef>
+              <a:spcAft>
+                <a:spcPts val="200"/>
+              </a:spcAft>
+            </a:pPr>
+            <a:r>
+              <a:rPr sz="850" b="0">
+                <a:solidFill>
+                  <a:srgbClr val="2C3E50"/>
+                </a:solidFill>
+                <a:latin typeface="微软雅黑"/>
+                <a:ea typeface="微软雅黑"/>
+                <a:cs typeface="微软雅黑"/>
+              </a:rPr>
+              <a:t>完成 PdM 4 类信息内部整理</a:t>
+            </a:r>
+          </a:p>
+          <a:p>
+            <a:pPr>
+              <a:lnSpc>
+                <a:spcPct val="130000"/>
+              </a:lnSpc>
+              <a:spcBef>
+                <a:spcPts val="0"/>
+              </a:spcBef>
+              <a:spcAft>
+                <a:spcPts val="200"/>
+              </a:spcAft>
+            </a:pPr>
+            <a:r>
+              <a:rPr sz="850" b="0">
+                <a:solidFill>
+                  <a:srgbClr val="2C3E50"/>
+                </a:solidFill>
+                <a:latin typeface="微软雅黑"/>
+                <a:ea typeface="微软雅黑"/>
+                <a:cs typeface="微软雅黑"/>
+              </a:rPr>
+              <a:t>深化三方方案对比</a:t>
+            </a:r>
+          </a:p>
+          <a:p>
+            <a:pPr>
+              <a:lnSpc>
+                <a:spcPct val="130000"/>
+              </a:lnSpc>
+              <a:spcBef>
+                <a:spcPts val="0"/>
+              </a:spcBef>
+              <a:spcAft>
+                <a:spcPts val="200"/>
+              </a:spcAft>
+            </a:pPr>
+            <a:r>
+              <a:rPr sz="850" b="0">
+                <a:solidFill>
+                  <a:srgbClr val="2C3E50"/>
+                </a:solidFill>
+                <a:latin typeface="微软雅黑"/>
+                <a:ea typeface="微软雅黑"/>
+                <a:cs typeface="微软雅黑"/>
+              </a:rPr>
+              <a:t>选定 1 个起步设备类型</a:t>
+            </a:r>
+          </a:p>
+        </p:txBody>
+      </p:sp>
+      <p:sp>
+        <p:nvSpPr>
+          <p:cNvPr id="12" name="Right Arrow 11"/>
+          <p:cNvSpPr/>
+          <p:nvPr/>
+        </p:nvSpPr>
+        <p:spPr>
+          <a:xfrm>
+            <a:off x="3044951" y="2331720"/>
+            <a:ext cx="137160" cy="274320"/>
+          </a:xfrm>
+          <a:prstGeom prst="rightArrow">
+            <a:avLst/>
+          </a:prstGeom>
+          <a:solidFill>
+            <a:srgbClr val="FF7E3D"/>
+          </a:solidFill>
+          <a:ln>
+            <a:noFill/>
+          </a:ln>
+        </p:spPr>
+        <p:style>
+          <a:lnRef idx="1">
+            <a:schemeClr val="accent1"/>
+          </a:lnRef>
+          <a:fillRef idx="3">
+            <a:schemeClr val="accent1"/>
+          </a:fillRef>
+          <a:effectRef idx="2">
+            <a:schemeClr val="accent1"/>
+          </a:effectRef>
+          <a:fontRef idx="minor">
+            <a:schemeClr val="lt1"/>
+          </a:fontRef>
+        </p:style>
+        <p:txBody>
+          <a:bodyPr rtlCol="0" anchor="ctr"/>
+          <a:lstStyle/>
+          <a:p>
+            <a:pPr algn="ctr"/>
+          </a:p>
+        </p:txBody>
+      </p:sp>
+      <p:sp>
+        <p:nvSpPr>
+          <p:cNvPr id="13" name="TextBox 12"/>
+          <p:cNvSpPr txBox="1"/>
+          <p:nvPr/>
+        </p:nvSpPr>
+        <p:spPr>
+          <a:xfrm>
+            <a:off x="3200400" y="1554480"/>
+            <a:ext cx="2743200" cy="274320"/>
+          </a:xfrm>
+          <a:prstGeom prst="rect">
+            <a:avLst/>
+          </a:prstGeom>
+          <a:noFill/>
+        </p:spPr>
+        <p:txBody>
+          <a:bodyPr wrap="none">
+            <a:spAutoFit/>
+          </a:bodyPr>
+          <a:lstStyle/>
+          <a:p>
+            <a:pPr algn="l"/>
+            <a:r>
+              <a:rPr sz="1000" b="1">
+                <a:solidFill>
+                  <a:srgbClr val="FF7E3D"/>
+                </a:solidFill>
+                <a:latin typeface="Arial"/>
+              </a:rPr>
+              <a:t>第 4 季度</a:t>
+            </a:r>
+          </a:p>
+        </p:txBody>
+      </p:sp>
+      <p:sp>
+        <p:nvSpPr>
+          <p:cNvPr id="14" name="Rectangle 13"/>
+          <p:cNvSpPr/>
+          <p:nvPr/>
+        </p:nvSpPr>
+        <p:spPr>
+          <a:xfrm>
+            <a:off x="3200400" y="1828800"/>
+            <a:ext cx="2743200" cy="1280160"/>
+          </a:xfrm>
+          <a:prstGeom prst="rect">
+            <a:avLst/>
+          </a:prstGeom>
+          <a:solidFill>
+            <a:srgbClr val="E7EEFB"/>
+          </a:solidFill>
+          <a:ln w="9525">
+            <a:solidFill>
+              <a:srgbClr val="DCE3EF"/>
+            </a:solidFill>
+          </a:ln>
+        </p:spPr>
+        <p:style>
+          <a:lnRef idx="1">
+            <a:schemeClr val="accent1"/>
+          </a:lnRef>
+          <a:fillRef idx="3">
+            <a:schemeClr val="accent1"/>
+          </a:fillRef>
+          <a:effectRef idx="2">
+            <a:schemeClr val="accent1"/>
+          </a:effectRef>
+          <a:fontRef idx="minor">
+            <a:schemeClr val="lt1"/>
+          </a:fontRef>
+        </p:style>
+        <p:txBody>
+          <a:bodyPr rtlCol="0" anchor="ctr"/>
+          <a:lstStyle/>
+          <a:p>
+            <a:pPr algn="ctr"/>
+          </a:p>
+        </p:txBody>
+      </p:sp>
+      <p:sp>
+        <p:nvSpPr>
+          <p:cNvPr id="15" name="Rectangle 14"/>
+          <p:cNvSpPr/>
+          <p:nvPr/>
+        </p:nvSpPr>
+        <p:spPr>
+          <a:xfrm>
+            <a:off x="3200400" y="1828800"/>
+            <a:ext cx="2743200" cy="50000"/>
+          </a:xfrm>
+          <a:prstGeom prst="rect">
+            <a:avLst/>
+          </a:prstGeom>
+          <a:solidFill>
+            <a:srgbClr val="FF7E3D"/>
+          </a:solidFill>
+          <a:ln>
+            <a:noFill/>
+          </a:ln>
+        </p:spPr>
+        <p:style>
+          <a:lnRef idx="1">
+            <a:schemeClr val="accent1"/>
+          </a:lnRef>
+          <a:fillRef idx="3">
+            <a:schemeClr val="accent1"/>
+          </a:fillRef>
+          <a:effectRef idx="2">
+            <a:schemeClr val="accent1"/>
+          </a:effectRef>
+          <a:fontRef idx="minor">
+            <a:schemeClr val="lt1"/>
+          </a:fontRef>
+        </p:style>
+        <p:txBody>
+          <a:bodyPr rtlCol="0" anchor="ctr"/>
+          <a:lstStyle/>
+          <a:p>
+            <a:pPr algn="ctr"/>
+          </a:p>
+        </p:txBody>
+      </p:sp>
+      <p:sp>
+        <p:nvSpPr>
+          <p:cNvPr id="16" name="TextBox 15"/>
+          <p:cNvSpPr txBox="1"/>
+          <p:nvPr/>
+        </p:nvSpPr>
+        <p:spPr>
+          <a:xfrm>
+            <a:off x="3337560" y="1920240"/>
+            <a:ext cx="2468880" cy="1188720"/>
+          </a:xfrm>
+          <a:prstGeom prst="rect">
+            <a:avLst/>
+          </a:prstGeom>
+          <a:noFill/>
+        </p:spPr>
+        <p:txBody>
+          <a:bodyPr wrap="square" tIns="50000" lIns="0" rIns="0" bIns="50000">
+            <a:spAutoFit/>
+          </a:bodyPr>
+          <a:lstStyle/>
+          <a:p>
+            <a:pPr>
+              <a:lnSpc>
+                <a:spcPct val="130000"/>
+              </a:lnSpc>
+              <a:spcBef>
+                <a:spcPts val="0"/>
+              </a:spcBef>
+              <a:spcAft>
+                <a:spcPts val="200"/>
+              </a:spcAft>
+            </a:pPr>
+            <a:r>
+              <a:rPr sz="1200" b="1">
+                <a:solidFill>
+                  <a:srgbClr val="00366A"/>
+                </a:solidFill>
+                <a:latin typeface="微软雅黑"/>
+                <a:ea typeface="微软雅黑"/>
+                <a:cs typeface="微软雅黑"/>
+              </a:rPr>
+              <a:t>PoC 启动</a:t>
+            </a:r>
+          </a:p>
+          <a:p>
+            <a:pPr>
+              <a:lnSpc>
+                <a:spcPct val="130000"/>
+              </a:lnSpc>
+              <a:spcBef>
+                <a:spcPts val="0"/>
+              </a:spcBef>
+              <a:spcAft>
+                <a:spcPts val="200"/>
+              </a:spcAft>
+            </a:pPr>
+            <a:r>
+              <a:rPr sz="400" b="0">
+                <a:solidFill>
+                  <a:srgbClr val="0F2B46"/>
+                </a:solidFill>
+                <a:latin typeface="微软雅黑"/>
+                <a:ea typeface="微软雅黑"/>
+                <a:cs typeface="微软雅黑"/>
+              </a:rPr>
+              <a:t/>
+            </a:r>
+          </a:p>
+          <a:p>
+            <a:pPr>
+              <a:lnSpc>
+                <a:spcPct val="130000"/>
+              </a:lnSpc>
+              <a:spcBef>
+                <a:spcPts val="0"/>
+              </a:spcBef>
+              <a:spcAft>
+                <a:spcPts val="200"/>
+              </a:spcAft>
+            </a:pPr>
+            <a:r>
+              <a:rPr sz="850" b="0">
+                <a:solidFill>
+                  <a:srgbClr val="2C3E50"/>
+                </a:solidFill>
+                <a:latin typeface="微软雅黑"/>
+                <a:ea typeface="微软雅黑"/>
+                <a:cs typeface="微软雅黑"/>
+              </a:rPr>
+              <a:t>选定的 1 类设备开展概念验证</a:t>
+            </a:r>
+          </a:p>
+          <a:p>
+            <a:pPr>
+              <a:lnSpc>
+                <a:spcPct val="130000"/>
+              </a:lnSpc>
+              <a:spcBef>
+                <a:spcPts val="0"/>
+              </a:spcBef>
+              <a:spcAft>
+                <a:spcPts val="200"/>
+              </a:spcAft>
+            </a:pPr>
+            <a:r>
+              <a:rPr sz="850" b="0">
+                <a:solidFill>
+                  <a:srgbClr val="2C3E50"/>
+                </a:solidFill>
+                <a:latin typeface="微软雅黑"/>
+                <a:ea typeface="微软雅黑"/>
+                <a:cs typeface="微软雅黑"/>
+              </a:rPr>
+              <a:t>数据采集 + 算法建模 + 知识图谱</a:t>
+            </a:r>
+          </a:p>
+          <a:p>
+            <a:pPr>
+              <a:lnSpc>
+                <a:spcPct val="130000"/>
+              </a:lnSpc>
+              <a:spcBef>
+                <a:spcPts val="0"/>
+              </a:spcBef>
+              <a:spcAft>
+                <a:spcPts val="200"/>
+              </a:spcAft>
+            </a:pPr>
+            <a:r>
+              <a:rPr sz="850" b="0">
+                <a:solidFill>
+                  <a:srgbClr val="2C3E50"/>
+                </a:solidFill>
+                <a:latin typeface="微软雅黑"/>
+                <a:ea typeface="微软雅黑"/>
+                <a:cs typeface="微软雅黑"/>
+              </a:rPr>
+              <a:t>同步启动 1 个短周期方向</a:t>
+            </a:r>
+          </a:p>
+        </p:txBody>
+      </p:sp>
+      <p:sp>
+        <p:nvSpPr>
+          <p:cNvPr id="17" name="Right Arrow 16"/>
+          <p:cNvSpPr/>
+          <p:nvPr/>
+        </p:nvSpPr>
+        <p:spPr>
+          <a:xfrm>
+            <a:off x="5971031" y="2331720"/>
+            <a:ext cx="137160" cy="274320"/>
+          </a:xfrm>
+          <a:prstGeom prst="rightArrow">
+            <a:avLst/>
+          </a:prstGeom>
+          <a:solidFill>
+            <a:srgbClr val="FF7E3D"/>
+          </a:solidFill>
+          <a:ln>
+            <a:noFill/>
+          </a:ln>
+        </p:spPr>
+        <p:style>
+          <a:lnRef idx="1">
+            <a:schemeClr val="accent1"/>
+          </a:lnRef>
+          <a:fillRef idx="3">
+            <a:schemeClr val="accent1"/>
+          </a:fillRef>
+          <a:effectRef idx="2">
+            <a:schemeClr val="accent1"/>
+          </a:effectRef>
+          <a:fontRef idx="minor">
+            <a:schemeClr val="lt1"/>
+          </a:fontRef>
+        </p:style>
+        <p:txBody>
+          <a:bodyPr rtlCol="0" anchor="ctr"/>
+          <a:lstStyle/>
+          <a:p>
+            <a:pPr algn="ctr"/>
+          </a:p>
+        </p:txBody>
+      </p:sp>
+      <p:sp>
+        <p:nvSpPr>
+          <p:cNvPr id="18" name="TextBox 17"/>
+          <p:cNvSpPr txBox="1"/>
+          <p:nvPr/>
+        </p:nvSpPr>
+        <p:spPr>
+          <a:xfrm>
+            <a:off x="6126480" y="1554480"/>
+            <a:ext cx="2743200" cy="274320"/>
+          </a:xfrm>
+          <a:prstGeom prst="rect">
+            <a:avLst/>
+          </a:prstGeom>
+          <a:noFill/>
+        </p:spPr>
+        <p:txBody>
+          <a:bodyPr wrap="none">
+            <a:spAutoFit/>
+          </a:bodyPr>
+          <a:lstStyle/>
+          <a:p>
+            <a:pPr algn="l"/>
+            <a:r>
+              <a:rPr sz="1000" b="1">
+                <a:solidFill>
+                  <a:srgbClr val="FF7E3D"/>
+                </a:solidFill>
+                <a:latin typeface="Arial"/>
+              </a:rPr>
+              <a:t>明年 Q1</a:t>
+            </a:r>
+          </a:p>
+        </p:txBody>
+      </p:sp>
+      <p:sp>
+        <p:nvSpPr>
+          <p:cNvPr id="19" name="Rectangle 18"/>
+          <p:cNvSpPr/>
+          <p:nvPr/>
+        </p:nvSpPr>
+        <p:spPr>
+          <a:xfrm>
+            <a:off x="6126480" y="1828800"/>
+            <a:ext cx="2743200" cy="1280160"/>
+          </a:xfrm>
+          <a:prstGeom prst="rect">
+            <a:avLst/>
+          </a:prstGeom>
+          <a:solidFill>
+            <a:srgbClr val="E7EEFB"/>
+          </a:solidFill>
+          <a:ln w="9525">
+            <a:solidFill>
+              <a:srgbClr val="DCE3EF"/>
+            </a:solidFill>
+          </a:ln>
+        </p:spPr>
+        <p:style>
+          <a:lnRef idx="1">
+            <a:schemeClr val="accent1"/>
+          </a:lnRef>
+          <a:fillRef idx="3">
+            <a:schemeClr val="accent1"/>
+          </a:fillRef>
+          <a:effectRef idx="2">
+            <a:schemeClr val="accent1"/>
+          </a:effectRef>
+          <a:fontRef idx="minor">
+            <a:schemeClr val="lt1"/>
+          </a:fontRef>
+        </p:style>
+        <p:txBody>
+          <a:bodyPr rtlCol="0" anchor="ctr"/>
+          <a:lstStyle/>
+          <a:p>
+            <a:pPr algn="ctr"/>
+          </a:p>
+        </p:txBody>
+      </p:sp>
+      <p:sp>
+        <p:nvSpPr>
+          <p:cNvPr id="20" name="Rectangle 19"/>
+          <p:cNvSpPr/>
+          <p:nvPr/>
+        </p:nvSpPr>
+        <p:spPr>
+          <a:xfrm>
+            <a:off x="6126480" y="1828800"/>
+            <a:ext cx="2743200" cy="50000"/>
+          </a:xfrm>
+          <a:prstGeom prst="rect">
+            <a:avLst/>
+          </a:prstGeom>
+          <a:solidFill>
+            <a:srgbClr val="FF7E3D"/>
+          </a:solidFill>
+          <a:ln>
+            <a:noFill/>
+          </a:ln>
+        </p:spPr>
+        <p:style>
+          <a:lnRef idx="1">
+            <a:schemeClr val="accent1"/>
+          </a:lnRef>
+          <a:fillRef idx="3">
+            <a:schemeClr val="accent1"/>
+          </a:fillRef>
+          <a:effectRef idx="2">
+            <a:schemeClr val="accent1"/>
+          </a:effectRef>
+          <a:fontRef idx="minor">
+            <a:schemeClr val="lt1"/>
+          </a:fontRef>
+        </p:style>
+        <p:txBody>
+          <a:bodyPr rtlCol="0" anchor="ctr"/>
+          <a:lstStyle/>
+          <a:p>
+            <a:pPr algn="ctr"/>
+          </a:p>
+        </p:txBody>
+      </p:sp>
+      <p:sp>
+        <p:nvSpPr>
+          <p:cNvPr id="21" name="TextBox 20"/>
+          <p:cNvSpPr txBox="1"/>
+          <p:nvPr/>
+        </p:nvSpPr>
+        <p:spPr>
+          <a:xfrm>
+            <a:off x="6263640" y="1920240"/>
+            <a:ext cx="2468880" cy="1188720"/>
+          </a:xfrm>
+          <a:prstGeom prst="rect">
+            <a:avLst/>
+          </a:prstGeom>
+          <a:noFill/>
+        </p:spPr>
+        <p:txBody>
+          <a:bodyPr wrap="square" tIns="50000" lIns="0" rIns="0" bIns="50000">
+            <a:spAutoFit/>
+          </a:bodyPr>
+          <a:lstStyle/>
+          <a:p>
+            <a:pPr>
+              <a:lnSpc>
+                <a:spcPct val="130000"/>
+              </a:lnSpc>
+              <a:spcBef>
+                <a:spcPts val="0"/>
+              </a:spcBef>
+              <a:spcAft>
+                <a:spcPts val="200"/>
+              </a:spcAft>
+            </a:pPr>
+            <a:r>
+              <a:rPr sz="1200" b="1">
+                <a:solidFill>
+                  <a:srgbClr val="00366A"/>
+                </a:solidFill>
+                <a:latin typeface="微软雅黑"/>
+                <a:ea typeface="微软雅黑"/>
+                <a:cs typeface="微软雅黑"/>
+              </a:rPr>
+              <a:t>试点评估与推广</a:t>
+            </a:r>
+          </a:p>
+          <a:p>
+            <a:pPr>
+              <a:lnSpc>
+                <a:spcPct val="130000"/>
+              </a:lnSpc>
+              <a:spcBef>
+                <a:spcPts val="0"/>
+              </a:spcBef>
+              <a:spcAft>
+                <a:spcPts val="200"/>
+              </a:spcAft>
+            </a:pPr>
+            <a:r>
+              <a:rPr sz="400" b="0">
+                <a:solidFill>
+                  <a:srgbClr val="0F2B46"/>
+                </a:solidFill>
+                <a:latin typeface="微软雅黑"/>
+                <a:ea typeface="微软雅黑"/>
+                <a:cs typeface="微软雅黑"/>
+              </a:rPr>
+              <a:t/>
+            </a:r>
+          </a:p>
+          <a:p>
+            <a:pPr>
+              <a:lnSpc>
+                <a:spcPct val="130000"/>
+              </a:lnSpc>
+              <a:spcBef>
+                <a:spcPts val="0"/>
+              </a:spcBef>
+              <a:spcAft>
+                <a:spcPts val="200"/>
+              </a:spcAft>
+            </a:pPr>
+            <a:r>
+              <a:rPr sz="850" b="0">
+                <a:solidFill>
+                  <a:srgbClr val="2C3E50"/>
+                </a:solidFill>
+                <a:latin typeface="微软雅黑"/>
+                <a:ea typeface="微软雅黑"/>
+                <a:cs typeface="微软雅黑"/>
+              </a:rPr>
+              <a:t>PoC 结果评估</a:t>
+            </a:r>
+          </a:p>
+          <a:p>
+            <a:pPr>
+              <a:lnSpc>
+                <a:spcPct val="130000"/>
+              </a:lnSpc>
+              <a:spcBef>
+                <a:spcPts val="0"/>
+              </a:spcBef>
+              <a:spcAft>
+                <a:spcPts val="200"/>
+              </a:spcAft>
+            </a:pPr>
+            <a:r>
+              <a:rPr sz="850" b="0">
+                <a:solidFill>
+                  <a:srgbClr val="2C3E50"/>
+                </a:solidFill>
+                <a:latin typeface="微软雅黑"/>
+                <a:ea typeface="微软雅黑"/>
+                <a:cs typeface="微软雅黑"/>
+              </a:rPr>
+              <a:t>决定扩展至其他设备 / 厂区</a:t>
+            </a:r>
+          </a:p>
+          <a:p>
+            <a:pPr>
+              <a:lnSpc>
+                <a:spcPct val="130000"/>
+              </a:lnSpc>
+              <a:spcBef>
+                <a:spcPts val="0"/>
+              </a:spcBef>
+              <a:spcAft>
+                <a:spcPts val="200"/>
+              </a:spcAft>
+            </a:pPr>
+            <a:r>
+              <a:rPr sz="850" b="0">
+                <a:solidFill>
+                  <a:srgbClr val="2C3E50"/>
+                </a:solidFill>
+                <a:latin typeface="微软雅黑"/>
+                <a:ea typeface="微软雅黑"/>
+                <a:cs typeface="微软雅黑"/>
+              </a:rPr>
+              <a:t>形成集团 AI 战略实证依据</a:t>
+            </a:r>
+          </a:p>
+        </p:txBody>
+      </p:sp>
+      <p:sp>
+        <p:nvSpPr>
+          <p:cNvPr id="22" name="TextBox 21"/>
+          <p:cNvSpPr txBox="1"/>
+          <p:nvPr/>
+        </p:nvSpPr>
+        <p:spPr>
+          <a:xfrm>
+            <a:off x="274320" y="3383280"/>
+            <a:ext cx="8595360" cy="320040"/>
+          </a:xfrm>
+          <a:prstGeom prst="rect">
+            <a:avLst/>
+          </a:prstGeom>
+          <a:noFill/>
+        </p:spPr>
+        <p:txBody>
+          <a:bodyPr wrap="none">
+            <a:spAutoFit/>
+          </a:bodyPr>
+          <a:lstStyle/>
+          <a:p>
+            <a:r>
+              <a:rPr sz="1400" b="1">
+                <a:solidFill>
+                  <a:srgbClr val="00366A"/>
+                </a:solidFill>
+                <a:latin typeface="微软雅黑"/>
+                <a:ea typeface="微软雅黑"/>
+                <a:cs typeface="微软雅黑"/>
+              </a:rPr>
+              <a:t>关键成果目标</a:t>
+            </a:r>
+          </a:p>
+        </p:txBody>
+      </p:sp>
+      <p:sp>
+        <p:nvSpPr>
+          <p:cNvPr id="23" name="Rectangle 22"/>
+          <p:cNvSpPr/>
+          <p:nvPr/>
+        </p:nvSpPr>
+        <p:spPr>
+          <a:xfrm>
+            <a:off x="274320" y="3794760"/>
+            <a:ext cx="2743200" cy="274320"/>
+          </a:xfrm>
+          <a:prstGeom prst="rect">
+            <a:avLst/>
+          </a:prstGeom>
+          <a:solidFill>
+            <a:srgbClr val="3263A7"/>
+          </a:solidFill>
+          <a:ln>
+            <a:noFill/>
+          </a:ln>
+        </p:spPr>
+        <p:style>
+          <a:lnRef idx="1">
+            <a:schemeClr val="accent1"/>
+          </a:lnRef>
+          <a:fillRef idx="3">
+            <a:schemeClr val="accent1"/>
+          </a:fillRef>
+          <a:effectRef idx="2">
+            <a:schemeClr val="accent1"/>
+          </a:effectRef>
+          <a:fontRef idx="minor">
+            <a:schemeClr val="lt1"/>
+          </a:fontRef>
+        </p:style>
+        <p:txBody>
+          <a:bodyPr rtlCol="0" anchor="ctr" lIns="50000" rIns="50000" tIns="30000" bIns="30000"/>
+          <a:lstStyle/>
+          <a:p>
+            <a:pPr algn="ctr"/>
+            <a:r>
+              <a:rPr sz="1000" b="1">
+                <a:solidFill>
+                  <a:srgbClr val="FFFFFF"/>
+                </a:solidFill>
+                <a:latin typeface="微软雅黑"/>
+                <a:ea typeface="微软雅黑"/>
+                <a:cs typeface="微软雅黑"/>
+              </a:rPr>
+              <a:t>短期 · 3-4 季度</a:t>
+            </a:r>
+          </a:p>
+        </p:txBody>
+      </p:sp>
+      <p:sp>
+        <p:nvSpPr>
+          <p:cNvPr id="24" name="Rectangle 23"/>
+          <p:cNvSpPr/>
+          <p:nvPr/>
+        </p:nvSpPr>
+        <p:spPr>
+          <a:xfrm>
+            <a:off x="274320" y="4069080"/>
+            <a:ext cx="2743200" cy="685800"/>
+          </a:xfrm>
+          <a:prstGeom prst="rect">
+            <a:avLst/>
+          </a:prstGeom>
+          <a:solidFill>
+            <a:srgbClr val="FFFFFF"/>
+          </a:solidFill>
+          <a:ln w="9525">
+            <a:solidFill>
+              <a:srgbClr val="DCE3EF"/>
+            </a:solidFill>
+          </a:ln>
+        </p:spPr>
+        <p:style>
+          <a:lnRef idx="1">
+            <a:schemeClr val="accent1"/>
+          </a:lnRef>
+          <a:fillRef idx="3">
+            <a:schemeClr val="accent1"/>
+          </a:fillRef>
+          <a:effectRef idx="2">
+            <a:schemeClr val="accent1"/>
+          </a:effectRef>
+          <a:fontRef idx="minor">
+            <a:schemeClr val="lt1"/>
+          </a:fontRef>
+        </p:style>
+        <p:txBody>
+          <a:bodyPr rtlCol="0" anchor="ctr"/>
+          <a:lstStyle/>
+          <a:p>
+            <a:pPr algn="ctr"/>
+          </a:p>
+        </p:txBody>
+      </p:sp>
+      <p:sp>
+        <p:nvSpPr>
+          <p:cNvPr id="25" name="TextBox 24"/>
+          <p:cNvSpPr txBox="1"/>
+          <p:nvPr/>
+        </p:nvSpPr>
+        <p:spPr>
+          <a:xfrm>
+            <a:off x="347472" y="4114800"/>
+            <a:ext cx="2596896" cy="594360"/>
+          </a:xfrm>
+          <a:prstGeom prst="rect">
+            <a:avLst/>
+          </a:prstGeom>
+          <a:noFill/>
+        </p:spPr>
+        <p:txBody>
+          <a:bodyPr wrap="square" tIns="50000" lIns="0" rIns="0" bIns="50000">
+            <a:spAutoFit/>
+          </a:bodyPr>
+          <a:lstStyle/>
+          <a:p>
+            <a:pPr>
+              <a:lnSpc>
+                <a:spcPct val="130000"/>
+              </a:lnSpc>
+              <a:spcBef>
+                <a:spcPts val="0"/>
+              </a:spcBef>
+              <a:spcAft>
+                <a:spcPts val="200"/>
+              </a:spcAft>
+            </a:pPr>
+            <a:r>
+              <a:rPr sz="800" b="0">
+                <a:solidFill>
+                  <a:srgbClr val="0F2B46"/>
+                </a:solidFill>
+                <a:latin typeface="微软雅黑"/>
+                <a:ea typeface="微软雅黑"/>
+                <a:cs typeface="微软雅黑"/>
+              </a:rPr>
+              <a:t>• 完成 PdM 4 类信息整理 + 三方深度对比</a:t>
+            </a:r>
+          </a:p>
+          <a:p>
+            <a:pPr>
+              <a:lnSpc>
+                <a:spcPct val="130000"/>
+              </a:lnSpc>
+              <a:spcBef>
+                <a:spcPts val="0"/>
+              </a:spcBef>
+              <a:spcAft>
+                <a:spcPts val="200"/>
+              </a:spcAft>
+            </a:pPr>
+            <a:r>
+              <a:rPr sz="800" b="0">
+                <a:solidFill>
+                  <a:srgbClr val="0F2B46"/>
+                </a:solidFill>
+                <a:latin typeface="微软雅黑"/>
+                <a:ea typeface="微软雅黑"/>
+                <a:cs typeface="微软雅黑"/>
+              </a:rPr>
+              <a:t>• 1-2 个短周期方向 PoC 启动</a:t>
+            </a:r>
+          </a:p>
+          <a:p>
+            <a:pPr>
+              <a:lnSpc>
+                <a:spcPct val="130000"/>
+              </a:lnSpc>
+              <a:spcBef>
+                <a:spcPts val="0"/>
+              </a:spcBef>
+              <a:spcAft>
+                <a:spcPts val="200"/>
+              </a:spcAft>
+            </a:pPr>
+            <a:r>
+              <a:rPr sz="800" b="0">
+                <a:solidFill>
+                  <a:srgbClr val="0F2B46"/>
+                </a:solidFill>
+                <a:latin typeface="微软雅黑"/>
+                <a:ea typeface="微软雅黑"/>
+                <a:cs typeface="微软雅黑"/>
+              </a:rPr>
+              <a:t>• 生产看板氨基酸项目功能上线</a:t>
+            </a:r>
+          </a:p>
+        </p:txBody>
+      </p:sp>
+      <p:sp>
+        <p:nvSpPr>
+          <p:cNvPr id="26" name="Rectangle 25"/>
+          <p:cNvSpPr/>
+          <p:nvPr/>
+        </p:nvSpPr>
+        <p:spPr>
+          <a:xfrm>
+            <a:off x="3200400" y="3794760"/>
+            <a:ext cx="2743200" cy="274320"/>
+          </a:xfrm>
+          <a:prstGeom prst="rect">
+            <a:avLst/>
+          </a:prstGeom>
+          <a:solidFill>
+            <a:srgbClr val="00366A"/>
+          </a:solidFill>
+          <a:ln>
+            <a:noFill/>
+          </a:ln>
+        </p:spPr>
+        <p:style>
+          <a:lnRef idx="1">
+            <a:schemeClr val="accent1"/>
+          </a:lnRef>
+          <a:fillRef idx="3">
+            <a:schemeClr val="accent1"/>
+          </a:fillRef>
+          <a:effectRef idx="2">
+            <a:schemeClr val="accent1"/>
+          </a:effectRef>
+          <a:fontRef idx="minor">
+            <a:schemeClr val="lt1"/>
+          </a:fontRef>
+        </p:style>
+        <p:txBody>
+          <a:bodyPr rtlCol="0" anchor="ctr" lIns="50000" rIns="50000" tIns="30000" bIns="30000"/>
+          <a:lstStyle/>
+          <a:p>
+            <a:pPr algn="ctr"/>
+            <a:r>
+              <a:rPr sz="1000" b="1">
+                <a:solidFill>
+                  <a:srgbClr val="FFFFFF"/>
+                </a:solidFill>
+                <a:latin typeface="微软雅黑"/>
+                <a:ea typeface="微软雅黑"/>
+                <a:cs typeface="微软雅黑"/>
+              </a:rPr>
+              <a:t>中期 · 明年 H1</a:t>
+            </a:r>
+          </a:p>
+        </p:txBody>
+      </p:sp>
+      <p:sp>
+        <p:nvSpPr>
+          <p:cNvPr id="27" name="Rectangle 26"/>
+          <p:cNvSpPr/>
+          <p:nvPr/>
+        </p:nvSpPr>
+        <p:spPr>
+          <a:xfrm>
+            <a:off x="3200400" y="4069080"/>
+            <a:ext cx="2743200" cy="685800"/>
+          </a:xfrm>
+          <a:prstGeom prst="rect">
+            <a:avLst/>
+          </a:prstGeom>
+          <a:solidFill>
+            <a:srgbClr val="FFFFFF"/>
+          </a:solidFill>
+          <a:ln w="9525">
+            <a:solidFill>
+              <a:srgbClr val="DCE3EF"/>
+            </a:solidFill>
+          </a:ln>
+        </p:spPr>
+        <p:style>
+          <a:lnRef idx="1">
+            <a:schemeClr val="accent1"/>
+          </a:lnRef>
+          <a:fillRef idx="3">
+            <a:schemeClr val="accent1"/>
+          </a:fillRef>
+          <a:effectRef idx="2">
+            <a:schemeClr val="accent1"/>
+          </a:effectRef>
+          <a:fontRef idx="minor">
+            <a:schemeClr val="lt1"/>
+          </a:fontRef>
+        </p:style>
+        <p:txBody>
+          <a:bodyPr rtlCol="0" anchor="ctr"/>
+          <a:lstStyle/>
+          <a:p>
+            <a:pPr algn="ctr"/>
+          </a:p>
+        </p:txBody>
+      </p:sp>
+      <p:sp>
+        <p:nvSpPr>
+          <p:cNvPr id="28" name="TextBox 27"/>
+          <p:cNvSpPr txBox="1"/>
+          <p:nvPr/>
+        </p:nvSpPr>
+        <p:spPr>
+          <a:xfrm>
+            <a:off x="3273552" y="4114800"/>
+            <a:ext cx="2596896" cy="594360"/>
+          </a:xfrm>
+          <a:prstGeom prst="rect">
+            <a:avLst/>
+          </a:prstGeom>
+          <a:noFill/>
+        </p:spPr>
+        <p:txBody>
+          <a:bodyPr wrap="square" tIns="50000" lIns="0" rIns="0" bIns="50000">
+            <a:spAutoFit/>
+          </a:bodyPr>
+          <a:lstStyle/>
+          <a:p>
+            <a:pPr>
+              <a:lnSpc>
+                <a:spcPct val="130000"/>
+              </a:lnSpc>
+              <a:spcBef>
+                <a:spcPts val="0"/>
+              </a:spcBef>
+              <a:spcAft>
+                <a:spcPts val="200"/>
+              </a:spcAft>
+            </a:pPr>
+            <a:r>
+              <a:rPr sz="800" b="0">
+                <a:solidFill>
+                  <a:srgbClr val="0F2B46"/>
+                </a:solidFill>
+                <a:latin typeface="微软雅黑"/>
+                <a:ea typeface="微软雅黑"/>
+                <a:cs typeface="微软雅黑"/>
+              </a:rPr>
+              <a:t>• PdM 起步设备 PoC 完成 + 效果评估</a:t>
+            </a:r>
+          </a:p>
+          <a:p>
+            <a:pPr>
+              <a:lnSpc>
+                <a:spcPct val="130000"/>
+              </a:lnSpc>
+              <a:spcBef>
+                <a:spcPts val="0"/>
+              </a:spcBef>
+              <a:spcAft>
+                <a:spcPts val="200"/>
+              </a:spcAft>
+            </a:pPr>
+            <a:r>
+              <a:rPr sz="800" b="0">
+                <a:solidFill>
+                  <a:srgbClr val="0F2B46"/>
+                </a:solidFill>
+                <a:latin typeface="微软雅黑"/>
+                <a:ea typeface="微软雅黑"/>
+                <a:cs typeface="微软雅黑"/>
+              </a:rPr>
+              <a:t>• 至少 1 个 AI 方向进入 Pilot 阶段</a:t>
+            </a:r>
+          </a:p>
+          <a:p>
+            <a:pPr>
+              <a:lnSpc>
+                <a:spcPct val="130000"/>
+              </a:lnSpc>
+              <a:spcBef>
+                <a:spcPts val="0"/>
+              </a:spcBef>
+              <a:spcAft>
+                <a:spcPts val="200"/>
+              </a:spcAft>
+            </a:pPr>
+            <a:r>
+              <a:rPr sz="800" b="0">
+                <a:solidFill>
+                  <a:srgbClr val="0F2B46"/>
+                </a:solidFill>
+                <a:latin typeface="微软雅黑"/>
+                <a:ea typeface="微软雅黑"/>
+                <a:cs typeface="微软雅黑"/>
+              </a:rPr>
+              <a:t>• 供应商合作策略形成明确共识</a:t>
+            </a:r>
+          </a:p>
+        </p:txBody>
+      </p:sp>
+      <p:sp>
+        <p:nvSpPr>
+          <p:cNvPr id="29" name="Rectangle 28"/>
+          <p:cNvSpPr/>
+          <p:nvPr/>
+        </p:nvSpPr>
+        <p:spPr>
+          <a:xfrm>
+            <a:off x="6126480" y="3794760"/>
+            <a:ext cx="2743200" cy="274320"/>
+          </a:xfrm>
+          <a:prstGeom prst="rect">
+            <a:avLst/>
+          </a:prstGeom>
+          <a:solidFill>
+            <a:srgbClr val="FF7E3D"/>
+          </a:solidFill>
+          <a:ln>
+            <a:noFill/>
+          </a:ln>
+        </p:spPr>
+        <p:style>
+          <a:lnRef idx="1">
+            <a:schemeClr val="accent1"/>
+          </a:lnRef>
+          <a:fillRef idx="3">
+            <a:schemeClr val="accent1"/>
+          </a:fillRef>
+          <a:effectRef idx="2">
+            <a:schemeClr val="accent1"/>
+          </a:effectRef>
+          <a:fontRef idx="minor">
+            <a:schemeClr val="lt1"/>
+          </a:fontRef>
+        </p:style>
+        <p:txBody>
+          <a:bodyPr rtlCol="0" anchor="ctr" lIns="50000" rIns="50000" tIns="30000" bIns="30000"/>
+          <a:lstStyle/>
+          <a:p>
+            <a:pPr algn="ctr"/>
+            <a:r>
+              <a:rPr sz="1000" b="1">
+                <a:solidFill>
+                  <a:srgbClr val="FFFFFF"/>
+                </a:solidFill>
+                <a:latin typeface="微软雅黑"/>
+                <a:ea typeface="微软雅黑"/>
+                <a:cs typeface="微软雅黑"/>
+              </a:rPr>
+              <a:t>长期方向</a:t>
+            </a:r>
+          </a:p>
+        </p:txBody>
+      </p:sp>
+      <p:sp>
+        <p:nvSpPr>
+          <p:cNvPr id="30" name="Rectangle 29"/>
+          <p:cNvSpPr/>
+          <p:nvPr/>
+        </p:nvSpPr>
+        <p:spPr>
+          <a:xfrm>
+            <a:off x="6126480" y="4069080"/>
+            <a:ext cx="2743200" cy="685800"/>
+          </a:xfrm>
+          <a:prstGeom prst="rect">
+            <a:avLst/>
+          </a:prstGeom>
+          <a:solidFill>
+            <a:srgbClr val="FFFFFF"/>
+          </a:solidFill>
+          <a:ln w="9525">
+            <a:solidFill>
+              <a:srgbClr val="DCE3EF"/>
+            </a:solidFill>
+          </a:ln>
+        </p:spPr>
+        <p:style>
+          <a:lnRef idx="1">
+            <a:schemeClr val="accent1"/>
+          </a:lnRef>
+          <a:fillRef idx="3">
+            <a:schemeClr val="accent1"/>
+          </a:fillRef>
+          <a:effectRef idx="2">
+            <a:schemeClr val="accent1"/>
+          </a:effectRef>
+          <a:fontRef idx="minor">
+            <a:schemeClr val="lt1"/>
+          </a:fontRef>
+        </p:style>
+        <p:txBody>
+          <a:bodyPr rtlCol="0" anchor="ctr"/>
+          <a:lstStyle/>
+          <a:p>
+            <a:pPr algn="ctr"/>
+          </a:p>
+        </p:txBody>
+      </p:sp>
+      <p:sp>
+        <p:nvSpPr>
+          <p:cNvPr id="31" name="TextBox 30"/>
+          <p:cNvSpPr txBox="1"/>
+          <p:nvPr/>
+        </p:nvSpPr>
+        <p:spPr>
+          <a:xfrm>
+            <a:off x="6199632" y="4114800"/>
+            <a:ext cx="2596896" cy="594360"/>
+          </a:xfrm>
+          <a:prstGeom prst="rect">
+            <a:avLst/>
+          </a:prstGeom>
+          <a:noFill/>
+        </p:spPr>
+        <p:txBody>
+          <a:bodyPr wrap="square" tIns="50000" lIns="0" rIns="0" bIns="50000">
+            <a:spAutoFit/>
+          </a:bodyPr>
+          <a:lstStyle/>
+          <a:p>
+            <a:pPr>
+              <a:lnSpc>
+                <a:spcPct val="130000"/>
+              </a:lnSpc>
+              <a:spcBef>
+                <a:spcPts val="0"/>
+              </a:spcBef>
+              <a:spcAft>
+                <a:spcPts val="200"/>
+              </a:spcAft>
+            </a:pPr>
+            <a:r>
+              <a:rPr sz="800" b="0">
+                <a:solidFill>
+                  <a:srgbClr val="0F2B46"/>
+                </a:solidFill>
+                <a:latin typeface="微软雅黑"/>
+                <a:ea typeface="微软雅黑"/>
+                <a:cs typeface="微软雅黑"/>
+              </a:rPr>
+              <a:t>• 6 大 AI 方向按业务优先级分批落地</a:t>
+            </a:r>
+          </a:p>
+          <a:p>
+            <a:pPr>
+              <a:lnSpc>
+                <a:spcPct val="130000"/>
+              </a:lnSpc>
+              <a:spcBef>
+                <a:spcPts val="0"/>
+              </a:spcBef>
+              <a:spcAft>
+                <a:spcPts val="200"/>
+              </a:spcAft>
+            </a:pPr>
+            <a:r>
+              <a:rPr sz="800" b="0">
+                <a:solidFill>
+                  <a:srgbClr val="0F2B46"/>
+                </a:solidFill>
+                <a:latin typeface="微软雅黑"/>
+                <a:ea typeface="微软雅黑"/>
+                <a:cs typeface="微软雅黑"/>
+              </a:rPr>
+              <a:t>• 沉淀凯莱英自主的 AI 应用能力</a:t>
+            </a:r>
+          </a:p>
+          <a:p>
+            <a:pPr>
+              <a:lnSpc>
+                <a:spcPct val="130000"/>
+              </a:lnSpc>
+              <a:spcBef>
+                <a:spcPts val="0"/>
+              </a:spcBef>
+              <a:spcAft>
+                <a:spcPts val="200"/>
+              </a:spcAft>
+            </a:pPr>
+            <a:r>
+              <a:rPr sz="800" b="0">
+                <a:solidFill>
+                  <a:srgbClr val="0F2B46"/>
+                </a:solidFill>
+                <a:latin typeface="微软雅黑"/>
+                <a:ea typeface="微软雅黑"/>
+                <a:cs typeface="微软雅黑"/>
+              </a:rPr>
+              <a:t>• 形成"多供应商组合 + 自主主导"格局</a:t>
             </a:r>
           </a:p>
         </p:txBody>
@@ -3308,16 +6030,64 @@
         <p:nvPr/>
       </p:nvGrpSpPr>
       <p:grpSpPr/>
-      <p:sp>
-        <p:nvSpPr>
-          <p:cNvPr id="2" name="TextBox 1"/>
+      <p:pic>
+        <p:nvPicPr>
+          <p:cNvPr id="2" name="Picture 1" descr="image16.jpg"/>
+          <p:cNvPicPr>
+            <a:picLocks noChangeAspect="1"/>
+          </p:cNvPicPr>
+          <p:nvPr/>
+        </p:nvPicPr>
+        <p:blipFill>
+          <a:blip r:embed="rId2"/>
+          <a:stretch>
+            <a:fillRect/>
+          </a:stretch>
+        </p:blipFill>
+        <p:spPr>
+          <a:xfrm>
+            <a:off x="0" y="0"/>
+            <a:ext cx="9144000" cy="5143500"/>
+          </a:xfrm>
+          <a:prstGeom prst="rect">
+            <a:avLst/>
+          </a:prstGeom>
+        </p:spPr>
+      </p:pic>
+      <p:pic>
+        <p:nvPicPr>
+          <p:cNvPr id="3" name="Picture 2" descr="slide1_shape1.png"/>
+          <p:cNvPicPr>
+            <a:picLocks noChangeAspect="1"/>
+          </p:cNvPicPr>
+          <p:nvPr/>
+        </p:nvPicPr>
+        <p:blipFill>
+          <a:blip r:embed="rId3"/>
+          <a:stretch>
+            <a:fillRect/>
+          </a:stretch>
+        </p:blipFill>
+        <p:spPr>
+          <a:xfrm>
+            <a:off x="274320" y="274320"/>
+            <a:ext cx="3474720" cy="640080"/>
+          </a:xfrm>
+          <a:prstGeom prst="rect">
+            <a:avLst/>
+          </a:prstGeom>
+        </p:spPr>
+      </p:pic>
+      <p:sp>
+        <p:nvSpPr>
+          <p:cNvPr id="4" name="TextBox 3"/>
           <p:cNvSpPr txBox="1"/>
           <p:nvPr/>
         </p:nvSpPr>
         <p:spPr>
           <a:xfrm>
-            <a:off x="3200400" y="182880"/>
-            <a:ext cx="5760720" cy="457200"/>
+            <a:off x="457200" y="1737360"/>
+            <a:ext cx="8229600" cy="457200"/>
           </a:xfrm>
           <a:prstGeom prst="rect">
             <a:avLst/>
@@ -3325,71 +6095,101 @@
           <a:noFill/>
         </p:spPr>
         <p:txBody>
-          <a:bodyPr wrap="none" lIns="0">
+          <a:bodyPr wrap="none">
             <a:spAutoFit/>
           </a:bodyPr>
           <a:lstStyle/>
           <a:p>
-            <a:pPr algn="r"/>
+            <a:pPr algn="ctr"/>
             <a:r>
               <a:rPr sz="2000" b="1">
                 <a:solidFill>
-                  <a:srgbClr val="00366A"/>
-                </a:solidFill>
-                <a:latin typeface="微软雅黑"/>
-                <a:ea typeface="微软雅黑"/>
-              </a:rPr>
-              <a:t>上半年整体进展概览</a:t>
-            </a:r>
-          </a:p>
-        </p:txBody>
-      </p:sp>
-      <p:sp>
-        <p:nvSpPr>
-          <p:cNvPr id="3" name="Rectangle 2"/>
-          <p:cNvSpPr/>
-          <p:nvPr/>
-        </p:nvSpPr>
-        <p:spPr>
-          <a:xfrm>
-            <a:off x="274320" y="777240"/>
-            <a:ext cx="8595360" cy="30000"/>
-          </a:xfrm>
-          <a:prstGeom prst="rect">
-            <a:avLst/>
-          </a:prstGeom>
-          <a:solidFill>
-            <a:srgbClr val="FF7E3D"/>
-          </a:solidFill>
-          <a:ln>
-            <a:noFill/>
-          </a:ln>
-        </p:spPr>
-        <p:style>
-          <a:lnRef idx="1">
-            <a:schemeClr val="accent1"/>
-          </a:lnRef>
-          <a:fillRef idx="3">
-            <a:schemeClr val="accent1"/>
-          </a:fillRef>
-          <a:effectRef idx="2">
-            <a:schemeClr val="accent1"/>
-          </a:effectRef>
-          <a:fontRef idx="minor">
-            <a:schemeClr val="lt1"/>
-          </a:fontRef>
-        </p:style>
-        <p:txBody>
-          <a:bodyPr rtlCol="0" anchor="ctr"/>
+                  <a:srgbClr val="FF7E3D"/>
+                </a:solidFill>
+                <a:latin typeface="Arial"/>
+              </a:rPr>
+              <a:t>PART 01</a:t>
+            </a:r>
+          </a:p>
+        </p:txBody>
+      </p:sp>
+      <p:sp>
+        <p:nvSpPr>
+          <p:cNvPr id="5" name="TextBox 4"/>
+          <p:cNvSpPr txBox="1"/>
+          <p:nvPr/>
+        </p:nvSpPr>
+        <p:spPr>
+          <a:xfrm>
+            <a:off x="457200" y="2286000"/>
+            <a:ext cx="8229600" cy="822960"/>
+          </a:xfrm>
+          <a:prstGeom prst="rect">
+            <a:avLst/>
+          </a:prstGeom>
+          <a:noFill/>
+        </p:spPr>
+        <p:txBody>
+          <a:bodyPr wrap="none">
+            <a:spAutoFit/>
+          </a:bodyPr>
           <a:lstStyle/>
           <a:p>
             <a:pPr algn="ctr"/>
-          </a:p>
-        </p:txBody>
-      </p:sp>
-      <p:sp>
-        <p:nvSpPr>
-          <p:cNvPr id="4" name="TextBox 3"/>
+            <a:r>
+              <a:rPr sz="3600" b="1">
+                <a:solidFill>
+                  <a:srgbClr val="FFFFFF"/>
+                </a:solidFill>
+                <a:latin typeface="微软雅黑"/>
+                <a:ea typeface="微软雅黑"/>
+                <a:cs typeface="微软雅黑"/>
+              </a:rPr>
+              <a:t>Sandwich 项目管理支持</a:t>
+            </a:r>
+          </a:p>
+        </p:txBody>
+      </p:sp>
+      <p:sp>
+        <p:nvSpPr>
+          <p:cNvPr id="6" name="TextBox 5"/>
+          <p:cNvSpPr txBox="1"/>
+          <p:nvPr/>
+        </p:nvSpPr>
+        <p:spPr>
+          <a:xfrm>
+            <a:off x="457200" y="3291840"/>
+            <a:ext cx="8229600" cy="365760"/>
+          </a:xfrm>
+          <a:prstGeom prst="rect">
+            <a:avLst/>
+          </a:prstGeom>
+          <a:noFill/>
+        </p:spPr>
+        <p:txBody>
+          <a:bodyPr wrap="none">
+            <a:spAutoFit/>
+          </a:bodyPr>
+          <a:lstStyle/>
+          <a:p>
+            <a:pPr algn="ctr"/>
+            <a:r>
+              <a:rPr sz="1400">
+                <a:solidFill>
+                  <a:srgbClr val="FFAA7A"/>
+                </a:solidFill>
+                <a:latin typeface="微软雅黑"/>
+                <a:ea typeface="微软雅黑"/>
+                <a:cs typeface="微软雅黑"/>
+              </a:rPr>
+              <a:t>（本部分内容待补充）</a:t>
+            </a:r>
+          </a:p>
+        </p:txBody>
+      </p:sp>
+      <p:sp>
+        <p:nvSpPr>
+          <p:cNvPr id="7" name="TextBox 6"/>
           <p:cNvSpPr txBox="1"/>
           <p:nvPr/>
         </p:nvSpPr>
@@ -3413,7 +6213,7 @@
             <a:r>
               <a:rPr sz="750" b="0">
                 <a:solidFill>
-                  <a:srgbClr val="7A89A8"/>
+                  <a:srgbClr val="FFFFFF"/>
                 </a:solidFill>
                 <a:latin typeface="Arial"/>
                 <a:ea typeface="微软雅黑"/>
@@ -3426,7 +6226,7 @@
       </p:sp>
       <p:sp>
         <p:nvSpPr>
-          <p:cNvPr id="5" name="TextBox 4"/>
+          <p:cNvPr id="8" name="TextBox 7"/>
           <p:cNvSpPr txBox="1"/>
           <p:nvPr/>
         </p:nvSpPr>
@@ -3450,7 +6250,7 @@
             <a:r>
               <a:rPr sz="700" b="0">
                 <a:solidFill>
-                  <a:srgbClr val="7A89A8"/>
+                  <a:srgbClr val="FFFFFF"/>
                 </a:solidFill>
                 <a:latin typeface="Arial"/>
                 <a:ea typeface="微软雅黑"/>
@@ -3463,7 +6263,7 @@
       </p:sp>
       <p:sp>
         <p:nvSpPr>
-          <p:cNvPr id="6" name="TextBox 5"/>
+          <p:cNvPr id="9" name="TextBox 8"/>
           <p:cNvSpPr txBox="1"/>
           <p:nvPr/>
         </p:nvSpPr>
@@ -3487,1121 +6287,13 @@
             <a:r>
               <a:rPr sz="800" b="0">
                 <a:solidFill>
-                  <a:srgbClr val="7A89A8"/>
+                  <a:srgbClr val="FFFFFF"/>
                 </a:solidFill>
                 <a:latin typeface="Arial"/>
                 <a:ea typeface="微软雅黑"/>
                 <a:cs typeface="微软雅黑"/>
               </a:rPr>
               <a:t>2</a:t>
-            </a:r>
-          </a:p>
-        </p:txBody>
-      </p:sp>
-      <p:sp>
-        <p:nvSpPr>
-          <p:cNvPr id="7" name="Rounded Rectangle 6"/>
-          <p:cNvSpPr/>
-          <p:nvPr/>
-        </p:nvSpPr>
-        <p:spPr>
-          <a:xfrm>
-            <a:off x="274320" y="1051560"/>
-            <a:ext cx="2103120" cy="1051560"/>
-          </a:xfrm>
-          <a:prstGeom prst="roundRect">
-            <a:avLst>
-              <a:gd name="adj" fmla="val 8000"/>
-            </a:avLst>
-          </a:prstGeom>
-          <a:solidFill>
-            <a:srgbClr val="E7EEFB"/>
-          </a:solidFill>
-          <a:ln w="9525">
-            <a:solidFill>
-              <a:srgbClr val="F0F4FA"/>
-            </a:solidFill>
-          </a:ln>
-        </p:spPr>
-        <p:style>
-          <a:lnRef idx="1">
-            <a:schemeClr val="accent1"/>
-          </a:lnRef>
-          <a:fillRef idx="3">
-            <a:schemeClr val="accent1"/>
-          </a:fillRef>
-          <a:effectRef idx="2">
-            <a:schemeClr val="accent1"/>
-          </a:effectRef>
-          <a:fontRef idx="minor">
-            <a:schemeClr val="lt1"/>
-          </a:fontRef>
-        </p:style>
-        <p:txBody>
-          <a:bodyPr rtlCol="0" anchor="ctr" lIns="60000" rIns="60000" tIns="60000" bIns="60000"/>
-          <a:lstStyle/>
-          <a:p>
-            <a:pPr algn="ctr"/>
-            <a:r>
-              <a:rPr sz="2200" b="1">
-                <a:solidFill>
-                  <a:srgbClr val="00366A"/>
-                </a:solidFill>
-                <a:latin typeface="微软雅黑"/>
-              </a:rPr>
-              <a:t>6 大方向</a:t>
-            </a:r>
-          </a:p>
-          <a:p>
-            <a:pPr algn="ctr">
-              <a:spcBef>
-                <a:spcPts val="300"/>
-              </a:spcBef>
-            </a:pPr>
-            <a:r>
-              <a:rPr sz="900">
-                <a:solidFill>
-                  <a:srgbClr val="2C3E50"/>
-                </a:solidFill>
-                <a:latin typeface="微软雅黑"/>
-              </a:rPr>
-              <a:t>生产管理 AI 应用系统梳理</a:t>
-            </a:r>
-          </a:p>
-        </p:txBody>
-      </p:sp>
-      <p:sp>
-        <p:nvSpPr>
-          <p:cNvPr id="8" name="Rounded Rectangle 7"/>
-          <p:cNvSpPr/>
-          <p:nvPr/>
-        </p:nvSpPr>
-        <p:spPr>
-          <a:xfrm>
-            <a:off x="2468880" y="1051560"/>
-            <a:ext cx="2103120" cy="1051560"/>
-          </a:xfrm>
-          <a:prstGeom prst="roundRect">
-            <a:avLst>
-              <a:gd name="adj" fmla="val 8000"/>
-            </a:avLst>
-          </a:prstGeom>
-          <a:solidFill>
-            <a:srgbClr val="E7EEFB"/>
-          </a:solidFill>
-          <a:ln w="9525">
-            <a:solidFill>
-              <a:srgbClr val="F0F4FA"/>
-            </a:solidFill>
-          </a:ln>
-        </p:spPr>
-        <p:style>
-          <a:lnRef idx="1">
-            <a:schemeClr val="accent1"/>
-          </a:lnRef>
-          <a:fillRef idx="3">
-            <a:schemeClr val="accent1"/>
-          </a:fillRef>
-          <a:effectRef idx="2">
-            <a:schemeClr val="accent1"/>
-          </a:effectRef>
-          <a:fontRef idx="minor">
-            <a:schemeClr val="lt1"/>
-          </a:fontRef>
-        </p:style>
-        <p:txBody>
-          <a:bodyPr rtlCol="0" anchor="ctr" lIns="60000" rIns="60000" tIns="60000" bIns="60000"/>
-          <a:lstStyle/>
-          <a:p>
-            <a:pPr algn="ctr"/>
-            <a:r>
-              <a:rPr sz="2200" b="1">
-                <a:solidFill>
-                  <a:srgbClr val="00366A"/>
-                </a:solidFill>
-                <a:latin typeface="微软雅黑"/>
-              </a:rPr>
-              <a:t>3 家供应商</a:t>
-            </a:r>
-          </a:p>
-          <a:p>
-            <a:pPr algn="ctr">
-              <a:spcBef>
-                <a:spcPts val="300"/>
-              </a:spcBef>
-            </a:pPr>
-            <a:r>
-              <a:rPr sz="900">
-                <a:solidFill>
-                  <a:srgbClr val="2C3E50"/>
-                </a:solidFill>
-                <a:latin typeface="微软雅黑"/>
-              </a:rPr>
-              <a:t>深度评估 + 会议对接</a:t>
-            </a:r>
-          </a:p>
-        </p:txBody>
-      </p:sp>
-      <p:sp>
-        <p:nvSpPr>
-          <p:cNvPr id="9" name="Rounded Rectangle 8"/>
-          <p:cNvSpPr/>
-          <p:nvPr/>
-        </p:nvSpPr>
-        <p:spPr>
-          <a:xfrm>
-            <a:off x="4663440" y="1051560"/>
-            <a:ext cx="2103120" cy="1051560"/>
-          </a:xfrm>
-          <a:prstGeom prst="roundRect">
-            <a:avLst>
-              <a:gd name="adj" fmla="val 8000"/>
-            </a:avLst>
-          </a:prstGeom>
-          <a:solidFill>
-            <a:srgbClr val="E7EEFB"/>
-          </a:solidFill>
-          <a:ln w="9525">
-            <a:solidFill>
-              <a:srgbClr val="F0F4FA"/>
-            </a:solidFill>
-          </a:ln>
-        </p:spPr>
-        <p:style>
-          <a:lnRef idx="1">
-            <a:schemeClr val="accent1"/>
-          </a:lnRef>
-          <a:fillRef idx="3">
-            <a:schemeClr val="accent1"/>
-          </a:fillRef>
-          <a:effectRef idx="2">
-            <a:schemeClr val="accent1"/>
-          </a:effectRef>
-          <a:fontRef idx="minor">
-            <a:schemeClr val="lt1"/>
-          </a:fontRef>
-        </p:style>
-        <p:txBody>
-          <a:bodyPr rtlCol="0" anchor="ctr" lIns="60000" rIns="60000" tIns="60000" bIns="60000"/>
-          <a:lstStyle/>
-          <a:p>
-            <a:pPr algn="ctr"/>
-            <a:r>
-              <a:rPr sz="2200" b="1">
-                <a:solidFill>
-                  <a:srgbClr val="3263A7"/>
-                </a:solidFill>
-                <a:latin typeface="微软雅黑"/>
-              </a:rPr>
-              <a:t>5 类落地方案</a:t>
-            </a:r>
-          </a:p>
-          <a:p>
-            <a:pPr algn="ctr">
-              <a:spcBef>
-                <a:spcPts val="300"/>
-              </a:spcBef>
-            </a:pPr>
-            <a:r>
-              <a:rPr sz="900">
-                <a:solidFill>
-                  <a:srgbClr val="2C3E50"/>
-                </a:solidFill>
-                <a:latin typeface="微软雅黑"/>
-              </a:rPr>
-              <a:t>含 IT 联合工程化推进</a:t>
-            </a:r>
-          </a:p>
-        </p:txBody>
-      </p:sp>
-      <p:sp>
-        <p:nvSpPr>
-          <p:cNvPr id="10" name="Rounded Rectangle 9"/>
-          <p:cNvSpPr/>
-          <p:nvPr/>
-        </p:nvSpPr>
-        <p:spPr>
-          <a:xfrm>
-            <a:off x="6858000" y="1051560"/>
-            <a:ext cx="2011680" cy="1051560"/>
-          </a:xfrm>
-          <a:prstGeom prst="roundRect">
-            <a:avLst>
-              <a:gd name="adj" fmla="val 8000"/>
-            </a:avLst>
-          </a:prstGeom>
-          <a:solidFill>
-            <a:srgbClr val="E7EEFB"/>
-          </a:solidFill>
-          <a:ln w="9525">
-            <a:solidFill>
-              <a:srgbClr val="F0F4FA"/>
-            </a:solidFill>
-          </a:ln>
-        </p:spPr>
-        <p:style>
-          <a:lnRef idx="1">
-            <a:schemeClr val="accent1"/>
-          </a:lnRef>
-          <a:fillRef idx="3">
-            <a:schemeClr val="accent1"/>
-          </a:fillRef>
-          <a:effectRef idx="2">
-            <a:schemeClr val="accent1"/>
-          </a:effectRef>
-          <a:fontRef idx="minor">
-            <a:schemeClr val="lt1"/>
-          </a:fontRef>
-        </p:style>
-        <p:txBody>
-          <a:bodyPr rtlCol="0" anchor="ctr" lIns="60000" rIns="60000" tIns="60000" bIns="60000"/>
-          <a:lstStyle/>
-          <a:p>
-            <a:pPr algn="ctr"/>
-            <a:r>
-              <a:rPr sz="2200" b="1">
-                <a:solidFill>
-                  <a:srgbClr val="FF7E3D"/>
-                </a:solidFill>
-                <a:latin typeface="微软雅黑"/>
-              </a:rPr>
-              <a:t>1 个重点场景</a:t>
-            </a:r>
-          </a:p>
-          <a:p>
-            <a:pPr algn="ctr">
-              <a:spcBef>
-                <a:spcPts val="300"/>
-              </a:spcBef>
-            </a:pPr>
-            <a:r>
-              <a:rPr sz="900">
-                <a:solidFill>
-                  <a:srgbClr val="2C3E50"/>
-                </a:solidFill>
-                <a:latin typeface="微软雅黑"/>
-              </a:rPr>
-              <a:t>设备预测性维护</a:t>
-            </a:r>
-          </a:p>
-        </p:txBody>
-      </p:sp>
-      <p:sp>
-        <p:nvSpPr>
-          <p:cNvPr id="11" name="Rectangle 10"/>
-          <p:cNvSpPr/>
-          <p:nvPr/>
-        </p:nvSpPr>
-        <p:spPr>
-          <a:xfrm>
-            <a:off x="274320" y="2286000"/>
-            <a:ext cx="2103120" cy="320040"/>
-          </a:xfrm>
-          <a:prstGeom prst="rect">
-            <a:avLst/>
-          </a:prstGeom>
-          <a:solidFill>
-            <a:srgbClr val="00366A"/>
-          </a:solidFill>
-          <a:ln>
-            <a:noFill/>
-          </a:ln>
-        </p:spPr>
-        <p:style>
-          <a:lnRef idx="1">
-            <a:schemeClr val="accent1"/>
-          </a:lnRef>
-          <a:fillRef idx="3">
-            <a:schemeClr val="accent1"/>
-          </a:fillRef>
-          <a:effectRef idx="2">
-            <a:schemeClr val="accent1"/>
-          </a:effectRef>
-          <a:fontRef idx="minor">
-            <a:schemeClr val="lt1"/>
-          </a:fontRef>
-        </p:style>
-        <p:txBody>
-          <a:bodyPr rtlCol="0" anchor="ctr" lIns="50000" rIns="50000" tIns="30000" bIns="30000"/>
-          <a:lstStyle/>
-          <a:p>
-            <a:pPr algn="ctr"/>
-            <a:r>
-              <a:rPr sz="1050" b="1">
-                <a:solidFill>
-                  <a:srgbClr val="FFFFFF"/>
-                </a:solidFill>
-                <a:latin typeface="微软雅黑"/>
-                <a:ea typeface="微软雅黑"/>
-              </a:rPr>
-              <a:t>① 方向系统梳理</a:t>
-            </a:r>
-          </a:p>
-        </p:txBody>
-      </p:sp>
-      <p:sp>
-        <p:nvSpPr>
-          <p:cNvPr id="12" name="Rectangle 11"/>
-          <p:cNvSpPr/>
-          <p:nvPr/>
-        </p:nvSpPr>
-        <p:spPr>
-          <a:xfrm>
-            <a:off x="274320" y="2606040"/>
-            <a:ext cx="2103120" cy="1874519"/>
-          </a:xfrm>
-          <a:prstGeom prst="rect">
-            <a:avLst/>
-          </a:prstGeom>
-          <a:solidFill>
-            <a:srgbClr val="FFFFFF"/>
-          </a:solidFill>
-          <a:ln w="9525">
-            <a:solidFill>
-              <a:srgbClr val="F0F4FA"/>
-            </a:solidFill>
-          </a:ln>
-        </p:spPr>
-        <p:style>
-          <a:lnRef idx="1">
-            <a:schemeClr val="accent1"/>
-          </a:lnRef>
-          <a:fillRef idx="3">
-            <a:schemeClr val="accent1"/>
-          </a:fillRef>
-          <a:effectRef idx="2">
-            <a:schemeClr val="accent1"/>
-          </a:effectRef>
-          <a:fontRef idx="minor">
-            <a:schemeClr val="lt1"/>
-          </a:fontRef>
-        </p:style>
-        <p:txBody>
-          <a:bodyPr rtlCol="0" anchor="ctr"/>
-          <a:lstStyle/>
-          <a:p>
-            <a:pPr algn="ctr"/>
-          </a:p>
-        </p:txBody>
-      </p:sp>
-      <p:sp>
-        <p:nvSpPr>
-          <p:cNvPr id="13" name="TextBox 12"/>
-          <p:cNvSpPr txBox="1"/>
-          <p:nvPr/>
-        </p:nvSpPr>
-        <p:spPr>
-          <a:xfrm>
-            <a:off x="347472" y="2651760"/>
-            <a:ext cx="1956815" cy="1783079"/>
-          </a:xfrm>
-          <a:prstGeom prst="rect">
-            <a:avLst/>
-          </a:prstGeom>
-          <a:noFill/>
-        </p:spPr>
-        <p:txBody>
-          <a:bodyPr wrap="square" lIns="0" rIns="0" tIns="50000" bIns="50000">
-            <a:spAutoFit/>
-          </a:bodyPr>
-          <a:lstStyle/>
-          <a:p>
-            <a:pPr>
-              <a:lnSpc>
-                <a:spcPct val="135000"/>
-              </a:lnSpc>
-              <a:spcBef>
-                <a:spcPts val="0"/>
-              </a:spcBef>
-              <a:spcAft>
-                <a:spcPts val="200"/>
-              </a:spcAft>
-            </a:pPr>
-            <a:r>
-              <a:rPr sz="850" b="0">
-                <a:solidFill>
-                  <a:srgbClr val="0F2B46"/>
-                </a:solidFill>
-                <a:latin typeface="微软雅黑"/>
-                <a:ea typeface="微软雅黑"/>
-                <a:cs typeface="微软雅黑"/>
-              </a:rPr>
-              <a:t>• 收敛并系统梳理生产管理 6 大 AI 应用方向</a:t>
-            </a:r>
-          </a:p>
-          <a:p>
-            <a:pPr>
-              <a:lnSpc>
-                <a:spcPct val="135000"/>
-              </a:lnSpc>
-              <a:spcBef>
-                <a:spcPts val="0"/>
-              </a:spcBef>
-              <a:spcAft>
-                <a:spcPts val="200"/>
-              </a:spcAft>
-            </a:pPr>
-            <a:r>
-              <a:rPr sz="850" b="0">
-                <a:solidFill>
-                  <a:srgbClr val="0F2B46"/>
-                </a:solidFill>
-                <a:latin typeface="微软雅黑"/>
-                <a:ea typeface="微软雅黑"/>
-                <a:cs typeface="微软雅黑"/>
-              </a:rPr>
-              <a:t>• 编制思路方案 + 逐项落地推进方案</a:t>
-            </a:r>
-          </a:p>
-          <a:p>
-            <a:pPr>
-              <a:lnSpc>
-                <a:spcPct val="135000"/>
-              </a:lnSpc>
-              <a:spcBef>
-                <a:spcPts val="0"/>
-              </a:spcBef>
-              <a:spcAft>
-                <a:spcPts val="200"/>
-              </a:spcAft>
-            </a:pPr>
-            <a:r>
-              <a:rPr sz="850" b="0">
-                <a:solidFill>
-                  <a:srgbClr val="0F2B46"/>
-                </a:solidFill>
-                <a:latin typeface="微软雅黑"/>
-                <a:ea typeface="微软雅黑"/>
-                <a:cs typeface="微软雅黑"/>
-              </a:rPr>
-              <a:t>• 为集团 AI 布局提供横向蓝图</a:t>
-            </a:r>
-          </a:p>
-        </p:txBody>
-      </p:sp>
-      <p:sp>
-        <p:nvSpPr>
-          <p:cNvPr id="14" name="Rectangle 13"/>
-          <p:cNvSpPr/>
-          <p:nvPr/>
-        </p:nvSpPr>
-        <p:spPr>
-          <a:xfrm>
-            <a:off x="2468880" y="2286000"/>
-            <a:ext cx="2103120" cy="320040"/>
-          </a:xfrm>
-          <a:prstGeom prst="rect">
-            <a:avLst/>
-          </a:prstGeom>
-          <a:solidFill>
-            <a:srgbClr val="00366A"/>
-          </a:solidFill>
-          <a:ln>
-            <a:noFill/>
-          </a:ln>
-        </p:spPr>
-        <p:style>
-          <a:lnRef idx="1">
-            <a:schemeClr val="accent1"/>
-          </a:lnRef>
-          <a:fillRef idx="3">
-            <a:schemeClr val="accent1"/>
-          </a:fillRef>
-          <a:effectRef idx="2">
-            <a:schemeClr val="accent1"/>
-          </a:effectRef>
-          <a:fontRef idx="minor">
-            <a:schemeClr val="lt1"/>
-          </a:fontRef>
-        </p:style>
-        <p:txBody>
-          <a:bodyPr rtlCol="0" anchor="ctr" lIns="50000" rIns="50000" tIns="30000" bIns="30000"/>
-          <a:lstStyle/>
-          <a:p>
-            <a:pPr algn="ctr"/>
-            <a:r>
-              <a:rPr sz="1050" b="1">
-                <a:solidFill>
-                  <a:srgbClr val="FFFFFF"/>
-                </a:solidFill>
-                <a:latin typeface="微软雅黑"/>
-                <a:ea typeface="微软雅黑"/>
-              </a:rPr>
-              <a:t>② 供应商评估</a:t>
-            </a:r>
-          </a:p>
-        </p:txBody>
-      </p:sp>
-      <p:sp>
-        <p:nvSpPr>
-          <p:cNvPr id="15" name="Rectangle 14"/>
-          <p:cNvSpPr/>
-          <p:nvPr/>
-        </p:nvSpPr>
-        <p:spPr>
-          <a:xfrm>
-            <a:off x="2468880" y="2606040"/>
-            <a:ext cx="2103120" cy="1874519"/>
-          </a:xfrm>
-          <a:prstGeom prst="rect">
-            <a:avLst/>
-          </a:prstGeom>
-          <a:solidFill>
-            <a:srgbClr val="FFFFFF"/>
-          </a:solidFill>
-          <a:ln w="9525">
-            <a:solidFill>
-              <a:srgbClr val="F0F4FA"/>
-            </a:solidFill>
-          </a:ln>
-        </p:spPr>
-        <p:style>
-          <a:lnRef idx="1">
-            <a:schemeClr val="accent1"/>
-          </a:lnRef>
-          <a:fillRef idx="3">
-            <a:schemeClr val="accent1"/>
-          </a:fillRef>
-          <a:effectRef idx="2">
-            <a:schemeClr val="accent1"/>
-          </a:effectRef>
-          <a:fontRef idx="minor">
-            <a:schemeClr val="lt1"/>
-          </a:fontRef>
-        </p:style>
-        <p:txBody>
-          <a:bodyPr rtlCol="0" anchor="ctr"/>
-          <a:lstStyle/>
-          <a:p>
-            <a:pPr algn="ctr"/>
-          </a:p>
-        </p:txBody>
-      </p:sp>
-      <p:sp>
-        <p:nvSpPr>
-          <p:cNvPr id="16" name="TextBox 15"/>
-          <p:cNvSpPr txBox="1"/>
-          <p:nvPr/>
-        </p:nvSpPr>
-        <p:spPr>
-          <a:xfrm>
-            <a:off x="2542032" y="2651760"/>
-            <a:ext cx="1956815" cy="1783079"/>
-          </a:xfrm>
-          <a:prstGeom prst="rect">
-            <a:avLst/>
-          </a:prstGeom>
-          <a:noFill/>
-        </p:spPr>
-        <p:txBody>
-          <a:bodyPr wrap="square" lIns="0" rIns="0" tIns="50000" bIns="50000">
-            <a:spAutoFit/>
-          </a:bodyPr>
-          <a:lstStyle/>
-          <a:p>
-            <a:pPr>
-              <a:lnSpc>
-                <a:spcPct val="135000"/>
-              </a:lnSpc>
-              <a:spcBef>
-                <a:spcPts val="0"/>
-              </a:spcBef>
-              <a:spcAft>
-                <a:spcPts val="200"/>
-              </a:spcAft>
-            </a:pPr>
-            <a:r>
-              <a:rPr sz="850" b="0">
-                <a:solidFill>
-                  <a:srgbClr val="0F2B46"/>
-                </a:solidFill>
-                <a:latin typeface="微软雅黑"/>
-                <a:ea typeface="微软雅黑"/>
-                <a:cs typeface="微软雅黑"/>
-              </a:rPr>
-              <a:t>• 智现未来（半导体 AI 跨域）</a:t>
-            </a:r>
-          </a:p>
-          <a:p>
-            <a:pPr>
-              <a:lnSpc>
-                <a:spcPct val="135000"/>
-              </a:lnSpc>
-              <a:spcBef>
-                <a:spcPts val="0"/>
-              </a:spcBef>
-              <a:spcAft>
-                <a:spcPts val="200"/>
-              </a:spcAft>
-            </a:pPr>
-            <a:r>
-              <a:rPr sz="850" b="0">
-                <a:solidFill>
-                  <a:srgbClr val="0F2B46"/>
-                </a:solidFill>
-                <a:latin typeface="微软雅黑"/>
-                <a:ea typeface="微软雅黑"/>
-                <a:cs typeface="微软雅黑"/>
-              </a:rPr>
-              <a:t>• 埃森哲（Industry X 智能资产管理）</a:t>
-            </a:r>
-          </a:p>
-          <a:p>
-            <a:pPr>
-              <a:lnSpc>
-                <a:spcPct val="135000"/>
-              </a:lnSpc>
-              <a:spcBef>
-                <a:spcPts val="0"/>
-              </a:spcBef>
-              <a:spcAft>
-                <a:spcPts val="200"/>
-              </a:spcAft>
-            </a:pPr>
-            <a:r>
-              <a:rPr sz="850" b="0">
-                <a:solidFill>
-                  <a:srgbClr val="0F2B46"/>
-                </a:solidFill>
-                <a:latin typeface="微软雅黑"/>
-                <a:ea typeface="微软雅黑"/>
-                <a:cs typeface="微软雅黑"/>
-              </a:rPr>
-              <a:t>• 远景智能（平台级 AI）</a:t>
-            </a:r>
-          </a:p>
-          <a:p>
-            <a:pPr>
-              <a:lnSpc>
-                <a:spcPct val="135000"/>
-              </a:lnSpc>
-              <a:spcBef>
-                <a:spcPts val="0"/>
-              </a:spcBef>
-              <a:spcAft>
-                <a:spcPts val="200"/>
-              </a:spcAft>
-            </a:pPr>
-            <a:r>
-              <a:rPr sz="850" b="0">
-                <a:solidFill>
-                  <a:srgbClr val="0F2B46"/>
-                </a:solidFill>
-                <a:latin typeface="微软雅黑"/>
-                <a:ea typeface="微软雅黑"/>
-                <a:cs typeface="微软雅黑"/>
-              </a:rPr>
-              <a:t>• 形成"多供应商组合"合作思路</a:t>
-            </a:r>
-          </a:p>
-        </p:txBody>
-      </p:sp>
-      <p:sp>
-        <p:nvSpPr>
-          <p:cNvPr id="17" name="Rectangle 16"/>
-          <p:cNvSpPr/>
-          <p:nvPr/>
-        </p:nvSpPr>
-        <p:spPr>
-          <a:xfrm>
-            <a:off x="4663440" y="2286000"/>
-            <a:ext cx="2103120" cy="320040"/>
-          </a:xfrm>
-          <a:prstGeom prst="rect">
-            <a:avLst/>
-          </a:prstGeom>
-          <a:solidFill>
-            <a:srgbClr val="00366A"/>
-          </a:solidFill>
-          <a:ln>
-            <a:noFill/>
-          </a:ln>
-        </p:spPr>
-        <p:style>
-          <a:lnRef idx="1">
-            <a:schemeClr val="accent1"/>
-          </a:lnRef>
-          <a:fillRef idx="3">
-            <a:schemeClr val="accent1"/>
-          </a:fillRef>
-          <a:effectRef idx="2">
-            <a:schemeClr val="accent1"/>
-          </a:effectRef>
-          <a:fontRef idx="minor">
-            <a:schemeClr val="lt1"/>
-          </a:fontRef>
-        </p:style>
-        <p:txBody>
-          <a:bodyPr rtlCol="0" anchor="ctr" lIns="50000" rIns="50000" tIns="30000" bIns="30000"/>
-          <a:lstStyle/>
-          <a:p>
-            <a:pPr algn="ctr"/>
-            <a:r>
-              <a:rPr sz="1050" b="1">
-                <a:solidFill>
-                  <a:srgbClr val="FFFFFF"/>
-                </a:solidFill>
-                <a:latin typeface="微软雅黑"/>
-                <a:ea typeface="微软雅黑"/>
-              </a:rPr>
-              <a:t>③ PdM 推进</a:t>
-            </a:r>
-          </a:p>
-        </p:txBody>
-      </p:sp>
-      <p:sp>
-        <p:nvSpPr>
-          <p:cNvPr id="18" name="Rectangle 17"/>
-          <p:cNvSpPr/>
-          <p:nvPr/>
-        </p:nvSpPr>
-        <p:spPr>
-          <a:xfrm>
-            <a:off x="4663440" y="2606040"/>
-            <a:ext cx="2103120" cy="1874519"/>
-          </a:xfrm>
-          <a:prstGeom prst="rect">
-            <a:avLst/>
-          </a:prstGeom>
-          <a:solidFill>
-            <a:srgbClr val="FFFFFF"/>
-          </a:solidFill>
-          <a:ln w="9525">
-            <a:solidFill>
-              <a:srgbClr val="F0F4FA"/>
-            </a:solidFill>
-          </a:ln>
-        </p:spPr>
-        <p:style>
-          <a:lnRef idx="1">
-            <a:schemeClr val="accent1"/>
-          </a:lnRef>
-          <a:fillRef idx="3">
-            <a:schemeClr val="accent1"/>
-          </a:fillRef>
-          <a:effectRef idx="2">
-            <a:schemeClr val="accent1"/>
-          </a:effectRef>
-          <a:fontRef idx="minor">
-            <a:schemeClr val="lt1"/>
-          </a:fontRef>
-        </p:style>
-        <p:txBody>
-          <a:bodyPr rtlCol="0" anchor="ctr"/>
-          <a:lstStyle/>
-          <a:p>
-            <a:pPr algn="ctr"/>
-          </a:p>
-        </p:txBody>
-      </p:sp>
-      <p:sp>
-        <p:nvSpPr>
-          <p:cNvPr id="19" name="TextBox 18"/>
-          <p:cNvSpPr txBox="1"/>
-          <p:nvPr/>
-        </p:nvSpPr>
-        <p:spPr>
-          <a:xfrm>
-            <a:off x="4736592" y="2651760"/>
-            <a:ext cx="1956815" cy="1783079"/>
-          </a:xfrm>
-          <a:prstGeom prst="rect">
-            <a:avLst/>
-          </a:prstGeom>
-          <a:noFill/>
-        </p:spPr>
-        <p:txBody>
-          <a:bodyPr wrap="square" lIns="0" rIns="0" tIns="50000" bIns="50000">
-            <a:spAutoFit/>
-          </a:bodyPr>
-          <a:lstStyle/>
-          <a:p>
-            <a:pPr>
-              <a:lnSpc>
-                <a:spcPct val="135000"/>
-              </a:lnSpc>
-              <a:spcBef>
-                <a:spcPts val="0"/>
-              </a:spcBef>
-              <a:spcAft>
-                <a:spcPts val="200"/>
-              </a:spcAft>
-            </a:pPr>
-            <a:r>
-              <a:rPr sz="850" b="0">
-                <a:solidFill>
-                  <a:srgbClr val="0F2B46"/>
-                </a:solidFill>
-                <a:latin typeface="微软雅黑"/>
-                <a:ea typeface="微软雅黑"/>
-                <a:cs typeface="微软雅黑"/>
-              </a:rPr>
-              <a:t>• 结合 DH1 动力站现有基础</a:t>
-            </a:r>
-          </a:p>
-          <a:p>
-            <a:pPr>
-              <a:lnSpc>
-                <a:spcPct val="135000"/>
-              </a:lnSpc>
-              <a:spcBef>
-                <a:spcPts val="0"/>
-              </a:spcBef>
-              <a:spcAft>
-                <a:spcPts val="200"/>
-              </a:spcAft>
-            </a:pPr>
-            <a:r>
-              <a:rPr sz="850" b="0">
-                <a:solidFill>
-                  <a:srgbClr val="0F2B46"/>
-                </a:solidFill>
-                <a:latin typeface="微软雅黑"/>
-                <a:ea typeface="微软雅黑"/>
-                <a:cs typeface="微软雅黑"/>
-              </a:rPr>
-              <a:t>• 完成和利时、信力共擎、埃森哲三方对比</a:t>
-            </a:r>
-          </a:p>
-          <a:p>
-            <a:pPr>
-              <a:lnSpc>
-                <a:spcPct val="135000"/>
-              </a:lnSpc>
-              <a:spcBef>
-                <a:spcPts val="0"/>
-              </a:spcBef>
-              <a:spcAft>
-                <a:spcPts val="200"/>
-              </a:spcAft>
-            </a:pPr>
-            <a:r>
-              <a:rPr sz="850" b="0">
-                <a:solidFill>
-                  <a:srgbClr val="0F2B46"/>
-                </a:solidFill>
-                <a:latin typeface="微软雅黑"/>
-                <a:ea typeface="微软雅黑"/>
-                <a:cs typeface="微软雅黑"/>
-              </a:rPr>
-              <a:t>• 主导埃森哲 PdM 会议后总结</a:t>
-            </a:r>
-          </a:p>
-          <a:p>
-            <a:pPr>
-              <a:lnSpc>
-                <a:spcPct val="135000"/>
-              </a:lnSpc>
-              <a:spcBef>
-                <a:spcPts val="0"/>
-              </a:spcBef>
-              <a:spcAft>
-                <a:spcPts val="200"/>
-              </a:spcAft>
-            </a:pPr>
-            <a:r>
-              <a:rPr sz="850" b="0">
-                <a:solidFill>
-                  <a:srgbClr val="0F2B46"/>
-                </a:solidFill>
-                <a:latin typeface="微软雅黑"/>
-                <a:ea typeface="微软雅黑"/>
-                <a:cs typeface="微软雅黑"/>
-              </a:rPr>
-              <a:t>• 明确 4 类信息 + PoC 推进节奏</a:t>
-            </a:r>
-          </a:p>
-        </p:txBody>
-      </p:sp>
-      <p:sp>
-        <p:nvSpPr>
-          <p:cNvPr id="20" name="Rectangle 19"/>
-          <p:cNvSpPr/>
-          <p:nvPr/>
-        </p:nvSpPr>
-        <p:spPr>
-          <a:xfrm>
-            <a:off x="6858000" y="2286000"/>
-            <a:ext cx="2011680" cy="320040"/>
-          </a:xfrm>
-          <a:prstGeom prst="rect">
-            <a:avLst/>
-          </a:prstGeom>
-          <a:solidFill>
-            <a:srgbClr val="00366A"/>
-          </a:solidFill>
-          <a:ln>
-            <a:noFill/>
-          </a:ln>
-        </p:spPr>
-        <p:style>
-          <a:lnRef idx="1">
-            <a:schemeClr val="accent1"/>
-          </a:lnRef>
-          <a:fillRef idx="3">
-            <a:schemeClr val="accent1"/>
-          </a:fillRef>
-          <a:effectRef idx="2">
-            <a:schemeClr val="accent1"/>
-          </a:effectRef>
-          <a:fontRef idx="minor">
-            <a:schemeClr val="lt1"/>
-          </a:fontRef>
-        </p:style>
-        <p:txBody>
-          <a:bodyPr rtlCol="0" anchor="ctr" lIns="50000" rIns="50000" tIns="30000" bIns="30000"/>
-          <a:lstStyle/>
-          <a:p>
-            <a:pPr algn="ctr"/>
-            <a:r>
-              <a:rPr sz="1050" b="1">
-                <a:solidFill>
-                  <a:srgbClr val="FFFFFF"/>
-                </a:solidFill>
-                <a:latin typeface="微软雅黑"/>
-                <a:ea typeface="微软雅黑"/>
-              </a:rPr>
-              <a:t>④ 跨部门协同</a:t>
-            </a:r>
-          </a:p>
-        </p:txBody>
-      </p:sp>
-      <p:sp>
-        <p:nvSpPr>
-          <p:cNvPr id="21" name="Rectangle 20"/>
-          <p:cNvSpPr/>
-          <p:nvPr/>
-        </p:nvSpPr>
-        <p:spPr>
-          <a:xfrm>
-            <a:off x="6858000" y="2606040"/>
-            <a:ext cx="2011680" cy="1874519"/>
-          </a:xfrm>
-          <a:prstGeom prst="rect">
-            <a:avLst/>
-          </a:prstGeom>
-          <a:solidFill>
-            <a:srgbClr val="FFFFFF"/>
-          </a:solidFill>
-          <a:ln w="9525">
-            <a:solidFill>
-              <a:srgbClr val="F0F4FA"/>
-            </a:solidFill>
-          </a:ln>
-        </p:spPr>
-        <p:style>
-          <a:lnRef idx="1">
-            <a:schemeClr val="accent1"/>
-          </a:lnRef>
-          <a:fillRef idx="3">
-            <a:schemeClr val="accent1"/>
-          </a:fillRef>
-          <a:effectRef idx="2">
-            <a:schemeClr val="accent1"/>
-          </a:effectRef>
-          <a:fontRef idx="minor">
-            <a:schemeClr val="lt1"/>
-          </a:fontRef>
-        </p:style>
-        <p:txBody>
-          <a:bodyPr rtlCol="0" anchor="ctr"/>
-          <a:lstStyle/>
-          <a:p>
-            <a:pPr algn="ctr"/>
-          </a:p>
-        </p:txBody>
-      </p:sp>
-      <p:sp>
-        <p:nvSpPr>
-          <p:cNvPr id="22" name="TextBox 21"/>
-          <p:cNvSpPr txBox="1"/>
-          <p:nvPr/>
-        </p:nvSpPr>
-        <p:spPr>
-          <a:xfrm>
-            <a:off x="6931152" y="2651760"/>
-            <a:ext cx="1865376" cy="1783079"/>
-          </a:xfrm>
-          <a:prstGeom prst="rect">
-            <a:avLst/>
-          </a:prstGeom>
-          <a:noFill/>
-        </p:spPr>
-        <p:txBody>
-          <a:bodyPr wrap="square" lIns="0" rIns="0" tIns="50000" bIns="50000">
-            <a:spAutoFit/>
-          </a:bodyPr>
-          <a:lstStyle/>
-          <a:p>
-            <a:pPr>
-              <a:lnSpc>
-                <a:spcPct val="135000"/>
-              </a:lnSpc>
-              <a:spcBef>
-                <a:spcPts val="0"/>
-              </a:spcBef>
-              <a:spcAft>
-                <a:spcPts val="200"/>
-              </a:spcAft>
-            </a:pPr>
-            <a:r>
-              <a:rPr sz="850" b="0">
-                <a:solidFill>
-                  <a:srgbClr val="0F2B46"/>
-                </a:solidFill>
-                <a:latin typeface="微软雅黑"/>
-                <a:ea typeface="微软雅黑"/>
-                <a:cs typeface="微软雅黑"/>
-              </a:rPr>
-              <a:t>• 与 IT 联合输出 6 方向工程化实施方案</a:t>
-            </a:r>
-          </a:p>
-          <a:p>
-            <a:pPr>
-              <a:lnSpc>
-                <a:spcPct val="135000"/>
-              </a:lnSpc>
-              <a:spcBef>
-                <a:spcPts val="0"/>
-              </a:spcBef>
-              <a:spcAft>
-                <a:spcPts val="200"/>
-              </a:spcAft>
-            </a:pPr>
-            <a:r>
-              <a:rPr sz="850" b="0">
-                <a:solidFill>
-                  <a:srgbClr val="0F2B46"/>
-                </a:solidFill>
-                <a:latin typeface="微软雅黑"/>
-                <a:ea typeface="微软雅黑"/>
-                <a:cs typeface="微软雅黑"/>
-              </a:rPr>
-              <a:t>• 生产看板系统氨基酸项目功能对接</a:t>
-            </a:r>
-          </a:p>
-          <a:p>
-            <a:pPr>
-              <a:lnSpc>
-                <a:spcPct val="135000"/>
-              </a:lnSpc>
-              <a:spcBef>
-                <a:spcPts val="0"/>
-              </a:spcBef>
-              <a:spcAft>
-                <a:spcPts val="200"/>
-              </a:spcAft>
-            </a:pPr>
-            <a:r>
-              <a:rPr sz="850" b="0">
-                <a:solidFill>
-                  <a:srgbClr val="0F2B46"/>
-                </a:solidFill>
-                <a:latin typeface="微软雅黑"/>
-                <a:ea typeface="微软雅黑"/>
-                <a:cs typeface="微软雅黑"/>
-              </a:rPr>
-              <a:t>• 配合电算化等其他数智化重点工作</a:t>
             </a:r>
           </a:p>
         </p:txBody>
@@ -4680,8 +6372,8 @@
         </p:nvSpPr>
         <p:spPr>
           <a:xfrm>
-            <a:off x="457200" y="2011680"/>
-            <a:ext cx="8229600" cy="822960"/>
+            <a:off x="457200" y="1737360"/>
+            <a:ext cx="8229600" cy="457200"/>
           </a:xfrm>
           <a:prstGeom prst="rect">
             <a:avLst/>
@@ -4689,28 +6381,64 @@
           <a:noFill/>
         </p:spPr>
         <p:txBody>
-          <a:bodyPr wrap="none" lIns="0" rIns="0">
+          <a:bodyPr wrap="none">
             <a:spAutoFit/>
           </a:bodyPr>
           <a:lstStyle/>
           <a:p>
             <a:pPr algn="ctr"/>
             <a:r>
-              <a:rPr sz="3200" b="1">
+              <a:rPr sz="2000" b="1">
+                <a:solidFill>
+                  <a:srgbClr val="FF7E3D"/>
+                </a:solidFill>
+                <a:latin typeface="Arial"/>
+              </a:rPr>
+              <a:t>PART 02</a:t>
+            </a:r>
+          </a:p>
+        </p:txBody>
+      </p:sp>
+      <p:sp>
+        <p:nvSpPr>
+          <p:cNvPr id="5" name="TextBox 4"/>
+          <p:cNvSpPr txBox="1"/>
+          <p:nvPr/>
+        </p:nvSpPr>
+        <p:spPr>
+          <a:xfrm>
+            <a:off x="457200" y="2286000"/>
+            <a:ext cx="8229600" cy="822960"/>
+          </a:xfrm>
+          <a:prstGeom prst="rect">
+            <a:avLst/>
+          </a:prstGeom>
+          <a:noFill/>
+        </p:spPr>
+        <p:txBody>
+          <a:bodyPr wrap="none">
+            <a:spAutoFit/>
+          </a:bodyPr>
+          <a:lstStyle/>
+          <a:p>
+            <a:pPr algn="ctr"/>
+            <a:r>
+              <a:rPr sz="3600" b="1">
                 <a:solidFill>
                   <a:srgbClr val="FFFFFF"/>
                 </a:solidFill>
                 <a:latin typeface="微软雅黑"/>
                 <a:ea typeface="微软雅黑"/>
-              </a:rPr>
-              <a:t>6 大 AI 应用方向 · 系统梳理</a:t>
-            </a:r>
-          </a:p>
-        </p:txBody>
-      </p:sp>
-      <p:sp>
-        <p:nvSpPr>
-          <p:cNvPr id="5" name="TextBox 4"/>
+                <a:cs typeface="微软雅黑"/>
+              </a:rPr>
+              <a:t>AI 落地推进</a:t>
+            </a:r>
+          </a:p>
+        </p:txBody>
+      </p:sp>
+      <p:sp>
+        <p:nvSpPr>
+          <p:cNvPr id="6" name="TextBox 5"/>
           <p:cNvSpPr txBox="1"/>
           <p:nvPr/>
         </p:nvSpPr>
@@ -4747,7 +6475,7 @@
       </p:sp>
       <p:sp>
         <p:nvSpPr>
-          <p:cNvPr id="6" name="TextBox 5"/>
+          <p:cNvPr id="7" name="TextBox 6"/>
           <p:cNvSpPr txBox="1"/>
           <p:nvPr/>
         </p:nvSpPr>
@@ -4784,7 +6512,7 @@
       </p:sp>
       <p:sp>
         <p:nvSpPr>
-          <p:cNvPr id="7" name="TextBox 6"/>
+          <p:cNvPr id="8" name="TextBox 7"/>
           <p:cNvSpPr txBox="1"/>
           <p:nvPr/>
         </p:nvSpPr>
@@ -4867,8 +6595,9 @@
                 </a:solidFill>
                 <a:latin typeface="微软雅黑"/>
                 <a:ea typeface="微软雅黑"/>
-              </a:rPr>
-              <a:t>生产管理 6 大 AI 应用方向</a:t>
+                <a:cs typeface="微软雅黑"/>
+              </a:rPr>
+              <a:t>上半年整体进展概览</a:t>
             </a:r>
           </a:p>
         </p:txBody>
@@ -5029,14 +6758,318 @@
       </p:sp>
       <p:sp>
         <p:nvSpPr>
-          <p:cNvPr id="7" name="Rectangle 6"/>
+          <p:cNvPr id="7" name="Rounded Rectangle 6"/>
           <p:cNvSpPr/>
           <p:nvPr/>
         </p:nvSpPr>
         <p:spPr>
           <a:xfrm>
             <a:off x="274320" y="1051560"/>
-            <a:ext cx="2743200" cy="365760"/>
+            <a:ext cx="2103120" cy="1051560"/>
+          </a:xfrm>
+          <a:prstGeom prst="roundRect">
+            <a:avLst>
+              <a:gd name="adj" fmla="val 8000"/>
+            </a:avLst>
+          </a:prstGeom>
+          <a:solidFill>
+            <a:srgbClr val="E7EEFB"/>
+          </a:solidFill>
+          <a:ln w="9525">
+            <a:solidFill>
+              <a:srgbClr val="DCE3EF"/>
+            </a:solidFill>
+          </a:ln>
+        </p:spPr>
+        <p:style>
+          <a:lnRef idx="1">
+            <a:schemeClr val="accent1"/>
+          </a:lnRef>
+          <a:fillRef idx="3">
+            <a:schemeClr val="accent1"/>
+          </a:fillRef>
+          <a:effectRef idx="2">
+            <a:schemeClr val="accent1"/>
+          </a:effectRef>
+          <a:fontRef idx="minor">
+            <a:schemeClr val="lt1"/>
+          </a:fontRef>
+        </p:style>
+        <p:txBody>
+          <a:bodyPr rtlCol="0" anchor="ctr" lIns="60000" rIns="60000" tIns="60000" bIns="60000"/>
+          <a:lstStyle/>
+          <a:p>
+            <a:pPr algn="ctr"/>
+            <a:r>
+              <a:rPr sz="2200" b="1">
+                <a:solidFill>
+                  <a:srgbClr val="00366A"/>
+                </a:solidFill>
+                <a:latin typeface="微软雅黑"/>
+                <a:ea typeface="微软雅黑"/>
+                <a:cs typeface="微软雅黑"/>
+              </a:rPr>
+              <a:t>6 大方向</a:t>
+            </a:r>
+          </a:p>
+          <a:p>
+            <a:pPr algn="ctr">
+              <a:spcBef>
+                <a:spcPts val="300"/>
+              </a:spcBef>
+            </a:pPr>
+            <a:r>
+              <a:rPr sz="900">
+                <a:solidFill>
+                  <a:srgbClr val="2C3E50"/>
+                </a:solidFill>
+                <a:latin typeface="微软雅黑"/>
+                <a:ea typeface="微软雅黑"/>
+                <a:cs typeface="微软雅黑"/>
+              </a:rPr>
+              <a:t>生产管理 AI 应用系统梳理</a:t>
+            </a:r>
+          </a:p>
+        </p:txBody>
+      </p:sp>
+      <p:sp>
+        <p:nvSpPr>
+          <p:cNvPr id="8" name="Rounded Rectangle 7"/>
+          <p:cNvSpPr/>
+          <p:nvPr/>
+        </p:nvSpPr>
+        <p:spPr>
+          <a:xfrm>
+            <a:off x="2468880" y="1051560"/>
+            <a:ext cx="2103120" cy="1051560"/>
+          </a:xfrm>
+          <a:prstGeom prst="roundRect">
+            <a:avLst>
+              <a:gd name="adj" fmla="val 8000"/>
+            </a:avLst>
+          </a:prstGeom>
+          <a:solidFill>
+            <a:srgbClr val="E7EEFB"/>
+          </a:solidFill>
+          <a:ln w="9525">
+            <a:solidFill>
+              <a:srgbClr val="DCE3EF"/>
+            </a:solidFill>
+          </a:ln>
+        </p:spPr>
+        <p:style>
+          <a:lnRef idx="1">
+            <a:schemeClr val="accent1"/>
+          </a:lnRef>
+          <a:fillRef idx="3">
+            <a:schemeClr val="accent1"/>
+          </a:fillRef>
+          <a:effectRef idx="2">
+            <a:schemeClr val="accent1"/>
+          </a:effectRef>
+          <a:fontRef idx="minor">
+            <a:schemeClr val="lt1"/>
+          </a:fontRef>
+        </p:style>
+        <p:txBody>
+          <a:bodyPr rtlCol="0" anchor="ctr" lIns="60000" rIns="60000" tIns="60000" bIns="60000"/>
+          <a:lstStyle/>
+          <a:p>
+            <a:pPr algn="ctr"/>
+            <a:r>
+              <a:rPr sz="2200" b="1">
+                <a:solidFill>
+                  <a:srgbClr val="00366A"/>
+                </a:solidFill>
+                <a:latin typeface="微软雅黑"/>
+                <a:ea typeface="微软雅黑"/>
+                <a:cs typeface="微软雅黑"/>
+              </a:rPr>
+              <a:t>2 家供应商</a:t>
+            </a:r>
+          </a:p>
+          <a:p>
+            <a:pPr algn="ctr">
+              <a:spcBef>
+                <a:spcPts val="300"/>
+              </a:spcBef>
+            </a:pPr>
+            <a:r>
+              <a:rPr sz="900">
+                <a:solidFill>
+                  <a:srgbClr val="2C3E50"/>
+                </a:solidFill>
+                <a:latin typeface="微软雅黑"/>
+                <a:ea typeface="微软雅黑"/>
+                <a:cs typeface="微软雅黑"/>
+              </a:rPr>
+              <a:t>深度评估 + 会议对接</a:t>
+            </a:r>
+          </a:p>
+        </p:txBody>
+      </p:sp>
+      <p:sp>
+        <p:nvSpPr>
+          <p:cNvPr id="9" name="Rounded Rectangle 8"/>
+          <p:cNvSpPr/>
+          <p:nvPr/>
+        </p:nvSpPr>
+        <p:spPr>
+          <a:xfrm>
+            <a:off x="4663440" y="1051560"/>
+            <a:ext cx="2103120" cy="1051560"/>
+          </a:xfrm>
+          <a:prstGeom prst="roundRect">
+            <a:avLst>
+              <a:gd name="adj" fmla="val 8000"/>
+            </a:avLst>
+          </a:prstGeom>
+          <a:solidFill>
+            <a:srgbClr val="E7EEFB"/>
+          </a:solidFill>
+          <a:ln w="9525">
+            <a:solidFill>
+              <a:srgbClr val="DCE3EF"/>
+            </a:solidFill>
+          </a:ln>
+        </p:spPr>
+        <p:style>
+          <a:lnRef idx="1">
+            <a:schemeClr val="accent1"/>
+          </a:lnRef>
+          <a:fillRef idx="3">
+            <a:schemeClr val="accent1"/>
+          </a:fillRef>
+          <a:effectRef idx="2">
+            <a:schemeClr val="accent1"/>
+          </a:effectRef>
+          <a:fontRef idx="minor">
+            <a:schemeClr val="lt1"/>
+          </a:fontRef>
+        </p:style>
+        <p:txBody>
+          <a:bodyPr rtlCol="0" anchor="ctr" lIns="60000" rIns="60000" tIns="60000" bIns="60000"/>
+          <a:lstStyle/>
+          <a:p>
+            <a:pPr algn="ctr"/>
+            <a:r>
+              <a:rPr sz="2200" b="1">
+                <a:solidFill>
+                  <a:srgbClr val="3263A7"/>
+                </a:solidFill>
+                <a:latin typeface="微软雅黑"/>
+                <a:ea typeface="微软雅黑"/>
+                <a:cs typeface="微软雅黑"/>
+              </a:rPr>
+              <a:t>5 类落地方案</a:t>
+            </a:r>
+          </a:p>
+          <a:p>
+            <a:pPr algn="ctr">
+              <a:spcBef>
+                <a:spcPts val="300"/>
+              </a:spcBef>
+            </a:pPr>
+            <a:r>
+              <a:rPr sz="900">
+                <a:solidFill>
+                  <a:srgbClr val="2C3E50"/>
+                </a:solidFill>
+                <a:latin typeface="微软雅黑"/>
+                <a:ea typeface="微软雅黑"/>
+                <a:cs typeface="微软雅黑"/>
+              </a:rPr>
+              <a:t>含 IT 联合工程化推进</a:t>
+            </a:r>
+          </a:p>
+        </p:txBody>
+      </p:sp>
+      <p:sp>
+        <p:nvSpPr>
+          <p:cNvPr id="10" name="Rounded Rectangle 9"/>
+          <p:cNvSpPr/>
+          <p:nvPr/>
+        </p:nvSpPr>
+        <p:spPr>
+          <a:xfrm>
+            <a:off x="6858000" y="1051560"/>
+            <a:ext cx="2011680" cy="1051560"/>
+          </a:xfrm>
+          <a:prstGeom prst="roundRect">
+            <a:avLst>
+              <a:gd name="adj" fmla="val 8000"/>
+            </a:avLst>
+          </a:prstGeom>
+          <a:solidFill>
+            <a:srgbClr val="E7EEFB"/>
+          </a:solidFill>
+          <a:ln w="9525">
+            <a:solidFill>
+              <a:srgbClr val="DCE3EF"/>
+            </a:solidFill>
+          </a:ln>
+        </p:spPr>
+        <p:style>
+          <a:lnRef idx="1">
+            <a:schemeClr val="accent1"/>
+          </a:lnRef>
+          <a:fillRef idx="3">
+            <a:schemeClr val="accent1"/>
+          </a:fillRef>
+          <a:effectRef idx="2">
+            <a:schemeClr val="accent1"/>
+          </a:effectRef>
+          <a:fontRef idx="minor">
+            <a:schemeClr val="lt1"/>
+          </a:fontRef>
+        </p:style>
+        <p:txBody>
+          <a:bodyPr rtlCol="0" anchor="ctr" lIns="60000" rIns="60000" tIns="60000" bIns="60000"/>
+          <a:lstStyle/>
+          <a:p>
+            <a:pPr algn="ctr"/>
+            <a:r>
+              <a:rPr sz="2200" b="1">
+                <a:solidFill>
+                  <a:srgbClr val="FF7E3D"/>
+                </a:solidFill>
+                <a:latin typeface="微软雅黑"/>
+                <a:ea typeface="微软雅黑"/>
+                <a:cs typeface="微软雅黑"/>
+              </a:rPr>
+              <a:t>1 个重点场景</a:t>
+            </a:r>
+          </a:p>
+          <a:p>
+            <a:pPr algn="ctr">
+              <a:spcBef>
+                <a:spcPts val="300"/>
+              </a:spcBef>
+            </a:pPr>
+            <a:r>
+              <a:rPr sz="900">
+                <a:solidFill>
+                  <a:srgbClr val="2C3E50"/>
+                </a:solidFill>
+                <a:latin typeface="微软雅黑"/>
+                <a:ea typeface="微软雅黑"/>
+                <a:cs typeface="微软雅黑"/>
+              </a:rPr>
+              <a:t>设备预测性维护</a:t>
+            </a:r>
+          </a:p>
+        </p:txBody>
+      </p:sp>
+      <p:sp>
+        <p:nvSpPr>
+          <p:cNvPr id="11" name="Rectangle 10"/>
+          <p:cNvSpPr/>
+          <p:nvPr/>
+        </p:nvSpPr>
+        <p:spPr>
+          <a:xfrm>
+            <a:off x="274320" y="2286000"/>
+            <a:ext cx="2103120" cy="320040"/>
           </a:xfrm>
           <a:prstGeom prst="rect">
             <a:avLst/>
@@ -5074,22 +7107,23 @@
                 </a:solidFill>
                 <a:latin typeface="微软雅黑"/>
                 <a:ea typeface="微软雅黑"/>
-              </a:rPr>
-              <a:t>① 报告 AI 辅助撰写</a:t>
-            </a:r>
-          </a:p>
-        </p:txBody>
-      </p:sp>
-      <p:sp>
-        <p:nvSpPr>
-          <p:cNvPr id="8" name="Rectangle 7"/>
+                <a:cs typeface="微软雅黑"/>
+              </a:rPr>
+              <a:t>① 方向系统梳理</a:t>
+            </a:r>
+          </a:p>
+        </p:txBody>
+      </p:sp>
+      <p:sp>
+        <p:nvSpPr>
+          <p:cNvPr id="12" name="Rectangle 11"/>
           <p:cNvSpPr/>
           <p:nvPr/>
         </p:nvSpPr>
         <p:spPr>
           <a:xfrm>
-            <a:off x="274320" y="1417319"/>
-            <a:ext cx="2743200" cy="1508760"/>
+            <a:off x="274320" y="2606040"/>
+            <a:ext cx="2103120" cy="1874519"/>
           </a:xfrm>
           <a:prstGeom prst="rect">
             <a:avLst/>
@@ -5099,7 +7133,7 @@
           </a:solidFill>
           <a:ln w="9525">
             <a:solidFill>
-              <a:srgbClr val="F0F4FA"/>
+              <a:srgbClr val="DCE3EF"/>
             </a:solidFill>
           </a:ln>
         </p:spPr>
@@ -5127,14 +7161,14 @@
       </p:sp>
       <p:sp>
         <p:nvSpPr>
-          <p:cNvPr id="9" name="TextBox 8"/>
+          <p:cNvPr id="13" name="TextBox 12"/>
           <p:cNvSpPr txBox="1"/>
           <p:nvPr/>
         </p:nvSpPr>
         <p:spPr>
           <a:xfrm>
-            <a:off x="347472" y="1463039"/>
-            <a:ext cx="2596896" cy="1417319"/>
+            <a:off x="347472" y="2651760"/>
+            <a:ext cx="1956815" cy="1783079"/>
           </a:xfrm>
           <a:prstGeom prst="rect">
             <a:avLst/>
@@ -5142,14 +7176,14 @@
           <a:noFill/>
         </p:spPr>
         <p:txBody>
-          <a:bodyPr wrap="square" tIns="50000" lIns="0" rIns="0" bIns="50000">
+          <a:bodyPr wrap="square" lIns="0" rIns="0" tIns="50000" bIns="50000">
             <a:spAutoFit/>
           </a:bodyPr>
           <a:lstStyle/>
           <a:p>
             <a:pPr>
               <a:lnSpc>
-                <a:spcPct val="135000"/>
+                <a:spcPct val="130000"/>
               </a:lnSpc>
               <a:spcBef>
                 <a:spcPts val="0"/>
@@ -5159,21 +7193,21 @@
               </a:spcAft>
             </a:pPr>
             <a:r>
-              <a:rPr sz="900" b="1">
-                <a:solidFill>
-                  <a:srgbClr val="3263A7"/>
-                </a:solidFill>
-                <a:latin typeface="微软雅黑"/>
-                <a:ea typeface="微软雅黑"/>
-                <a:cs typeface="微软雅黑"/>
-              </a:rPr>
-              <a:t>Campaign Report / MOR / APR</a:t>
+              <a:rPr sz="850" b="0">
+                <a:solidFill>
+                  <a:srgbClr val="0F2B46"/>
+                </a:solidFill>
+                <a:latin typeface="微软雅黑"/>
+                <a:ea typeface="微软雅黑"/>
+                <a:cs typeface="微软雅黑"/>
+              </a:rPr>
+              <a:t>• 收敛并系统梳理生产管理 6 大 AI 应用方向</a:t>
             </a:r>
           </a:p>
           <a:p>
             <a:pPr>
               <a:lnSpc>
-                <a:spcPct val="135000"/>
+                <a:spcPct val="130000"/>
               </a:lnSpc>
               <a:spcBef>
                 <a:spcPts val="0"/>
@@ -5183,7 +7217,7 @@
               </a:spcAft>
             </a:pPr>
             <a:r>
-              <a:rPr sz="400" b="0">
+              <a:rPr sz="850" b="0">
                 <a:solidFill>
                   <a:srgbClr val="0F2B46"/>
                 </a:solidFill>
@@ -5191,13 +7225,13 @@
                 <a:ea typeface="微软雅黑"/>
                 <a:cs typeface="微软雅黑"/>
               </a:rPr>
-              <a:t/>
+              <a:t>• 编制思路方案 + 逐项落地推进方案</a:t>
             </a:r>
           </a:p>
           <a:p>
             <a:pPr>
               <a:lnSpc>
-                <a:spcPct val="135000"/>
+                <a:spcPct val="130000"/>
               </a:lnSpc>
               <a:spcBef>
                 <a:spcPts val="0"/>
@@ -5215,13 +7249,135 @@
                 <a:ea typeface="微软雅黑"/>
                 <a:cs typeface="微软雅黑"/>
               </a:rPr>
-              <a:t>• 数据源：MES / QMS / LIMS / SAP</a:t>
-            </a:r>
-          </a:p>
+              <a:t>• 为集团 AI 布局提供横向蓝图</a:t>
+            </a:r>
+          </a:p>
+        </p:txBody>
+      </p:sp>
+      <p:sp>
+        <p:nvSpPr>
+          <p:cNvPr id="14" name="Rectangle 13"/>
+          <p:cNvSpPr/>
+          <p:nvPr/>
+        </p:nvSpPr>
+        <p:spPr>
+          <a:xfrm>
+            <a:off x="2468880" y="2286000"/>
+            <a:ext cx="2103120" cy="320040"/>
+          </a:xfrm>
+          <a:prstGeom prst="rect">
+            <a:avLst/>
+          </a:prstGeom>
+          <a:solidFill>
+            <a:srgbClr val="00366A"/>
+          </a:solidFill>
+          <a:ln>
+            <a:noFill/>
+          </a:ln>
+        </p:spPr>
+        <p:style>
+          <a:lnRef idx="1">
+            <a:schemeClr val="accent1"/>
+          </a:lnRef>
+          <a:fillRef idx="3">
+            <a:schemeClr val="accent1"/>
+          </a:fillRef>
+          <a:effectRef idx="2">
+            <a:schemeClr val="accent1"/>
+          </a:effectRef>
+          <a:fontRef idx="minor">
+            <a:schemeClr val="lt1"/>
+          </a:fontRef>
+        </p:style>
+        <p:txBody>
+          <a:bodyPr rtlCol="0" anchor="ctr" lIns="50000" rIns="50000" tIns="30000" bIns="30000"/>
+          <a:lstStyle/>
+          <a:p>
+            <a:pPr algn="ctr"/>
+            <a:r>
+              <a:rPr sz="1050" b="1">
+                <a:solidFill>
+                  <a:srgbClr val="FFFFFF"/>
+                </a:solidFill>
+                <a:latin typeface="微软雅黑"/>
+                <a:ea typeface="微软雅黑"/>
+                <a:cs typeface="微软雅黑"/>
+              </a:rPr>
+              <a:t>② 供应商评估</a:t>
+            </a:r>
+          </a:p>
+        </p:txBody>
+      </p:sp>
+      <p:sp>
+        <p:nvSpPr>
+          <p:cNvPr id="15" name="Rectangle 14"/>
+          <p:cNvSpPr/>
+          <p:nvPr/>
+        </p:nvSpPr>
+        <p:spPr>
+          <a:xfrm>
+            <a:off x="2468880" y="2606040"/>
+            <a:ext cx="2103120" cy="1874519"/>
+          </a:xfrm>
+          <a:prstGeom prst="rect">
+            <a:avLst/>
+          </a:prstGeom>
+          <a:solidFill>
+            <a:srgbClr val="FFFFFF"/>
+          </a:solidFill>
+          <a:ln w="9525">
+            <a:solidFill>
+              <a:srgbClr val="DCE3EF"/>
+            </a:solidFill>
+          </a:ln>
+        </p:spPr>
+        <p:style>
+          <a:lnRef idx="1">
+            <a:schemeClr val="accent1"/>
+          </a:lnRef>
+          <a:fillRef idx="3">
+            <a:schemeClr val="accent1"/>
+          </a:fillRef>
+          <a:effectRef idx="2">
+            <a:schemeClr val="accent1"/>
+          </a:effectRef>
+          <a:fontRef idx="minor">
+            <a:schemeClr val="lt1"/>
+          </a:fontRef>
+        </p:style>
+        <p:txBody>
+          <a:bodyPr rtlCol="0" anchor="ctr"/>
+          <a:lstStyle/>
+          <a:p>
+            <a:pPr algn="ctr"/>
+          </a:p>
+        </p:txBody>
+      </p:sp>
+      <p:sp>
+        <p:nvSpPr>
+          <p:cNvPr id="16" name="TextBox 15"/>
+          <p:cNvSpPr txBox="1"/>
+          <p:nvPr/>
+        </p:nvSpPr>
+        <p:spPr>
+          <a:xfrm>
+            <a:off x="2542032" y="2651760"/>
+            <a:ext cx="1956815" cy="1783079"/>
+          </a:xfrm>
+          <a:prstGeom prst="rect">
+            <a:avLst/>
+          </a:prstGeom>
+          <a:noFill/>
+        </p:spPr>
+        <p:txBody>
+          <a:bodyPr wrap="square" lIns="0" rIns="0" tIns="50000" bIns="50000">
+            <a:spAutoFit/>
+          </a:bodyPr>
+          <a:lstStyle/>
           <a:p>
             <a:pPr>
               <a:lnSpc>
-                <a:spcPct val="135000"/>
+                <a:spcPct val="130000"/>
               </a:lnSpc>
               <a:spcBef>
                 <a:spcPts val="0"/>
@@ -5239,13 +7395,13 @@
                 <a:ea typeface="微软雅黑"/>
                 <a:cs typeface="微软雅黑"/>
               </a:rPr>
-              <a:t>• 底座：LLM + RAG</a:t>
+              <a:t>• 智现未来（半导体 AI 跨域）</a:t>
             </a:r>
           </a:p>
           <a:p>
             <a:pPr>
               <a:lnSpc>
-                <a:spcPct val="135000"/>
+                <a:spcPct val="130000"/>
               </a:lnSpc>
               <a:spcBef>
                 <a:spcPts val="0"/>
@@ -5263,134 +7419,13 @@
                 <a:ea typeface="微软雅黑"/>
                 <a:cs typeface="微软雅黑"/>
               </a:rPr>
-              <a:t>• 价值：工时节省 50-70%</a:t>
-            </a:r>
-          </a:p>
-        </p:txBody>
-      </p:sp>
-      <p:sp>
-        <p:nvSpPr>
-          <p:cNvPr id="10" name="Rectangle 9"/>
-          <p:cNvSpPr/>
-          <p:nvPr/>
-        </p:nvSpPr>
-        <p:spPr>
-          <a:xfrm>
-            <a:off x="3200400" y="1051560"/>
-            <a:ext cx="2743200" cy="365760"/>
-          </a:xfrm>
-          <a:prstGeom prst="rect">
-            <a:avLst/>
-          </a:prstGeom>
-          <a:solidFill>
-            <a:srgbClr val="3263A7"/>
-          </a:solidFill>
-          <a:ln>
-            <a:noFill/>
-          </a:ln>
-        </p:spPr>
-        <p:style>
-          <a:lnRef idx="1">
-            <a:schemeClr val="accent1"/>
-          </a:lnRef>
-          <a:fillRef idx="3">
-            <a:schemeClr val="accent1"/>
-          </a:fillRef>
-          <a:effectRef idx="2">
-            <a:schemeClr val="accent1"/>
-          </a:effectRef>
-          <a:fontRef idx="minor">
-            <a:schemeClr val="lt1"/>
-          </a:fontRef>
-        </p:style>
-        <p:txBody>
-          <a:bodyPr rtlCol="0" anchor="ctr" lIns="50000" rIns="50000" tIns="30000" bIns="30000"/>
-          <a:lstStyle/>
-          <a:p>
-            <a:pPr algn="ctr"/>
-            <a:r>
-              <a:rPr sz="1050" b="1">
-                <a:solidFill>
-                  <a:srgbClr val="FFFFFF"/>
-                </a:solidFill>
-                <a:latin typeface="微软雅黑"/>
-                <a:ea typeface="微软雅黑"/>
-              </a:rPr>
-              <a:t>② 技术转移与放大</a:t>
-            </a:r>
-          </a:p>
-        </p:txBody>
-      </p:sp>
-      <p:sp>
-        <p:nvSpPr>
-          <p:cNvPr id="11" name="Rectangle 10"/>
-          <p:cNvSpPr/>
-          <p:nvPr/>
-        </p:nvSpPr>
-        <p:spPr>
-          <a:xfrm>
-            <a:off x="3200400" y="1417319"/>
-            <a:ext cx="2743200" cy="1508760"/>
-          </a:xfrm>
-          <a:prstGeom prst="rect">
-            <a:avLst/>
-          </a:prstGeom>
-          <a:solidFill>
-            <a:srgbClr val="FFFFFF"/>
-          </a:solidFill>
-          <a:ln w="9525">
-            <a:solidFill>
-              <a:srgbClr val="F0F4FA"/>
-            </a:solidFill>
-          </a:ln>
-        </p:spPr>
-        <p:style>
-          <a:lnRef idx="1">
-            <a:schemeClr val="accent1"/>
-          </a:lnRef>
-          <a:fillRef idx="3">
-            <a:schemeClr val="accent1"/>
-          </a:fillRef>
-          <a:effectRef idx="2">
-            <a:schemeClr val="accent1"/>
-          </a:effectRef>
-          <a:fontRef idx="minor">
-            <a:schemeClr val="lt1"/>
-          </a:fontRef>
-        </p:style>
-        <p:txBody>
-          <a:bodyPr rtlCol="0" anchor="ctr"/>
-          <a:lstStyle/>
-          <a:p>
-            <a:pPr algn="ctr"/>
-          </a:p>
-        </p:txBody>
-      </p:sp>
-      <p:sp>
-        <p:nvSpPr>
-          <p:cNvPr id="12" name="TextBox 11"/>
-          <p:cNvSpPr txBox="1"/>
-          <p:nvPr/>
-        </p:nvSpPr>
-        <p:spPr>
-          <a:xfrm>
-            <a:off x="3273552" y="1463039"/>
-            <a:ext cx="2596896" cy="1417319"/>
-          </a:xfrm>
-          <a:prstGeom prst="rect">
-            <a:avLst/>
-          </a:prstGeom>
-          <a:noFill/>
-        </p:spPr>
-        <p:txBody>
-          <a:bodyPr wrap="square" tIns="50000" lIns="0" rIns="0" bIns="50000">
-            <a:spAutoFit/>
-          </a:bodyPr>
-          <a:lstStyle/>
+              <a:t>• 埃森哲（Industry X 智能资产管理）</a:t>
+            </a:r>
+          </a:p>
           <a:p>
             <a:pPr>
               <a:lnSpc>
-                <a:spcPct val="135000"/>
+                <a:spcPct val="130000"/>
               </a:lnSpc>
               <a:spcBef>
                 <a:spcPts val="0"/>
@@ -5400,21 +7435,143 @@
               </a:spcAft>
             </a:pPr>
             <a:r>
-              <a:rPr sz="900" b="1">
-                <a:solidFill>
-                  <a:srgbClr val="3263A7"/>
-                </a:solidFill>
-                <a:latin typeface="微软雅黑"/>
-                <a:ea typeface="微软雅黑"/>
-                <a:cs typeface="微软雅黑"/>
-              </a:rPr>
-              <a:t>R&amp;D → 中试 → 商业化</a:t>
-            </a:r>
-          </a:p>
+              <a:rPr sz="850" b="0">
+                <a:solidFill>
+                  <a:srgbClr val="0F2B46"/>
+                </a:solidFill>
+                <a:latin typeface="微软雅黑"/>
+                <a:ea typeface="微软雅黑"/>
+                <a:cs typeface="微软雅黑"/>
+              </a:rPr>
+              <a:t>• 形成"多供应商组合"合作思路</a:t>
+            </a:r>
+          </a:p>
+        </p:txBody>
+      </p:sp>
+      <p:sp>
+        <p:nvSpPr>
+          <p:cNvPr id="17" name="Rectangle 16"/>
+          <p:cNvSpPr/>
+          <p:nvPr/>
+        </p:nvSpPr>
+        <p:spPr>
+          <a:xfrm>
+            <a:off x="4663440" y="2286000"/>
+            <a:ext cx="2103120" cy="320040"/>
+          </a:xfrm>
+          <a:prstGeom prst="rect">
+            <a:avLst/>
+          </a:prstGeom>
+          <a:solidFill>
+            <a:srgbClr val="00366A"/>
+          </a:solidFill>
+          <a:ln>
+            <a:noFill/>
+          </a:ln>
+        </p:spPr>
+        <p:style>
+          <a:lnRef idx="1">
+            <a:schemeClr val="accent1"/>
+          </a:lnRef>
+          <a:fillRef idx="3">
+            <a:schemeClr val="accent1"/>
+          </a:fillRef>
+          <a:effectRef idx="2">
+            <a:schemeClr val="accent1"/>
+          </a:effectRef>
+          <a:fontRef idx="minor">
+            <a:schemeClr val="lt1"/>
+          </a:fontRef>
+        </p:style>
+        <p:txBody>
+          <a:bodyPr rtlCol="0" anchor="ctr" lIns="50000" rIns="50000" tIns="30000" bIns="30000"/>
+          <a:lstStyle/>
+          <a:p>
+            <a:pPr algn="ctr"/>
+            <a:r>
+              <a:rPr sz="1050" b="1">
+                <a:solidFill>
+                  <a:srgbClr val="FFFFFF"/>
+                </a:solidFill>
+                <a:latin typeface="微软雅黑"/>
+                <a:ea typeface="微软雅黑"/>
+                <a:cs typeface="微软雅黑"/>
+              </a:rPr>
+              <a:t>③ PdM 推进</a:t>
+            </a:r>
+          </a:p>
+        </p:txBody>
+      </p:sp>
+      <p:sp>
+        <p:nvSpPr>
+          <p:cNvPr id="18" name="Rectangle 17"/>
+          <p:cNvSpPr/>
+          <p:nvPr/>
+        </p:nvSpPr>
+        <p:spPr>
+          <a:xfrm>
+            <a:off x="4663440" y="2606040"/>
+            <a:ext cx="2103120" cy="1874519"/>
+          </a:xfrm>
+          <a:prstGeom prst="rect">
+            <a:avLst/>
+          </a:prstGeom>
+          <a:solidFill>
+            <a:srgbClr val="FFFFFF"/>
+          </a:solidFill>
+          <a:ln w="9525">
+            <a:solidFill>
+              <a:srgbClr val="DCE3EF"/>
+            </a:solidFill>
+          </a:ln>
+        </p:spPr>
+        <p:style>
+          <a:lnRef idx="1">
+            <a:schemeClr val="accent1"/>
+          </a:lnRef>
+          <a:fillRef idx="3">
+            <a:schemeClr val="accent1"/>
+          </a:fillRef>
+          <a:effectRef idx="2">
+            <a:schemeClr val="accent1"/>
+          </a:effectRef>
+          <a:fontRef idx="minor">
+            <a:schemeClr val="lt1"/>
+          </a:fontRef>
+        </p:style>
+        <p:txBody>
+          <a:bodyPr rtlCol="0" anchor="ctr"/>
+          <a:lstStyle/>
+          <a:p>
+            <a:pPr algn="ctr"/>
+          </a:p>
+        </p:txBody>
+      </p:sp>
+      <p:sp>
+        <p:nvSpPr>
+          <p:cNvPr id="19" name="TextBox 18"/>
+          <p:cNvSpPr txBox="1"/>
+          <p:nvPr/>
+        </p:nvSpPr>
+        <p:spPr>
+          <a:xfrm>
+            <a:off x="4736592" y="2651760"/>
+            <a:ext cx="1956815" cy="1783079"/>
+          </a:xfrm>
+          <a:prstGeom prst="rect">
+            <a:avLst/>
+          </a:prstGeom>
+          <a:noFill/>
+        </p:spPr>
+        <p:txBody>
+          <a:bodyPr wrap="square" lIns="0" rIns="0" tIns="50000" bIns="50000">
+            <a:spAutoFit/>
+          </a:bodyPr>
+          <a:lstStyle/>
           <a:p>
             <a:pPr>
               <a:lnSpc>
-                <a:spcPct val="135000"/>
+                <a:spcPct val="130000"/>
               </a:lnSpc>
               <a:spcBef>
                 <a:spcPts val="0"/>
@@ -5424,7 +7581,7 @@
               </a:spcAft>
             </a:pPr>
             <a:r>
-              <a:rPr sz="400" b="0">
+              <a:rPr sz="850" b="0">
                 <a:solidFill>
                   <a:srgbClr val="0F2B46"/>
                 </a:solidFill>
@@ -5432,13 +7589,13 @@
                 <a:ea typeface="微软雅黑"/>
                 <a:cs typeface="微软雅黑"/>
               </a:rPr>
-              <a:t/>
+              <a:t>• 结合 DH1 动力站现有基础</a:t>
             </a:r>
           </a:p>
           <a:p>
             <a:pPr>
               <a:lnSpc>
-                <a:spcPct val="135000"/>
+                <a:spcPct val="130000"/>
               </a:lnSpc>
               <a:spcBef>
                 <a:spcPts val="0"/>
@@ -5456,13 +7613,13 @@
                 <a:ea typeface="微软雅黑"/>
                 <a:cs typeface="微软雅黑"/>
               </a:rPr>
-              <a:t>• 输入：R&amp;D 工艺包 + 设备规格</a:t>
+              <a:t>• 完成和利时、信力共擎、埃森哲三方对比</a:t>
             </a:r>
           </a:p>
           <a:p>
             <a:pPr>
               <a:lnSpc>
-                <a:spcPct val="135000"/>
+                <a:spcPct val="130000"/>
               </a:lnSpc>
               <a:spcBef>
                 <a:spcPts val="0"/>
@@ -5480,13 +7637,13 @@
                 <a:ea typeface="微软雅黑"/>
                 <a:cs typeface="微软雅黑"/>
               </a:rPr>
-              <a:t>• 输出：审查清单 + 风险矩阵</a:t>
+              <a:t>• 主导埃森哲 PdM 会议后总结</a:t>
             </a:r>
           </a:p>
           <a:p>
             <a:pPr>
               <a:lnSpc>
-                <a:spcPct val="135000"/>
+                <a:spcPct val="130000"/>
               </a:lnSpc>
               <a:spcBef>
                 <a:spcPts val="0"/>
@@ -5504,21 +7661,21 @@
                 <a:ea typeface="微软雅黑"/>
                 <a:cs typeface="微软雅黑"/>
               </a:rPr>
-              <a:t>• 价值：NPI 周期 -30%</a:t>
-            </a:r>
-          </a:p>
-        </p:txBody>
-      </p:sp>
-      <p:sp>
-        <p:nvSpPr>
-          <p:cNvPr id="13" name="Rectangle 12"/>
+              <a:t>• 明确 4 类信息 + PoC 推进节奏</a:t>
+            </a:r>
+          </a:p>
+        </p:txBody>
+      </p:sp>
+      <p:sp>
+        <p:nvSpPr>
+          <p:cNvPr id="20" name="Rectangle 19"/>
           <p:cNvSpPr/>
           <p:nvPr/>
         </p:nvSpPr>
         <p:spPr>
           <a:xfrm>
-            <a:off x="6126480" y="1051560"/>
-            <a:ext cx="2743200" cy="365760"/>
+            <a:off x="6858000" y="2286000"/>
+            <a:ext cx="2011680" cy="320040"/>
           </a:xfrm>
           <a:prstGeom prst="rect">
             <a:avLst/>
@@ -5556,22 +7713,23 @@
                 </a:solidFill>
                 <a:latin typeface="微软雅黑"/>
                 <a:ea typeface="微软雅黑"/>
-              </a:rPr>
-              <a:t>③ 设备全生命周期 AI</a:t>
-            </a:r>
-          </a:p>
-        </p:txBody>
-      </p:sp>
-      <p:sp>
-        <p:nvSpPr>
-          <p:cNvPr id="14" name="Rectangle 13"/>
+                <a:cs typeface="微软雅黑"/>
+              </a:rPr>
+              <a:t>④ 跨部门协同</a:t>
+            </a:r>
+          </a:p>
+        </p:txBody>
+      </p:sp>
+      <p:sp>
+        <p:nvSpPr>
+          <p:cNvPr id="21" name="Rectangle 20"/>
           <p:cNvSpPr/>
           <p:nvPr/>
         </p:nvSpPr>
         <p:spPr>
           <a:xfrm>
-            <a:off x="6126480" y="1417319"/>
-            <a:ext cx="2743200" cy="1508760"/>
+            <a:off x="6858000" y="2606040"/>
+            <a:ext cx="2011680" cy="1874519"/>
           </a:xfrm>
           <a:prstGeom prst="rect">
             <a:avLst/>
@@ -5581,7 +7739,7 @@
           </a:solidFill>
           <a:ln w="9525">
             <a:solidFill>
-              <a:srgbClr val="F0F4FA"/>
+              <a:srgbClr val="DCE3EF"/>
             </a:solidFill>
           </a:ln>
         </p:spPr>
@@ -5609,14 +7767,14 @@
       </p:sp>
       <p:sp>
         <p:nvSpPr>
-          <p:cNvPr id="15" name="TextBox 14"/>
+          <p:cNvPr id="22" name="TextBox 21"/>
           <p:cNvSpPr txBox="1"/>
           <p:nvPr/>
         </p:nvSpPr>
         <p:spPr>
           <a:xfrm>
-            <a:off x="6199632" y="1463039"/>
-            <a:ext cx="2596896" cy="1417319"/>
+            <a:off x="6931152" y="2651760"/>
+            <a:ext cx="1865376" cy="1783079"/>
           </a:xfrm>
           <a:prstGeom prst="rect">
             <a:avLst/>
@@ -5624,14 +7782,14 @@
           <a:noFill/>
         </p:spPr>
         <p:txBody>
-          <a:bodyPr wrap="square" tIns="50000" lIns="0" rIns="0" bIns="50000">
+          <a:bodyPr wrap="square" lIns="0" rIns="0" tIns="50000" bIns="50000">
             <a:spAutoFit/>
           </a:bodyPr>
           <a:lstStyle/>
           <a:p>
             <a:pPr>
               <a:lnSpc>
-                <a:spcPct val="135000"/>
+                <a:spcPct val="130000"/>
               </a:lnSpc>
               <a:spcBef>
                 <a:spcPts val="0"/>
@@ -5641,21 +7799,21 @@
               </a:spcAft>
             </a:pPr>
             <a:r>
-              <a:rPr sz="900" b="1">
-                <a:solidFill>
-                  <a:srgbClr val="3263A7"/>
-                </a:solidFill>
-                <a:latin typeface="微软雅黑"/>
-                <a:ea typeface="微软雅黑"/>
-                <a:cs typeface="微软雅黑"/>
-              </a:rPr>
-              <a:t>含 PdM / 备件 / 验证 / 故障</a:t>
+              <a:rPr sz="850" b="0">
+                <a:solidFill>
+                  <a:srgbClr val="0F2B46"/>
+                </a:solidFill>
+                <a:latin typeface="微软雅黑"/>
+                <a:ea typeface="微软雅黑"/>
+                <a:cs typeface="微软雅黑"/>
+              </a:rPr>
+              <a:t>• 与 IT 联合输出 6 方向工程化实施方案</a:t>
             </a:r>
           </a:p>
           <a:p>
             <a:pPr>
               <a:lnSpc>
-                <a:spcPct val="135000"/>
+                <a:spcPct val="130000"/>
               </a:lnSpc>
               <a:spcBef>
                 <a:spcPts val="0"/>
@@ -5665,7 +7823,7 @@
               </a:spcAft>
             </a:pPr>
             <a:r>
-              <a:rPr sz="400" b="0">
+              <a:rPr sz="850" b="0">
                 <a:solidFill>
                   <a:srgbClr val="0F2B46"/>
                 </a:solidFill>
@@ -5673,13 +7831,13 @@
                 <a:ea typeface="微软雅黑"/>
                 <a:cs typeface="微软雅黑"/>
               </a:rPr>
-              <a:t/>
+              <a:t>• 生产看板系统氨基酸项目功能对接</a:t>
             </a:r>
           </a:p>
           <a:p>
             <a:pPr>
               <a:lnSpc>
-                <a:spcPct val="135000"/>
+                <a:spcPct val="130000"/>
               </a:lnSpc>
               <a:spcBef>
                 <a:spcPts val="0"/>
@@ -5697,778 +7855,7 @@
                 <a:ea typeface="微软雅黑"/>
                 <a:cs typeface="微软雅黑"/>
               </a:rPr>
-              <a:t>• 5 子模块共享一个底座</a:t>
-            </a:r>
-          </a:p>
-          <a:p>
-            <a:pPr>
-              <a:lnSpc>
-                <a:spcPct val="135000"/>
-              </a:lnSpc>
-              <a:spcBef>
-                <a:spcPts val="0"/>
-              </a:spcBef>
-              <a:spcAft>
-                <a:spcPts val="200"/>
-              </a:spcAft>
-            </a:pPr>
-            <a:r>
-              <a:rPr sz="850" b="0">
-                <a:solidFill>
-                  <a:srgbClr val="0F2B46"/>
-                </a:solidFill>
-                <a:latin typeface="微软雅黑"/>
-                <a:ea typeface="微软雅黑"/>
-                <a:cs typeface="微软雅黑"/>
-              </a:rPr>
-              <a:t>• 关键场景：预测性维护</a:t>
-            </a:r>
-          </a:p>
-          <a:p>
-            <a:pPr>
-              <a:lnSpc>
-                <a:spcPct val="135000"/>
-              </a:lnSpc>
-              <a:spcBef>
-                <a:spcPts val="0"/>
-              </a:spcBef>
-              <a:spcAft>
-                <a:spcPts val="200"/>
-              </a:spcAft>
-            </a:pPr>
-            <a:r>
-              <a:rPr sz="850" b="0">
-                <a:solidFill>
-                  <a:srgbClr val="0F2B46"/>
-                </a:solidFill>
-                <a:latin typeface="微软雅黑"/>
-                <a:ea typeface="微软雅黑"/>
-                <a:cs typeface="微软雅黑"/>
-              </a:rPr>
-              <a:t>• 价值：非计划停机 -40%</a:t>
-            </a:r>
-          </a:p>
-        </p:txBody>
-      </p:sp>
-      <p:sp>
-        <p:nvSpPr>
-          <p:cNvPr id="16" name="Rectangle 15"/>
-          <p:cNvSpPr/>
-          <p:nvPr/>
-        </p:nvSpPr>
-        <p:spPr>
-          <a:xfrm>
-            <a:off x="274320" y="3063240"/>
-            <a:ext cx="2743200" cy="365760"/>
-          </a:xfrm>
-          <a:prstGeom prst="rect">
-            <a:avLst/>
-          </a:prstGeom>
-          <a:solidFill>
-            <a:srgbClr val="3263A7"/>
-          </a:solidFill>
-          <a:ln>
-            <a:noFill/>
-          </a:ln>
-        </p:spPr>
-        <p:style>
-          <a:lnRef idx="1">
-            <a:schemeClr val="accent1"/>
-          </a:lnRef>
-          <a:fillRef idx="3">
-            <a:schemeClr val="accent1"/>
-          </a:fillRef>
-          <a:effectRef idx="2">
-            <a:schemeClr val="accent1"/>
-          </a:effectRef>
-          <a:fontRef idx="minor">
-            <a:schemeClr val="lt1"/>
-          </a:fontRef>
-        </p:style>
-        <p:txBody>
-          <a:bodyPr rtlCol="0" anchor="ctr" lIns="50000" rIns="50000" tIns="30000" bIns="30000"/>
-          <a:lstStyle/>
-          <a:p>
-            <a:pPr algn="ctr"/>
-            <a:r>
-              <a:rPr sz="1050" b="1">
-                <a:solidFill>
-                  <a:srgbClr val="FFFFFF"/>
-                </a:solidFill>
-                <a:latin typeface="微软雅黑"/>
-                <a:ea typeface="微软雅黑"/>
-              </a:rPr>
-              <a:t>④ 视觉 AI 操作合规</a:t>
-            </a:r>
-          </a:p>
-        </p:txBody>
-      </p:sp>
-      <p:sp>
-        <p:nvSpPr>
-          <p:cNvPr id="17" name="Rectangle 16"/>
-          <p:cNvSpPr/>
-          <p:nvPr/>
-        </p:nvSpPr>
-        <p:spPr>
-          <a:xfrm>
-            <a:off x="274320" y="3429000"/>
-            <a:ext cx="2743200" cy="1508760"/>
-          </a:xfrm>
-          <a:prstGeom prst="rect">
-            <a:avLst/>
-          </a:prstGeom>
-          <a:solidFill>
-            <a:srgbClr val="FFFFFF"/>
-          </a:solidFill>
-          <a:ln w="9525">
-            <a:solidFill>
-              <a:srgbClr val="F0F4FA"/>
-            </a:solidFill>
-          </a:ln>
-        </p:spPr>
-        <p:style>
-          <a:lnRef idx="1">
-            <a:schemeClr val="accent1"/>
-          </a:lnRef>
-          <a:fillRef idx="3">
-            <a:schemeClr val="accent1"/>
-          </a:fillRef>
-          <a:effectRef idx="2">
-            <a:schemeClr val="accent1"/>
-          </a:effectRef>
-          <a:fontRef idx="minor">
-            <a:schemeClr val="lt1"/>
-          </a:fontRef>
-        </p:style>
-        <p:txBody>
-          <a:bodyPr rtlCol="0" anchor="ctr"/>
-          <a:lstStyle/>
-          <a:p>
-            <a:pPr algn="ctr"/>
-          </a:p>
-        </p:txBody>
-      </p:sp>
-      <p:sp>
-        <p:nvSpPr>
-          <p:cNvPr id="18" name="TextBox 17"/>
-          <p:cNvSpPr txBox="1"/>
-          <p:nvPr/>
-        </p:nvSpPr>
-        <p:spPr>
-          <a:xfrm>
-            <a:off x="347472" y="3474720"/>
-            <a:ext cx="2596896" cy="1417319"/>
-          </a:xfrm>
-          <a:prstGeom prst="rect">
-            <a:avLst/>
-          </a:prstGeom>
-          <a:noFill/>
-        </p:spPr>
-        <p:txBody>
-          <a:bodyPr wrap="square" tIns="50000" lIns="0" rIns="0" bIns="50000">
-            <a:spAutoFit/>
-          </a:bodyPr>
-          <a:lstStyle/>
-          <a:p>
-            <a:pPr>
-              <a:lnSpc>
-                <a:spcPct val="135000"/>
-              </a:lnSpc>
-              <a:spcBef>
-                <a:spcPts val="0"/>
-              </a:spcBef>
-              <a:spcAft>
-                <a:spcPts val="200"/>
-              </a:spcAft>
-            </a:pPr>
-            <a:r>
-              <a:rPr sz="900" b="1">
-                <a:solidFill>
-                  <a:srgbClr val="3263A7"/>
-                </a:solidFill>
-                <a:latin typeface="微软雅黑"/>
-                <a:ea typeface="微软雅黑"/>
-                <a:cs typeface="微软雅黑"/>
-              </a:rPr>
-              <a:t>CV + SOP 实时监测</a:t>
-            </a:r>
-          </a:p>
-          <a:p>
-            <a:pPr>
-              <a:lnSpc>
-                <a:spcPct val="135000"/>
-              </a:lnSpc>
-              <a:spcBef>
-                <a:spcPts val="0"/>
-              </a:spcBef>
-              <a:spcAft>
-                <a:spcPts val="200"/>
-              </a:spcAft>
-            </a:pPr>
-            <a:r>
-              <a:rPr sz="400" b="0">
-                <a:solidFill>
-                  <a:srgbClr val="0F2B46"/>
-                </a:solidFill>
-                <a:latin typeface="微软雅黑"/>
-                <a:ea typeface="微软雅黑"/>
-                <a:cs typeface="微软雅黑"/>
-              </a:rPr>
-              <a:t/>
-            </a:r>
-          </a:p>
-          <a:p>
-            <a:pPr>
-              <a:lnSpc>
-                <a:spcPct val="135000"/>
-              </a:lnSpc>
-              <a:spcBef>
-                <a:spcPts val="0"/>
-              </a:spcBef>
-              <a:spcAft>
-                <a:spcPts val="200"/>
-              </a:spcAft>
-            </a:pPr>
-            <a:r>
-              <a:rPr sz="850" b="0">
-                <a:solidFill>
-                  <a:srgbClr val="0F2B46"/>
-                </a:solidFill>
-                <a:latin typeface="微软雅黑"/>
-                <a:ea typeface="微软雅黑"/>
-                <a:cs typeface="微软雅黑"/>
-              </a:rPr>
-              <a:t>• 输入：车间 CCTV 视频流</a:t>
-            </a:r>
-          </a:p>
-          <a:p>
-            <a:pPr>
-              <a:lnSpc>
-                <a:spcPct val="135000"/>
-              </a:lnSpc>
-              <a:spcBef>
-                <a:spcPts val="0"/>
-              </a:spcBef>
-              <a:spcAft>
-                <a:spcPts val="200"/>
-              </a:spcAft>
-            </a:pPr>
-            <a:r>
-              <a:rPr sz="850" b="0">
-                <a:solidFill>
-                  <a:srgbClr val="0F2B46"/>
-                </a:solidFill>
-                <a:latin typeface="微软雅黑"/>
-                <a:ea typeface="微软雅黑"/>
-                <a:cs typeface="微软雅黑"/>
-              </a:rPr>
-              <a:t>• 输出：违规实时告警</a:t>
-            </a:r>
-          </a:p>
-          <a:p>
-            <a:pPr>
-              <a:lnSpc>
-                <a:spcPct val="135000"/>
-              </a:lnSpc>
-              <a:spcBef>
-                <a:spcPts val="0"/>
-              </a:spcBef>
-              <a:spcAft>
-                <a:spcPts val="200"/>
-              </a:spcAft>
-            </a:pPr>
-            <a:r>
-              <a:rPr sz="850" b="0">
-                <a:solidFill>
-                  <a:srgbClr val="0F2B46"/>
-                </a:solidFill>
-                <a:latin typeface="微软雅黑"/>
-                <a:ea typeface="微软雅黑"/>
-                <a:cs typeface="微软雅黑"/>
-              </a:rPr>
-              <a:t>• 价值：巡检替代 30-50%</a:t>
-            </a:r>
-          </a:p>
-        </p:txBody>
-      </p:sp>
-      <p:sp>
-        <p:nvSpPr>
-          <p:cNvPr id="19" name="Rectangle 18"/>
-          <p:cNvSpPr/>
-          <p:nvPr/>
-        </p:nvSpPr>
-        <p:spPr>
-          <a:xfrm>
-            <a:off x="3200400" y="3063240"/>
-            <a:ext cx="2743200" cy="365760"/>
-          </a:xfrm>
-          <a:prstGeom prst="rect">
-            <a:avLst/>
-          </a:prstGeom>
-          <a:solidFill>
-            <a:srgbClr val="00366A"/>
-          </a:solidFill>
-          <a:ln>
-            <a:noFill/>
-          </a:ln>
-        </p:spPr>
-        <p:style>
-          <a:lnRef idx="1">
-            <a:schemeClr val="accent1"/>
-          </a:lnRef>
-          <a:fillRef idx="3">
-            <a:schemeClr val="accent1"/>
-          </a:fillRef>
-          <a:effectRef idx="2">
-            <a:schemeClr val="accent1"/>
-          </a:effectRef>
-          <a:fontRef idx="minor">
-            <a:schemeClr val="lt1"/>
-          </a:fontRef>
-        </p:style>
-        <p:txBody>
-          <a:bodyPr rtlCol="0" anchor="ctr" lIns="50000" rIns="50000" tIns="30000" bIns="30000"/>
-          <a:lstStyle/>
-          <a:p>
-            <a:pPr algn="ctr"/>
-            <a:r>
-              <a:rPr sz="1050" b="1">
-                <a:solidFill>
-                  <a:srgbClr val="FFFFFF"/>
-                </a:solidFill>
-                <a:latin typeface="微软雅黑"/>
-                <a:ea typeface="微软雅黑"/>
-              </a:rPr>
-              <a:t>⑤ AI 培训内容生成</a:t>
-            </a:r>
-          </a:p>
-        </p:txBody>
-      </p:sp>
-      <p:sp>
-        <p:nvSpPr>
-          <p:cNvPr id="20" name="Rectangle 19"/>
-          <p:cNvSpPr/>
-          <p:nvPr/>
-        </p:nvSpPr>
-        <p:spPr>
-          <a:xfrm>
-            <a:off x="3200400" y="3429000"/>
-            <a:ext cx="2743200" cy="1508760"/>
-          </a:xfrm>
-          <a:prstGeom prst="rect">
-            <a:avLst/>
-          </a:prstGeom>
-          <a:solidFill>
-            <a:srgbClr val="FFFFFF"/>
-          </a:solidFill>
-          <a:ln w="9525">
-            <a:solidFill>
-              <a:srgbClr val="F0F4FA"/>
-            </a:solidFill>
-          </a:ln>
-        </p:spPr>
-        <p:style>
-          <a:lnRef idx="1">
-            <a:schemeClr val="accent1"/>
-          </a:lnRef>
-          <a:fillRef idx="3">
-            <a:schemeClr val="accent1"/>
-          </a:fillRef>
-          <a:effectRef idx="2">
-            <a:schemeClr val="accent1"/>
-          </a:effectRef>
-          <a:fontRef idx="minor">
-            <a:schemeClr val="lt1"/>
-          </a:fontRef>
-        </p:style>
-        <p:txBody>
-          <a:bodyPr rtlCol="0" anchor="ctr"/>
-          <a:lstStyle/>
-          <a:p>
-            <a:pPr algn="ctr"/>
-          </a:p>
-        </p:txBody>
-      </p:sp>
-      <p:sp>
-        <p:nvSpPr>
-          <p:cNvPr id="21" name="TextBox 20"/>
-          <p:cNvSpPr txBox="1"/>
-          <p:nvPr/>
-        </p:nvSpPr>
-        <p:spPr>
-          <a:xfrm>
-            <a:off x="3273552" y="3474720"/>
-            <a:ext cx="2596896" cy="1417319"/>
-          </a:xfrm>
-          <a:prstGeom prst="rect">
-            <a:avLst/>
-          </a:prstGeom>
-          <a:noFill/>
-        </p:spPr>
-        <p:txBody>
-          <a:bodyPr wrap="square" tIns="50000" lIns="0" rIns="0" bIns="50000">
-            <a:spAutoFit/>
-          </a:bodyPr>
-          <a:lstStyle/>
-          <a:p>
-            <a:pPr>
-              <a:lnSpc>
-                <a:spcPct val="135000"/>
-              </a:lnSpc>
-              <a:spcBef>
-                <a:spcPts val="0"/>
-              </a:spcBef>
-              <a:spcAft>
-                <a:spcPts val="200"/>
-              </a:spcAft>
-            </a:pPr>
-            <a:r>
-              <a:rPr sz="900" b="1">
-                <a:solidFill>
-                  <a:srgbClr val="3263A7"/>
-                </a:solidFill>
-                <a:latin typeface="微软雅黑"/>
-                <a:ea typeface="微软雅黑"/>
-                <a:cs typeface="微软雅黑"/>
-              </a:rPr>
-              <a:t>SOP → 数字人 → 视频</a:t>
-            </a:r>
-          </a:p>
-          <a:p>
-            <a:pPr>
-              <a:lnSpc>
-                <a:spcPct val="135000"/>
-              </a:lnSpc>
-              <a:spcBef>
-                <a:spcPts val="0"/>
-              </a:spcBef>
-              <a:spcAft>
-                <a:spcPts val="200"/>
-              </a:spcAft>
-            </a:pPr>
-            <a:r>
-              <a:rPr sz="400" b="0">
-                <a:solidFill>
-                  <a:srgbClr val="0F2B46"/>
-                </a:solidFill>
-                <a:latin typeface="微软雅黑"/>
-                <a:ea typeface="微软雅黑"/>
-                <a:cs typeface="微软雅黑"/>
-              </a:rPr>
-              <a:t/>
-            </a:r>
-          </a:p>
-          <a:p>
-            <a:pPr>
-              <a:lnSpc>
-                <a:spcPct val="135000"/>
-              </a:lnSpc>
-              <a:spcBef>
-                <a:spcPts val="0"/>
-              </a:spcBef>
-              <a:spcAft>
-                <a:spcPts val="200"/>
-              </a:spcAft>
-            </a:pPr>
-            <a:r>
-              <a:rPr sz="850" b="0">
-                <a:solidFill>
-                  <a:srgbClr val="0F2B46"/>
-                </a:solidFill>
-                <a:latin typeface="微软雅黑"/>
-                <a:ea typeface="微软雅黑"/>
-                <a:cs typeface="微软雅黑"/>
-              </a:rPr>
-              <a:t>• 输入：SOP 文档 + 素材库</a:t>
-            </a:r>
-          </a:p>
-          <a:p>
-            <a:pPr>
-              <a:lnSpc>
-                <a:spcPct val="135000"/>
-              </a:lnSpc>
-              <a:spcBef>
-                <a:spcPts val="0"/>
-              </a:spcBef>
-              <a:spcAft>
-                <a:spcPts val="200"/>
-              </a:spcAft>
-            </a:pPr>
-            <a:r>
-              <a:rPr sz="850" b="0">
-                <a:solidFill>
-                  <a:srgbClr val="0F2B46"/>
-                </a:solidFill>
-                <a:latin typeface="微软雅黑"/>
-                <a:ea typeface="微软雅黑"/>
-                <a:cs typeface="微软雅黑"/>
-              </a:rPr>
-              <a:t>• 输出：分镜脚本 + 视频</a:t>
-            </a:r>
-          </a:p>
-          <a:p>
-            <a:pPr>
-              <a:lnSpc>
-                <a:spcPct val="135000"/>
-              </a:lnSpc>
-              <a:spcBef>
-                <a:spcPts val="0"/>
-              </a:spcBef>
-              <a:spcAft>
-                <a:spcPts val="200"/>
-              </a:spcAft>
-            </a:pPr>
-            <a:r>
-              <a:rPr sz="850" b="0">
-                <a:solidFill>
-                  <a:srgbClr val="0F2B46"/>
-                </a:solidFill>
-                <a:latin typeface="微软雅黑"/>
-                <a:ea typeface="微软雅黑"/>
-                <a:cs typeface="微软雅黑"/>
-              </a:rPr>
-              <a:t>• 价值：制作周期 2 周 → 1 天</a:t>
-            </a:r>
-          </a:p>
-        </p:txBody>
-      </p:sp>
-      <p:sp>
-        <p:nvSpPr>
-          <p:cNvPr id="22" name="Rectangle 21"/>
-          <p:cNvSpPr/>
-          <p:nvPr/>
-        </p:nvSpPr>
-        <p:spPr>
-          <a:xfrm>
-            <a:off x="6126480" y="3063240"/>
-            <a:ext cx="2743200" cy="365760"/>
-          </a:xfrm>
-          <a:prstGeom prst="rect">
-            <a:avLst/>
-          </a:prstGeom>
-          <a:solidFill>
-            <a:srgbClr val="3263A7"/>
-          </a:solidFill>
-          <a:ln>
-            <a:noFill/>
-          </a:ln>
-        </p:spPr>
-        <p:style>
-          <a:lnRef idx="1">
-            <a:schemeClr val="accent1"/>
-          </a:lnRef>
-          <a:fillRef idx="3">
-            <a:schemeClr val="accent1"/>
-          </a:fillRef>
-          <a:effectRef idx="2">
-            <a:schemeClr val="accent1"/>
-          </a:effectRef>
-          <a:fontRef idx="minor">
-            <a:schemeClr val="lt1"/>
-          </a:fontRef>
-        </p:style>
-        <p:txBody>
-          <a:bodyPr rtlCol="0" anchor="ctr" lIns="50000" rIns="50000" tIns="30000" bIns="30000"/>
-          <a:lstStyle/>
-          <a:p>
-            <a:pPr algn="ctr"/>
-            <a:r>
-              <a:rPr sz="1050" b="1">
-                <a:solidFill>
-                  <a:srgbClr val="FFFFFF"/>
-                </a:solidFill>
-                <a:latin typeface="微软雅黑"/>
-                <a:ea typeface="微软雅黑"/>
-              </a:rPr>
-              <a:t>⑥ QC 报告 AI 起草</a:t>
-            </a:r>
-          </a:p>
-        </p:txBody>
-      </p:sp>
-      <p:sp>
-        <p:nvSpPr>
-          <p:cNvPr id="23" name="Rectangle 22"/>
-          <p:cNvSpPr/>
-          <p:nvPr/>
-        </p:nvSpPr>
-        <p:spPr>
-          <a:xfrm>
-            <a:off x="6126480" y="3429000"/>
-            <a:ext cx="2743200" cy="1508760"/>
-          </a:xfrm>
-          <a:prstGeom prst="rect">
-            <a:avLst/>
-          </a:prstGeom>
-          <a:solidFill>
-            <a:srgbClr val="FFFFFF"/>
-          </a:solidFill>
-          <a:ln w="9525">
-            <a:solidFill>
-              <a:srgbClr val="F0F4FA"/>
-            </a:solidFill>
-          </a:ln>
-        </p:spPr>
-        <p:style>
-          <a:lnRef idx="1">
-            <a:schemeClr val="accent1"/>
-          </a:lnRef>
-          <a:fillRef idx="3">
-            <a:schemeClr val="accent1"/>
-          </a:fillRef>
-          <a:effectRef idx="2">
-            <a:schemeClr val="accent1"/>
-          </a:effectRef>
-          <a:fontRef idx="minor">
-            <a:schemeClr val="lt1"/>
-          </a:fontRef>
-        </p:style>
-        <p:txBody>
-          <a:bodyPr rtlCol="0" anchor="ctr"/>
-          <a:lstStyle/>
-          <a:p>
-            <a:pPr algn="ctr"/>
-          </a:p>
-        </p:txBody>
-      </p:sp>
-      <p:sp>
-        <p:nvSpPr>
-          <p:cNvPr id="24" name="TextBox 23"/>
-          <p:cNvSpPr txBox="1"/>
-          <p:nvPr/>
-        </p:nvSpPr>
-        <p:spPr>
-          <a:xfrm>
-            <a:off x="6199632" y="3474720"/>
-            <a:ext cx="2596896" cy="1417319"/>
-          </a:xfrm>
-          <a:prstGeom prst="rect">
-            <a:avLst/>
-          </a:prstGeom>
-          <a:noFill/>
-        </p:spPr>
-        <p:txBody>
-          <a:bodyPr wrap="square" tIns="50000" lIns="0" rIns="0" bIns="50000">
-            <a:spAutoFit/>
-          </a:bodyPr>
-          <a:lstStyle/>
-          <a:p>
-            <a:pPr>
-              <a:lnSpc>
-                <a:spcPct val="135000"/>
-              </a:lnSpc>
-              <a:spcBef>
-                <a:spcPts val="0"/>
-              </a:spcBef>
-              <a:spcAft>
-                <a:spcPts val="200"/>
-              </a:spcAft>
-            </a:pPr>
-            <a:r>
-              <a:rPr sz="900" b="1">
-                <a:solidFill>
-                  <a:srgbClr val="3263A7"/>
-                </a:solidFill>
-                <a:latin typeface="微软雅黑"/>
-                <a:ea typeface="微软雅黑"/>
-                <a:cs typeface="微软雅黑"/>
-              </a:rPr>
-              <a:t>BDCT 升级 · 预测放行</a:t>
-            </a:r>
-          </a:p>
-          <a:p>
-            <a:pPr>
-              <a:lnSpc>
-                <a:spcPct val="135000"/>
-              </a:lnSpc>
-              <a:spcBef>
-                <a:spcPts val="0"/>
-              </a:spcBef>
-              <a:spcAft>
-                <a:spcPts val="200"/>
-              </a:spcAft>
-            </a:pPr>
-            <a:r>
-              <a:rPr sz="400" b="0">
-                <a:solidFill>
-                  <a:srgbClr val="0F2B46"/>
-                </a:solidFill>
-                <a:latin typeface="微软雅黑"/>
-                <a:ea typeface="微软雅黑"/>
-                <a:cs typeface="微软雅黑"/>
-              </a:rPr>
-              <a:t/>
-            </a:r>
-          </a:p>
-          <a:p>
-            <a:pPr>
-              <a:lnSpc>
-                <a:spcPct val="135000"/>
-              </a:lnSpc>
-              <a:spcBef>
-                <a:spcPts val="0"/>
-              </a:spcBef>
-              <a:spcAft>
-                <a:spcPts val="200"/>
-              </a:spcAft>
-            </a:pPr>
-            <a:r>
-              <a:rPr sz="850" b="0">
-                <a:solidFill>
-                  <a:srgbClr val="0F2B46"/>
-                </a:solidFill>
-                <a:latin typeface="微软雅黑"/>
-                <a:ea typeface="微软雅黑"/>
-                <a:cs typeface="微软雅黑"/>
-              </a:rPr>
-              <a:t>• 数据源：LIMS + IPC + PAT</a:t>
-            </a:r>
-          </a:p>
-          <a:p>
-            <a:pPr>
-              <a:lnSpc>
-                <a:spcPct val="135000"/>
-              </a:lnSpc>
-              <a:spcBef>
-                <a:spcPts val="0"/>
-              </a:spcBef>
-              <a:spcAft>
-                <a:spcPts val="200"/>
-              </a:spcAft>
-            </a:pPr>
-            <a:r>
-              <a:rPr sz="850" b="0">
-                <a:solidFill>
-                  <a:srgbClr val="0F2B46"/>
-                </a:solidFill>
-                <a:latin typeface="微软雅黑"/>
-                <a:ea typeface="微软雅黑"/>
-                <a:cs typeface="微软雅黑"/>
-              </a:rPr>
-              <a:t>• 底座：多变量预测模型</a:t>
-            </a:r>
-          </a:p>
-          <a:p>
-            <a:pPr>
-              <a:lnSpc>
-                <a:spcPct val="135000"/>
-              </a:lnSpc>
-              <a:spcBef>
-                <a:spcPts val="0"/>
-              </a:spcBef>
-              <a:spcAft>
-                <a:spcPts val="200"/>
-              </a:spcAft>
-            </a:pPr>
-            <a:r>
-              <a:rPr sz="850" b="0">
-                <a:solidFill>
-                  <a:srgbClr val="0F2B46"/>
-                </a:solidFill>
-                <a:latin typeface="微软雅黑"/>
-                <a:ea typeface="微软雅黑"/>
-                <a:cs typeface="微软雅黑"/>
-              </a:rPr>
-              <a:t>• 价值：放行加速 + 报废预警</a:t>
+              <a:t>• 配合电算化等其他数智化重点工作</a:t>
             </a:r>
           </a:p>
         </p:txBody>
@@ -6547,7 +7934,7 @@
         </p:nvSpPr>
         <p:spPr>
           <a:xfrm>
-            <a:off x="457200" y="2011680"/>
+            <a:off x="457200" y="2194560"/>
             <a:ext cx="8229600" cy="822960"/>
           </a:xfrm>
           <a:prstGeom prst="rect">
@@ -6563,14 +7950,15 @@
           <a:p>
             <a:pPr algn="ctr"/>
             <a:r>
-              <a:rPr sz="3200" b="1">
+              <a:rPr sz="3400" b="1">
                 <a:solidFill>
                   <a:srgbClr val="FFFFFF"/>
                 </a:solidFill>
                 <a:latin typeface="微软雅黑"/>
                 <a:ea typeface="微软雅黑"/>
-              </a:rPr>
-              <a:t>外部合作 · 供应商深度评估</a:t>
+                <a:cs typeface="微软雅黑"/>
+              </a:rPr>
+              <a:t>6 大 AI 应用方向 · 系统梳理</a:t>
             </a:r>
           </a:p>
         </p:txBody>
@@ -6734,8 +8122,9 @@
                 </a:solidFill>
                 <a:latin typeface="微软雅黑"/>
                 <a:ea typeface="微软雅黑"/>
-              </a:rPr>
-              <a:t>3 家潜在合作商深度评估</a:t>
+                <a:cs typeface="微软雅黑"/>
+              </a:rPr>
+              <a:t>生产管理 6 大 AI 应用方向</a:t>
             </a:r>
           </a:p>
         </p:txBody>
@@ -6903,7 +8292,7 @@
         <p:spPr>
           <a:xfrm>
             <a:off x="274320" y="1051560"/>
-            <a:ext cx="2788920" cy="411480"/>
+            <a:ext cx="2743200" cy="365760"/>
           </a:xfrm>
           <a:prstGeom prst="rect">
             <a:avLst/>
@@ -6935,14 +8324,15 @@
           <a:p>
             <a:pPr algn="ctr"/>
             <a:r>
-              <a:rPr sz="1300" b="1">
+              <a:rPr sz="1050" b="1">
                 <a:solidFill>
                   <a:srgbClr val="FFFFFF"/>
                 </a:solidFill>
                 <a:latin typeface="微软雅黑"/>
                 <a:ea typeface="微软雅黑"/>
-              </a:rPr>
-              <a:t>智现未来</a:t>
+                <a:cs typeface="微软雅黑"/>
+              </a:rPr>
+              <a:t>① 报告 AI 辅助撰写</a:t>
             </a:r>
           </a:p>
         </p:txBody>
@@ -6955,8 +8345,8 @@
         </p:nvSpPr>
         <p:spPr>
           <a:xfrm>
-            <a:off x="274320" y="1463039"/>
-            <a:ext cx="2788920" cy="3017520"/>
+            <a:off x="274320" y="1417319"/>
+            <a:ext cx="2743200" cy="1508760"/>
           </a:xfrm>
           <a:prstGeom prst="rect">
             <a:avLst/>
@@ -6966,7 +8356,7 @@
           </a:solidFill>
           <a:ln w="9525">
             <a:solidFill>
-              <a:srgbClr val="F0F4FA"/>
+              <a:srgbClr val="DCE3EF"/>
             </a:solidFill>
           </a:ln>
         </p:spPr>
@@ -7000,8 +8390,8 @@
         </p:nvSpPr>
         <p:spPr>
           <a:xfrm>
-            <a:off x="347472" y="1508760"/>
-            <a:ext cx="2642615" cy="274320"/>
+            <a:off x="347472" y="1463039"/>
+            <a:ext cx="2596896" cy="1417319"/>
           </a:xfrm>
           <a:prstGeom prst="rect">
             <a:avLst/>
@@ -7009,118 +8399,32 @@
           <a:noFill/>
         </p:spPr>
         <p:txBody>
-          <a:bodyPr wrap="none" tIns="20000" lIns="30000">
+          <a:bodyPr wrap="square" tIns="50000" lIns="0" rIns="0" bIns="50000">
             <a:spAutoFit/>
           </a:bodyPr>
           <a:lstStyle/>
-          <a:p>
-            <a:pPr algn="l"/>
-            <a:r>
-              <a:rPr sz="950" i="1">
-                <a:solidFill>
-                  <a:srgbClr val="3263A7"/>
-                </a:solidFill>
-                <a:latin typeface="微软雅黑"/>
-                <a:ea typeface="微软雅黑"/>
-              </a:rPr>
-              <a:t>半导体 AI 跨域平移</a:t>
-            </a:r>
-          </a:p>
-        </p:txBody>
-      </p:sp>
-      <p:sp>
-        <p:nvSpPr>
-          <p:cNvPr id="10" name="TextBox 9"/>
-          <p:cNvSpPr txBox="1"/>
-          <p:nvPr/>
-        </p:nvSpPr>
-        <p:spPr>
-          <a:xfrm>
-            <a:off x="347472" y="1828800"/>
-            <a:ext cx="2642615" cy="685800"/>
-          </a:xfrm>
-          <a:prstGeom prst="rect">
-            <a:avLst/>
-          </a:prstGeom>
-          <a:noFill/>
-        </p:spPr>
-        <p:txBody>
-          <a:bodyPr wrap="square" lIns="30000" tIns="0">
-            <a:spAutoFit/>
-          </a:bodyPr>
-          <a:lstStyle/>
-          <a:p>
-            <a:pPr>
-              <a:spcAft>
-                <a:spcPts val="100"/>
-              </a:spcAft>
-            </a:pPr>
-            <a:r>
-              <a:rPr sz="850" b="1">
-                <a:solidFill>
-                  <a:srgbClr val="FF7E3D"/>
-                </a:solidFill>
-                <a:latin typeface="微软雅黑"/>
-                <a:ea typeface="微软雅黑"/>
-              </a:rPr>
-              <a:t>定位</a:t>
-            </a:r>
-          </a:p>
           <a:p>
             <a:pPr>
               <a:lnSpc>
                 <a:spcPct val="130000"/>
               </a:lnSpc>
-            </a:pPr>
-            <a:r>
-              <a:rPr sz="900">
-                <a:solidFill>
-                  <a:srgbClr val="0F2B46"/>
-                </a:solidFill>
-                <a:latin typeface="微软雅黑"/>
-                <a:ea typeface="微软雅黑"/>
-              </a:rPr>
-              <a:t>半导体晶圆厂 AI 软件国产化领先</a:t>
-            </a:r>
-          </a:p>
-        </p:txBody>
-      </p:sp>
-      <p:sp>
-        <p:nvSpPr>
-          <p:cNvPr id="11" name="TextBox 10"/>
-          <p:cNvSpPr txBox="1"/>
-          <p:nvPr/>
-        </p:nvSpPr>
-        <p:spPr>
-          <a:xfrm>
-            <a:off x="347472" y="2487167"/>
-            <a:ext cx="2642615" cy="685800"/>
-          </a:xfrm>
-          <a:prstGeom prst="rect">
-            <a:avLst/>
-          </a:prstGeom>
-          <a:noFill/>
-        </p:spPr>
-        <p:txBody>
-          <a:bodyPr wrap="square" lIns="30000" tIns="0">
-            <a:spAutoFit/>
-          </a:bodyPr>
-          <a:lstStyle/>
-          <a:p>
-            <a:pPr>
+              <a:spcBef>
+                <a:spcPts val="0"/>
+              </a:spcBef>
               <a:spcAft>
-                <a:spcPts val="100"/>
+                <a:spcPts val="200"/>
               </a:spcAft>
             </a:pPr>
             <a:r>
-              <a:rPr sz="850" b="1">
-                <a:solidFill>
-                  <a:srgbClr val="FF7E3D"/>
-                </a:solidFill>
-                <a:latin typeface="微软雅黑"/>
-                <a:ea typeface="微软雅黑"/>
-              </a:rPr>
-              <a:t>核心能力</a:t>
+              <a:rPr sz="900" b="1">
+                <a:solidFill>
+                  <a:srgbClr val="3263A7"/>
+                </a:solidFill>
+                <a:latin typeface="微软雅黑"/>
+                <a:ea typeface="微软雅黑"/>
+                <a:cs typeface="微软雅黑"/>
+              </a:rPr>
+              <a:t>Campaign Report / MOR / APR</a:t>
             </a:r>
           </a:p>
           <a:p>
@@ -7128,56 +8432,23 @@
               <a:lnSpc>
                 <a:spcPct val="130000"/>
               </a:lnSpc>
-            </a:pPr>
-            <a:r>
-              <a:rPr sz="900">
-                <a:solidFill>
-                  <a:srgbClr val="0F2B46"/>
-                </a:solidFill>
-                <a:latin typeface="微软雅黑"/>
-                <a:ea typeface="微软雅黑"/>
-              </a:rPr>
-              <a:t>FDC / RMS / APC / 技术转移 / PdM 算法</a:t>
-            </a:r>
-          </a:p>
-        </p:txBody>
-      </p:sp>
-      <p:sp>
-        <p:nvSpPr>
-          <p:cNvPr id="12" name="TextBox 11"/>
-          <p:cNvSpPr txBox="1"/>
-          <p:nvPr/>
-        </p:nvSpPr>
-        <p:spPr>
-          <a:xfrm>
-            <a:off x="347472" y="3145536"/>
-            <a:ext cx="2642615" cy="685800"/>
-          </a:xfrm>
-          <a:prstGeom prst="rect">
-            <a:avLst/>
-          </a:prstGeom>
-          <a:noFill/>
-        </p:spPr>
-        <p:txBody>
-          <a:bodyPr wrap="square" lIns="30000" tIns="0">
-            <a:spAutoFit/>
-          </a:bodyPr>
-          <a:lstStyle/>
-          <a:p>
-            <a:pPr>
+              <a:spcBef>
+                <a:spcPts val="0"/>
+              </a:spcBef>
               <a:spcAft>
-                <a:spcPts val="100"/>
+                <a:spcPts val="200"/>
               </a:spcAft>
             </a:pPr>
             <a:r>
-              <a:rPr sz="850" b="1">
-                <a:solidFill>
-                  <a:srgbClr val="FF7E3D"/>
-                </a:solidFill>
-                <a:latin typeface="微软雅黑"/>
-                <a:ea typeface="微软雅黑"/>
-              </a:rPr>
-              <a:t>凯莱英适配</a:t>
+              <a:rPr sz="400" b="0">
+                <a:solidFill>
+                  <a:srgbClr val="0F2B46"/>
+                </a:solidFill>
+                <a:latin typeface="微软雅黑"/>
+                <a:ea typeface="微软雅黑"/>
+                <a:cs typeface="微软雅黑"/>
+              </a:rPr>
+              <a:t/>
             </a:r>
           </a:p>
           <a:p>
@@ -7185,56 +8456,23 @@
               <a:lnSpc>
                 <a:spcPct val="130000"/>
               </a:lnSpc>
-            </a:pPr>
-            <a:r>
-              <a:rPr sz="900">
-                <a:solidFill>
-                  <a:srgbClr val="0F2B46"/>
-                </a:solidFill>
-                <a:latin typeface="微软雅黑"/>
-                <a:ea typeface="微软雅黑"/>
-              </a:rPr>
-              <a:t>算法层强，制药案例空白需 6-12 月适配</a:t>
-            </a:r>
-          </a:p>
-        </p:txBody>
-      </p:sp>
-      <p:sp>
-        <p:nvSpPr>
-          <p:cNvPr id="13" name="TextBox 12"/>
-          <p:cNvSpPr txBox="1"/>
-          <p:nvPr/>
-        </p:nvSpPr>
-        <p:spPr>
-          <a:xfrm>
-            <a:off x="347472" y="3803904"/>
-            <a:ext cx="2642615" cy="685800"/>
-          </a:xfrm>
-          <a:prstGeom prst="rect">
-            <a:avLst/>
-          </a:prstGeom>
-          <a:noFill/>
-        </p:spPr>
-        <p:txBody>
-          <a:bodyPr wrap="square" lIns="30000" tIns="0">
-            <a:spAutoFit/>
-          </a:bodyPr>
-          <a:lstStyle/>
-          <a:p>
-            <a:pPr>
+              <a:spcBef>
+                <a:spcPts val="0"/>
+              </a:spcBef>
               <a:spcAft>
-                <a:spcPts val="100"/>
+                <a:spcPts val="200"/>
               </a:spcAft>
             </a:pPr>
             <a:r>
-              <a:rPr sz="850" b="1">
-                <a:solidFill>
-                  <a:srgbClr val="FF7E3D"/>
-                </a:solidFill>
-                <a:latin typeface="微软雅黑"/>
-                <a:ea typeface="微软雅黑"/>
-              </a:rPr>
-              <a:t>结论</a:t>
+              <a:rPr sz="850" b="0">
+                <a:solidFill>
+                  <a:srgbClr val="0F2B46"/>
+                </a:solidFill>
+                <a:latin typeface="微软雅黑"/>
+                <a:ea typeface="微软雅黑"/>
+                <a:cs typeface="微软雅黑"/>
+              </a:rPr>
+              <a:t>• 数据源：MES / QMS / LIMS / SAP</a:t>
             </a:r>
           </a:p>
           <a:p>
@@ -7242,30 +8480,61 @@
               <a:lnSpc>
                 <a:spcPct val="130000"/>
               </a:lnSpc>
+              <a:spcBef>
+                <a:spcPts val="0"/>
+              </a:spcBef>
+              <a:spcAft>
+                <a:spcPts val="200"/>
+              </a:spcAft>
             </a:pPr>
             <a:r>
-              <a:rPr sz="900">
+              <a:rPr sz="850" b="0">
                 <a:solidFill>
                   <a:srgbClr val="0F2B46"/>
                 </a:solidFill>
                 <a:latin typeface="微软雅黑"/>
                 <a:ea typeface="微软雅黑"/>
-              </a:rPr>
-              <a:t>算法层最深，可做 PoC 对照</a:t>
-            </a:r>
-          </a:p>
-        </p:txBody>
-      </p:sp>
-      <p:sp>
-        <p:nvSpPr>
-          <p:cNvPr id="14" name="Rectangle 13"/>
+                <a:cs typeface="微软雅黑"/>
+              </a:rPr>
+              <a:t>• 底座：LLM + RAG</a:t>
+            </a:r>
+          </a:p>
+          <a:p>
+            <a:pPr>
+              <a:lnSpc>
+                <a:spcPct val="130000"/>
+              </a:lnSpc>
+              <a:spcBef>
+                <a:spcPts val="0"/>
+              </a:spcBef>
+              <a:spcAft>
+                <a:spcPts val="200"/>
+              </a:spcAft>
+            </a:pPr>
+            <a:r>
+              <a:rPr sz="850" b="0">
+                <a:solidFill>
+                  <a:srgbClr val="0F2B46"/>
+                </a:solidFill>
+                <a:latin typeface="微软雅黑"/>
+                <a:ea typeface="微软雅黑"/>
+                <a:cs typeface="微软雅黑"/>
+              </a:rPr>
+              <a:t>• 价值：工时节省 50-70%</a:t>
+            </a:r>
+          </a:p>
+        </p:txBody>
+      </p:sp>
+      <p:sp>
+        <p:nvSpPr>
+          <p:cNvPr id="10" name="Rectangle 9"/>
           <p:cNvSpPr/>
           <p:nvPr/>
         </p:nvSpPr>
         <p:spPr>
           <a:xfrm>
             <a:off x="3200400" y="1051560"/>
-            <a:ext cx="2788920" cy="411480"/>
+            <a:ext cx="2743200" cy="365760"/>
           </a:xfrm>
           <a:prstGeom prst="rect">
             <a:avLst/>
@@ -7297,28 +8566,29 @@
           <a:p>
             <a:pPr algn="ctr"/>
             <a:r>
-              <a:rPr sz="1300" b="1">
+              <a:rPr sz="1050" b="1">
                 <a:solidFill>
                   <a:srgbClr val="FFFFFF"/>
                 </a:solidFill>
                 <a:latin typeface="微软雅黑"/>
                 <a:ea typeface="微软雅黑"/>
-              </a:rPr>
-              <a:t>埃森哲</a:t>
-            </a:r>
-          </a:p>
-        </p:txBody>
-      </p:sp>
-      <p:sp>
-        <p:nvSpPr>
-          <p:cNvPr id="15" name="Rectangle 14"/>
+                <a:cs typeface="微软雅黑"/>
+              </a:rPr>
+              <a:t>② 技术转移与放大</a:t>
+            </a:r>
+          </a:p>
+        </p:txBody>
+      </p:sp>
+      <p:sp>
+        <p:nvSpPr>
+          <p:cNvPr id="11" name="Rectangle 10"/>
           <p:cNvSpPr/>
           <p:nvPr/>
         </p:nvSpPr>
         <p:spPr>
           <a:xfrm>
-            <a:off x="3200400" y="1463039"/>
-            <a:ext cx="2788920" cy="3017520"/>
+            <a:off x="3200400" y="1417319"/>
+            <a:ext cx="2743200" cy="1508760"/>
           </a:xfrm>
           <a:prstGeom prst="rect">
             <a:avLst/>
@@ -7328,7 +8598,7 @@
           </a:solidFill>
           <a:ln w="9525">
             <a:solidFill>
-              <a:srgbClr val="F0F4FA"/>
+              <a:srgbClr val="DCE3EF"/>
             </a:solidFill>
           </a:ln>
         </p:spPr>
@@ -7356,14 +8626,14 @@
       </p:sp>
       <p:sp>
         <p:nvSpPr>
-          <p:cNvPr id="16" name="TextBox 15"/>
+          <p:cNvPr id="12" name="TextBox 11"/>
           <p:cNvSpPr txBox="1"/>
           <p:nvPr/>
         </p:nvSpPr>
         <p:spPr>
           <a:xfrm>
-            <a:off x="3273552" y="1508760"/>
-            <a:ext cx="2642615" cy="274320"/>
+            <a:off x="3273552" y="1463039"/>
+            <a:ext cx="2596896" cy="1417319"/>
           </a:xfrm>
           <a:prstGeom prst="rect">
             <a:avLst/>
@@ -7371,118 +8641,32 @@
           <a:noFill/>
         </p:spPr>
         <p:txBody>
-          <a:bodyPr wrap="none" tIns="20000" lIns="30000">
+          <a:bodyPr wrap="square" tIns="50000" lIns="0" rIns="0" bIns="50000">
             <a:spAutoFit/>
           </a:bodyPr>
           <a:lstStyle/>
-          <a:p>
-            <a:pPr algn="l"/>
-            <a:r>
-              <a:rPr sz="950" i="1">
-                <a:solidFill>
-                  <a:srgbClr val="3263A7"/>
-                </a:solidFill>
-                <a:latin typeface="微软雅黑"/>
-                <a:ea typeface="微软雅黑"/>
-              </a:rPr>
-              <a:t>Industry X 智能资产管理</a:t>
-            </a:r>
-          </a:p>
-        </p:txBody>
-      </p:sp>
-      <p:sp>
-        <p:nvSpPr>
-          <p:cNvPr id="17" name="TextBox 16"/>
-          <p:cNvSpPr txBox="1"/>
-          <p:nvPr/>
-        </p:nvSpPr>
-        <p:spPr>
-          <a:xfrm>
-            <a:off x="3273552" y="1828800"/>
-            <a:ext cx="2642615" cy="685800"/>
-          </a:xfrm>
-          <a:prstGeom prst="rect">
-            <a:avLst/>
-          </a:prstGeom>
-          <a:noFill/>
-        </p:spPr>
-        <p:txBody>
-          <a:bodyPr wrap="square" lIns="30000" tIns="0">
-            <a:spAutoFit/>
-          </a:bodyPr>
-          <a:lstStyle/>
-          <a:p>
-            <a:pPr>
-              <a:spcAft>
-                <a:spcPts val="100"/>
-              </a:spcAft>
-            </a:pPr>
-            <a:r>
-              <a:rPr sz="850" b="1">
-                <a:solidFill>
-                  <a:srgbClr val="FF7E3D"/>
-                </a:solidFill>
-                <a:latin typeface="微软雅黑"/>
-                <a:ea typeface="微软雅黑"/>
-              </a:rPr>
-              <a:t>定位</a:t>
-            </a:r>
-          </a:p>
           <a:p>
             <a:pPr>
               <a:lnSpc>
                 <a:spcPct val="130000"/>
               </a:lnSpc>
-            </a:pPr>
-            <a:r>
-              <a:rPr sz="900">
-                <a:solidFill>
-                  <a:srgbClr val="0F2B46"/>
-                </a:solidFill>
-                <a:latin typeface="微软雅黑"/>
-                <a:ea typeface="微软雅黑"/>
-              </a:rPr>
-              <a:t>全球咨询与系统集成商</a:t>
-            </a:r>
-          </a:p>
-        </p:txBody>
-      </p:sp>
-      <p:sp>
-        <p:nvSpPr>
-          <p:cNvPr id="18" name="TextBox 17"/>
-          <p:cNvSpPr txBox="1"/>
-          <p:nvPr/>
-        </p:nvSpPr>
-        <p:spPr>
-          <a:xfrm>
-            <a:off x="3273552" y="2487167"/>
-            <a:ext cx="2642615" cy="685800"/>
-          </a:xfrm>
-          <a:prstGeom prst="rect">
-            <a:avLst/>
-          </a:prstGeom>
-          <a:noFill/>
-        </p:spPr>
-        <p:txBody>
-          <a:bodyPr wrap="square" lIns="30000" tIns="0">
-            <a:spAutoFit/>
-          </a:bodyPr>
-          <a:lstStyle/>
-          <a:p>
-            <a:pPr>
+              <a:spcBef>
+                <a:spcPts val="0"/>
+              </a:spcBef>
               <a:spcAft>
-                <a:spcPts val="100"/>
+                <a:spcPts val="200"/>
               </a:spcAft>
             </a:pPr>
             <a:r>
-              <a:rPr sz="850" b="1">
-                <a:solidFill>
-                  <a:srgbClr val="FF7E3D"/>
-                </a:solidFill>
-                <a:latin typeface="微软雅黑"/>
-                <a:ea typeface="微软雅黑"/>
-              </a:rPr>
-              <a:t>核心能力</a:t>
+              <a:rPr sz="900" b="1">
+                <a:solidFill>
+                  <a:srgbClr val="3263A7"/>
+                </a:solidFill>
+                <a:latin typeface="微软雅黑"/>
+                <a:ea typeface="微软雅黑"/>
+                <a:cs typeface="微软雅黑"/>
+              </a:rPr>
+              <a:t>R&amp;D → 中试 → 商业化</a:t>
             </a:r>
           </a:p>
           <a:p>
@@ -7490,56 +8674,23 @@
               <a:lnSpc>
                 <a:spcPct val="130000"/>
               </a:lnSpc>
-            </a:pPr>
-            <a:r>
-              <a:rPr sz="900">
-                <a:solidFill>
-                  <a:srgbClr val="0F2B46"/>
-                </a:solidFill>
-                <a:latin typeface="微软雅黑"/>
-                <a:ea typeface="微软雅黑"/>
-              </a:rPr>
-              <a:t>5 智能体协作 · 健康分 + 知识图谱</a:t>
-            </a:r>
-          </a:p>
-        </p:txBody>
-      </p:sp>
-      <p:sp>
-        <p:nvSpPr>
-          <p:cNvPr id="19" name="TextBox 18"/>
-          <p:cNvSpPr txBox="1"/>
-          <p:nvPr/>
-        </p:nvSpPr>
-        <p:spPr>
-          <a:xfrm>
-            <a:off x="3273552" y="3145536"/>
-            <a:ext cx="2642615" cy="685800"/>
-          </a:xfrm>
-          <a:prstGeom prst="rect">
-            <a:avLst/>
-          </a:prstGeom>
-          <a:noFill/>
-        </p:spPr>
-        <p:txBody>
-          <a:bodyPr wrap="square" lIns="30000" tIns="0">
-            <a:spAutoFit/>
-          </a:bodyPr>
-          <a:lstStyle/>
-          <a:p>
-            <a:pPr>
+              <a:spcBef>
+                <a:spcPts val="0"/>
+              </a:spcBef>
               <a:spcAft>
-                <a:spcPts val="100"/>
+                <a:spcPts val="200"/>
               </a:spcAft>
             </a:pPr>
             <a:r>
-              <a:rPr sz="850" b="1">
-                <a:solidFill>
-                  <a:srgbClr val="FF7E3D"/>
-                </a:solidFill>
-                <a:latin typeface="微软雅黑"/>
-                <a:ea typeface="微软雅黑"/>
-              </a:rPr>
-              <a:t>凯莱英适配</a:t>
+              <a:rPr sz="400" b="0">
+                <a:solidFill>
+                  <a:srgbClr val="0F2B46"/>
+                </a:solidFill>
+                <a:latin typeface="微软雅黑"/>
+                <a:ea typeface="微软雅黑"/>
+                <a:cs typeface="微软雅黑"/>
+              </a:rPr>
+              <a:t/>
             </a:r>
           </a:p>
           <a:p>
@@ -7547,56 +8698,23 @@
               <a:lnSpc>
                 <a:spcPct val="130000"/>
               </a:lnSpc>
-            </a:pPr>
-            <a:r>
-              <a:rPr sz="900">
-                <a:solidFill>
-                  <a:srgbClr val="0F2B46"/>
-                </a:solidFill>
-                <a:latin typeface="微软雅黑"/>
-                <a:ea typeface="微软雅黑"/>
-              </a:rPr>
-              <a:t>不卖硬件不持模型，做端到端集成</a:t>
-            </a:r>
-          </a:p>
-        </p:txBody>
-      </p:sp>
-      <p:sp>
-        <p:nvSpPr>
-          <p:cNvPr id="20" name="TextBox 19"/>
-          <p:cNvSpPr txBox="1"/>
-          <p:nvPr/>
-        </p:nvSpPr>
-        <p:spPr>
-          <a:xfrm>
-            <a:off x="3273552" y="3803904"/>
-            <a:ext cx="2642615" cy="685800"/>
-          </a:xfrm>
-          <a:prstGeom prst="rect">
-            <a:avLst/>
-          </a:prstGeom>
-          <a:noFill/>
-        </p:spPr>
-        <p:txBody>
-          <a:bodyPr wrap="square" lIns="30000" tIns="0">
-            <a:spAutoFit/>
-          </a:bodyPr>
-          <a:lstStyle/>
-          <a:p>
-            <a:pPr>
+              <a:spcBef>
+                <a:spcPts val="0"/>
+              </a:spcBef>
               <a:spcAft>
-                <a:spcPts val="100"/>
+                <a:spcPts val="200"/>
               </a:spcAft>
             </a:pPr>
             <a:r>
-              <a:rPr sz="850" b="1">
-                <a:solidFill>
-                  <a:srgbClr val="FF7E3D"/>
-                </a:solidFill>
-                <a:latin typeface="微软雅黑"/>
-                <a:ea typeface="微软雅黑"/>
-              </a:rPr>
-              <a:t>结论</a:t>
+              <a:rPr sz="850" b="0">
+                <a:solidFill>
+                  <a:srgbClr val="0F2B46"/>
+                </a:solidFill>
+                <a:latin typeface="微软雅黑"/>
+                <a:ea typeface="微软雅黑"/>
+                <a:cs typeface="微软雅黑"/>
+              </a:rPr>
+              <a:t>• 输入：R&amp;D 工艺包 + 设备规格</a:t>
             </a:r>
           </a:p>
           <a:p>
@@ -7604,30 +8722,61 @@
               <a:lnSpc>
                 <a:spcPct val="130000"/>
               </a:lnSpc>
+              <a:spcBef>
+                <a:spcPts val="0"/>
+              </a:spcBef>
+              <a:spcAft>
+                <a:spcPts val="200"/>
+              </a:spcAft>
             </a:pPr>
             <a:r>
-              <a:rPr sz="900">
+              <a:rPr sz="850" b="0">
                 <a:solidFill>
                   <a:srgbClr val="0F2B46"/>
                 </a:solidFill>
                 <a:latin typeface="微软雅黑"/>
                 <a:ea typeface="微软雅黑"/>
-              </a:rPr>
-              <a:t>端到端能力最完整，推进节奏清晰</a:t>
-            </a:r>
-          </a:p>
-        </p:txBody>
-      </p:sp>
-      <p:sp>
-        <p:nvSpPr>
-          <p:cNvPr id="21" name="Rectangle 20"/>
+                <a:cs typeface="微软雅黑"/>
+              </a:rPr>
+              <a:t>• 输出：审查清单 + 风险矩阵</a:t>
+            </a:r>
+          </a:p>
+          <a:p>
+            <a:pPr>
+              <a:lnSpc>
+                <a:spcPct val="130000"/>
+              </a:lnSpc>
+              <a:spcBef>
+                <a:spcPts val="0"/>
+              </a:spcBef>
+              <a:spcAft>
+                <a:spcPts val="200"/>
+              </a:spcAft>
+            </a:pPr>
+            <a:r>
+              <a:rPr sz="850" b="0">
+                <a:solidFill>
+                  <a:srgbClr val="0F2B46"/>
+                </a:solidFill>
+                <a:latin typeface="微软雅黑"/>
+                <a:ea typeface="微软雅黑"/>
+                <a:cs typeface="微软雅黑"/>
+              </a:rPr>
+              <a:t>• 价值：NPI 周期 -30%</a:t>
+            </a:r>
+          </a:p>
+        </p:txBody>
+      </p:sp>
+      <p:sp>
+        <p:nvSpPr>
+          <p:cNvPr id="13" name="Rectangle 12"/>
           <p:cNvSpPr/>
           <p:nvPr/>
         </p:nvSpPr>
         <p:spPr>
           <a:xfrm>
             <a:off x="6126480" y="1051560"/>
-            <a:ext cx="2788920" cy="411480"/>
+            <a:ext cx="2743200" cy="365760"/>
           </a:xfrm>
           <a:prstGeom prst="rect">
             <a:avLst/>
@@ -7659,28 +8808,29 @@
           <a:p>
             <a:pPr algn="ctr"/>
             <a:r>
-              <a:rPr sz="1300" b="1">
+              <a:rPr sz="1050" b="1">
                 <a:solidFill>
                   <a:srgbClr val="FFFFFF"/>
                 </a:solidFill>
                 <a:latin typeface="微软雅黑"/>
                 <a:ea typeface="微软雅黑"/>
-              </a:rPr>
-              <a:t>远景智能</a:t>
-            </a:r>
-          </a:p>
-        </p:txBody>
-      </p:sp>
-      <p:sp>
-        <p:nvSpPr>
-          <p:cNvPr id="22" name="Rectangle 21"/>
+                <a:cs typeface="微软雅黑"/>
+              </a:rPr>
+              <a:t>③ 设备全生命周期 AI</a:t>
+            </a:r>
+          </a:p>
+        </p:txBody>
+      </p:sp>
+      <p:sp>
+        <p:nvSpPr>
+          <p:cNvPr id="14" name="Rectangle 13"/>
           <p:cNvSpPr/>
           <p:nvPr/>
         </p:nvSpPr>
         <p:spPr>
           <a:xfrm>
-            <a:off x="6126480" y="1463039"/>
-            <a:ext cx="2788920" cy="3017520"/>
+            <a:off x="6126480" y="1417319"/>
+            <a:ext cx="2743200" cy="1508760"/>
           </a:xfrm>
           <a:prstGeom prst="rect">
             <a:avLst/>
@@ -7690,7 +8840,7 @@
           </a:solidFill>
           <a:ln w="9525">
             <a:solidFill>
-              <a:srgbClr val="F0F4FA"/>
+              <a:srgbClr val="DCE3EF"/>
             </a:solidFill>
           </a:ln>
         </p:spPr>
@@ -7718,14 +8868,14 @@
       </p:sp>
       <p:sp>
         <p:nvSpPr>
-          <p:cNvPr id="23" name="TextBox 22"/>
+          <p:cNvPr id="15" name="TextBox 14"/>
           <p:cNvSpPr txBox="1"/>
           <p:nvPr/>
         </p:nvSpPr>
         <p:spPr>
           <a:xfrm>
-            <a:off x="6199632" y="1508760"/>
-            <a:ext cx="2642615" cy="274320"/>
+            <a:off x="6199632" y="1463039"/>
+            <a:ext cx="2596896" cy="1417319"/>
           </a:xfrm>
           <a:prstGeom prst="rect">
             <a:avLst/>
@@ -7733,118 +8883,32 @@
           <a:noFill/>
         </p:spPr>
         <p:txBody>
-          <a:bodyPr wrap="none" tIns="20000" lIns="30000">
+          <a:bodyPr wrap="square" tIns="50000" lIns="0" rIns="0" bIns="50000">
             <a:spAutoFit/>
           </a:bodyPr>
           <a:lstStyle/>
-          <a:p>
-            <a:pPr algn="l"/>
-            <a:r>
-              <a:rPr sz="950" i="1">
-                <a:solidFill>
-                  <a:srgbClr val="3263A7"/>
-                </a:solidFill>
-                <a:latin typeface="微软雅黑"/>
-                <a:ea typeface="微软雅黑"/>
-              </a:rPr>
-              <a:t>平台级 AI</a:t>
-            </a:r>
-          </a:p>
-        </p:txBody>
-      </p:sp>
-      <p:sp>
-        <p:nvSpPr>
-          <p:cNvPr id="24" name="TextBox 23"/>
-          <p:cNvSpPr txBox="1"/>
-          <p:nvPr/>
-        </p:nvSpPr>
-        <p:spPr>
-          <a:xfrm>
-            <a:off x="6199632" y="1828800"/>
-            <a:ext cx="2642615" cy="685800"/>
-          </a:xfrm>
-          <a:prstGeom prst="rect">
-            <a:avLst/>
-          </a:prstGeom>
-          <a:noFill/>
-        </p:spPr>
-        <p:txBody>
-          <a:bodyPr wrap="square" lIns="30000" tIns="0">
-            <a:spAutoFit/>
-          </a:bodyPr>
-          <a:lstStyle/>
-          <a:p>
-            <a:pPr>
-              <a:spcAft>
-                <a:spcPts val="100"/>
-              </a:spcAft>
-            </a:pPr>
-            <a:r>
-              <a:rPr sz="850" b="1">
-                <a:solidFill>
-                  <a:srgbClr val="FF7E3D"/>
-                </a:solidFill>
-                <a:latin typeface="微软雅黑"/>
-                <a:ea typeface="微软雅黑"/>
-              </a:rPr>
-              <a:t>定位</a:t>
-            </a:r>
-          </a:p>
           <a:p>
             <a:pPr>
               <a:lnSpc>
                 <a:spcPct val="130000"/>
               </a:lnSpc>
-            </a:pPr>
-            <a:r>
-              <a:rPr sz="900">
-                <a:solidFill>
-                  <a:srgbClr val="0F2B46"/>
-                </a:solidFill>
-                <a:latin typeface="微软雅黑"/>
-                <a:ea typeface="微软雅黑"/>
-              </a:rPr>
-              <a:t>能源 + 工业 IoT 平台</a:t>
-            </a:r>
-          </a:p>
-        </p:txBody>
-      </p:sp>
-      <p:sp>
-        <p:nvSpPr>
-          <p:cNvPr id="25" name="TextBox 24"/>
-          <p:cNvSpPr txBox="1"/>
-          <p:nvPr/>
-        </p:nvSpPr>
-        <p:spPr>
-          <a:xfrm>
-            <a:off x="6199632" y="2487167"/>
-            <a:ext cx="2642615" cy="685800"/>
-          </a:xfrm>
-          <a:prstGeom prst="rect">
-            <a:avLst/>
-          </a:prstGeom>
-          <a:noFill/>
-        </p:spPr>
-        <p:txBody>
-          <a:bodyPr wrap="square" lIns="30000" tIns="0">
-            <a:spAutoFit/>
-          </a:bodyPr>
-          <a:lstStyle/>
-          <a:p>
-            <a:pPr>
+              <a:spcBef>
+                <a:spcPts val="0"/>
+              </a:spcBef>
               <a:spcAft>
-                <a:spcPts val="100"/>
+                <a:spcPts val="200"/>
               </a:spcAft>
             </a:pPr>
             <a:r>
-              <a:rPr sz="850" b="1">
-                <a:solidFill>
-                  <a:srgbClr val="FF7E3D"/>
-                </a:solidFill>
-                <a:latin typeface="微软雅黑"/>
-                <a:ea typeface="微软雅黑"/>
-              </a:rPr>
-              <a:t>核心能力</a:t>
+              <a:rPr sz="900" b="1">
+                <a:solidFill>
+                  <a:srgbClr val="3263A7"/>
+                </a:solidFill>
+                <a:latin typeface="微软雅黑"/>
+                <a:ea typeface="微软雅黑"/>
+                <a:cs typeface="微软雅黑"/>
+              </a:rPr>
+              <a:t>含 PdM / 备件 / 验证 / 故障</a:t>
             </a:r>
           </a:p>
           <a:p>
@@ -7852,56 +8916,23 @@
               <a:lnSpc>
                 <a:spcPct val="130000"/>
               </a:lnSpc>
-            </a:pPr>
-            <a:r>
-              <a:rPr sz="900">
-                <a:solidFill>
-                  <a:srgbClr val="0F2B46"/>
-                </a:solidFill>
-                <a:latin typeface="微软雅黑"/>
-                <a:ea typeface="微软雅黑"/>
-              </a:rPr>
-              <a:t>EnOS 平台 + 设备数据接入 + AI 算法</a:t>
-            </a:r>
-          </a:p>
-        </p:txBody>
-      </p:sp>
-      <p:sp>
-        <p:nvSpPr>
-          <p:cNvPr id="26" name="TextBox 25"/>
-          <p:cNvSpPr txBox="1"/>
-          <p:nvPr/>
-        </p:nvSpPr>
-        <p:spPr>
-          <a:xfrm>
-            <a:off x="6199632" y="3145536"/>
-            <a:ext cx="2642615" cy="685800"/>
-          </a:xfrm>
-          <a:prstGeom prst="rect">
-            <a:avLst/>
-          </a:prstGeom>
-          <a:noFill/>
-        </p:spPr>
-        <p:txBody>
-          <a:bodyPr wrap="square" lIns="30000" tIns="0">
-            <a:spAutoFit/>
-          </a:bodyPr>
-          <a:lstStyle/>
-          <a:p>
-            <a:pPr>
+              <a:spcBef>
+                <a:spcPts val="0"/>
+              </a:spcBef>
               <a:spcAft>
-                <a:spcPts val="100"/>
+                <a:spcPts val="200"/>
               </a:spcAft>
             </a:pPr>
             <a:r>
-              <a:rPr sz="850" b="1">
-                <a:solidFill>
-                  <a:srgbClr val="FF7E3D"/>
-                </a:solidFill>
-                <a:latin typeface="微软雅黑"/>
-                <a:ea typeface="微软雅黑"/>
-              </a:rPr>
-              <a:t>凯莱英适配</a:t>
+              <a:rPr sz="400" b="0">
+                <a:solidFill>
+                  <a:srgbClr val="0F2B46"/>
+                </a:solidFill>
+                <a:latin typeface="微软雅黑"/>
+                <a:ea typeface="微软雅黑"/>
+                <a:cs typeface="微软雅黑"/>
+              </a:rPr>
+              <a:t/>
             </a:r>
           </a:p>
           <a:p>
@@ -7909,56 +8940,23 @@
               <a:lnSpc>
                 <a:spcPct val="130000"/>
               </a:lnSpc>
-            </a:pPr>
-            <a:r>
-              <a:rPr sz="900">
-                <a:solidFill>
-                  <a:srgbClr val="0F2B46"/>
-                </a:solidFill>
-                <a:latin typeface="微软雅黑"/>
-                <a:ea typeface="微软雅黑"/>
-              </a:rPr>
-              <a:t>平台底座能力强，制药领域案例有限</a:t>
-            </a:r>
-          </a:p>
-        </p:txBody>
-      </p:sp>
-      <p:sp>
-        <p:nvSpPr>
-          <p:cNvPr id="27" name="TextBox 26"/>
-          <p:cNvSpPr txBox="1"/>
-          <p:nvPr/>
-        </p:nvSpPr>
-        <p:spPr>
-          <a:xfrm>
-            <a:off x="6199632" y="3803904"/>
-            <a:ext cx="2642615" cy="685800"/>
-          </a:xfrm>
-          <a:prstGeom prst="rect">
-            <a:avLst/>
-          </a:prstGeom>
-          <a:noFill/>
-        </p:spPr>
-        <p:txBody>
-          <a:bodyPr wrap="square" lIns="30000" tIns="0">
-            <a:spAutoFit/>
-          </a:bodyPr>
-          <a:lstStyle/>
-          <a:p>
-            <a:pPr>
+              <a:spcBef>
+                <a:spcPts val="0"/>
+              </a:spcBef>
               <a:spcAft>
-                <a:spcPts val="100"/>
+                <a:spcPts val="200"/>
               </a:spcAft>
             </a:pPr>
             <a:r>
-              <a:rPr sz="850" b="1">
-                <a:solidFill>
-                  <a:srgbClr val="FF7E3D"/>
-                </a:solidFill>
-                <a:latin typeface="微软雅黑"/>
-                <a:ea typeface="微软雅黑"/>
-              </a:rPr>
-              <a:t>结论</a:t>
+              <a:rPr sz="850" b="0">
+                <a:solidFill>
+                  <a:srgbClr val="0F2B46"/>
+                </a:solidFill>
+                <a:latin typeface="微软雅黑"/>
+                <a:ea typeface="微软雅黑"/>
+                <a:cs typeface="微软雅黑"/>
+              </a:rPr>
+              <a:t>• 5 子模块共享一个底座</a:t>
             </a:r>
           </a:p>
           <a:p>
@@ -7966,16 +8964,773 @@
               <a:lnSpc>
                 <a:spcPct val="130000"/>
               </a:lnSpc>
+              <a:spcBef>
+                <a:spcPts val="0"/>
+              </a:spcBef>
+              <a:spcAft>
+                <a:spcPts val="200"/>
+              </a:spcAft>
             </a:pPr>
             <a:r>
-              <a:rPr sz="900">
+              <a:rPr sz="850" b="0">
                 <a:solidFill>
                   <a:srgbClr val="0F2B46"/>
                 </a:solidFill>
                 <a:latin typeface="微软雅黑"/>
                 <a:ea typeface="微软雅黑"/>
-              </a:rPr>
-              <a:t>平台层备选，可结合基础设施规划</a:t>
+                <a:cs typeface="微软雅黑"/>
+              </a:rPr>
+              <a:t>• 关键场景：预测性维护</a:t>
+            </a:r>
+          </a:p>
+          <a:p>
+            <a:pPr>
+              <a:lnSpc>
+                <a:spcPct val="130000"/>
+              </a:lnSpc>
+              <a:spcBef>
+                <a:spcPts val="0"/>
+              </a:spcBef>
+              <a:spcAft>
+                <a:spcPts val="200"/>
+              </a:spcAft>
+            </a:pPr>
+            <a:r>
+              <a:rPr sz="850" b="0">
+                <a:solidFill>
+                  <a:srgbClr val="0F2B46"/>
+                </a:solidFill>
+                <a:latin typeface="微软雅黑"/>
+                <a:ea typeface="微软雅黑"/>
+                <a:cs typeface="微软雅黑"/>
+              </a:rPr>
+              <a:t>• 价值：非计划停机 -40%</a:t>
+            </a:r>
+          </a:p>
+        </p:txBody>
+      </p:sp>
+      <p:sp>
+        <p:nvSpPr>
+          <p:cNvPr id="16" name="Rectangle 15"/>
+          <p:cNvSpPr/>
+          <p:nvPr/>
+        </p:nvSpPr>
+        <p:spPr>
+          <a:xfrm>
+            <a:off x="274320" y="3063240"/>
+            <a:ext cx="2743200" cy="365760"/>
+          </a:xfrm>
+          <a:prstGeom prst="rect">
+            <a:avLst/>
+          </a:prstGeom>
+          <a:solidFill>
+            <a:srgbClr val="3263A7"/>
+          </a:solidFill>
+          <a:ln>
+            <a:noFill/>
+          </a:ln>
+        </p:spPr>
+        <p:style>
+          <a:lnRef idx="1">
+            <a:schemeClr val="accent1"/>
+          </a:lnRef>
+          <a:fillRef idx="3">
+            <a:schemeClr val="accent1"/>
+          </a:fillRef>
+          <a:effectRef idx="2">
+            <a:schemeClr val="accent1"/>
+          </a:effectRef>
+          <a:fontRef idx="minor">
+            <a:schemeClr val="lt1"/>
+          </a:fontRef>
+        </p:style>
+        <p:txBody>
+          <a:bodyPr rtlCol="0" anchor="ctr" lIns="50000" rIns="50000" tIns="30000" bIns="30000"/>
+          <a:lstStyle/>
+          <a:p>
+            <a:pPr algn="ctr"/>
+            <a:r>
+              <a:rPr sz="1050" b="1">
+                <a:solidFill>
+                  <a:srgbClr val="FFFFFF"/>
+                </a:solidFill>
+                <a:latin typeface="微软雅黑"/>
+                <a:ea typeface="微软雅黑"/>
+                <a:cs typeface="微软雅黑"/>
+              </a:rPr>
+              <a:t>④ 视觉 AI 操作合规</a:t>
+            </a:r>
+          </a:p>
+        </p:txBody>
+      </p:sp>
+      <p:sp>
+        <p:nvSpPr>
+          <p:cNvPr id="17" name="Rectangle 16"/>
+          <p:cNvSpPr/>
+          <p:nvPr/>
+        </p:nvSpPr>
+        <p:spPr>
+          <a:xfrm>
+            <a:off x="274320" y="3429000"/>
+            <a:ext cx="2743200" cy="1508760"/>
+          </a:xfrm>
+          <a:prstGeom prst="rect">
+            <a:avLst/>
+          </a:prstGeom>
+          <a:solidFill>
+            <a:srgbClr val="FFFFFF"/>
+          </a:solidFill>
+          <a:ln w="9525">
+            <a:solidFill>
+              <a:srgbClr val="DCE3EF"/>
+            </a:solidFill>
+          </a:ln>
+        </p:spPr>
+        <p:style>
+          <a:lnRef idx="1">
+            <a:schemeClr val="accent1"/>
+          </a:lnRef>
+          <a:fillRef idx="3">
+            <a:schemeClr val="accent1"/>
+          </a:fillRef>
+          <a:effectRef idx="2">
+            <a:schemeClr val="accent1"/>
+          </a:effectRef>
+          <a:fontRef idx="minor">
+            <a:schemeClr val="lt1"/>
+          </a:fontRef>
+        </p:style>
+        <p:txBody>
+          <a:bodyPr rtlCol="0" anchor="ctr"/>
+          <a:lstStyle/>
+          <a:p>
+            <a:pPr algn="ctr"/>
+          </a:p>
+        </p:txBody>
+      </p:sp>
+      <p:sp>
+        <p:nvSpPr>
+          <p:cNvPr id="18" name="TextBox 17"/>
+          <p:cNvSpPr txBox="1"/>
+          <p:nvPr/>
+        </p:nvSpPr>
+        <p:spPr>
+          <a:xfrm>
+            <a:off x="347472" y="3474720"/>
+            <a:ext cx="2596896" cy="1417319"/>
+          </a:xfrm>
+          <a:prstGeom prst="rect">
+            <a:avLst/>
+          </a:prstGeom>
+          <a:noFill/>
+        </p:spPr>
+        <p:txBody>
+          <a:bodyPr wrap="square" tIns="50000" lIns="0" rIns="0" bIns="50000">
+            <a:spAutoFit/>
+          </a:bodyPr>
+          <a:lstStyle/>
+          <a:p>
+            <a:pPr>
+              <a:lnSpc>
+                <a:spcPct val="130000"/>
+              </a:lnSpc>
+              <a:spcBef>
+                <a:spcPts val="0"/>
+              </a:spcBef>
+              <a:spcAft>
+                <a:spcPts val="200"/>
+              </a:spcAft>
+            </a:pPr>
+            <a:r>
+              <a:rPr sz="900" b="1">
+                <a:solidFill>
+                  <a:srgbClr val="3263A7"/>
+                </a:solidFill>
+                <a:latin typeface="微软雅黑"/>
+                <a:ea typeface="微软雅黑"/>
+                <a:cs typeface="微软雅黑"/>
+              </a:rPr>
+              <a:t>CV + SOP 实时监测</a:t>
+            </a:r>
+          </a:p>
+          <a:p>
+            <a:pPr>
+              <a:lnSpc>
+                <a:spcPct val="130000"/>
+              </a:lnSpc>
+              <a:spcBef>
+                <a:spcPts val="0"/>
+              </a:spcBef>
+              <a:spcAft>
+                <a:spcPts val="200"/>
+              </a:spcAft>
+            </a:pPr>
+            <a:r>
+              <a:rPr sz="400" b="0">
+                <a:solidFill>
+                  <a:srgbClr val="0F2B46"/>
+                </a:solidFill>
+                <a:latin typeface="微软雅黑"/>
+                <a:ea typeface="微软雅黑"/>
+                <a:cs typeface="微软雅黑"/>
+              </a:rPr>
+              <a:t/>
+            </a:r>
+          </a:p>
+          <a:p>
+            <a:pPr>
+              <a:lnSpc>
+                <a:spcPct val="130000"/>
+              </a:lnSpc>
+              <a:spcBef>
+                <a:spcPts val="0"/>
+              </a:spcBef>
+              <a:spcAft>
+                <a:spcPts val="200"/>
+              </a:spcAft>
+            </a:pPr>
+            <a:r>
+              <a:rPr sz="850" b="0">
+                <a:solidFill>
+                  <a:srgbClr val="0F2B46"/>
+                </a:solidFill>
+                <a:latin typeface="微软雅黑"/>
+                <a:ea typeface="微软雅黑"/>
+                <a:cs typeface="微软雅黑"/>
+              </a:rPr>
+              <a:t>• 输入：车间 CCTV 视频流</a:t>
+            </a:r>
+          </a:p>
+          <a:p>
+            <a:pPr>
+              <a:lnSpc>
+                <a:spcPct val="130000"/>
+              </a:lnSpc>
+              <a:spcBef>
+                <a:spcPts val="0"/>
+              </a:spcBef>
+              <a:spcAft>
+                <a:spcPts val="200"/>
+              </a:spcAft>
+            </a:pPr>
+            <a:r>
+              <a:rPr sz="850" b="0">
+                <a:solidFill>
+                  <a:srgbClr val="0F2B46"/>
+                </a:solidFill>
+                <a:latin typeface="微软雅黑"/>
+                <a:ea typeface="微软雅黑"/>
+                <a:cs typeface="微软雅黑"/>
+              </a:rPr>
+              <a:t>• 输出：违规实时告警</a:t>
+            </a:r>
+          </a:p>
+          <a:p>
+            <a:pPr>
+              <a:lnSpc>
+                <a:spcPct val="130000"/>
+              </a:lnSpc>
+              <a:spcBef>
+                <a:spcPts val="0"/>
+              </a:spcBef>
+              <a:spcAft>
+                <a:spcPts val="200"/>
+              </a:spcAft>
+            </a:pPr>
+            <a:r>
+              <a:rPr sz="850" b="0">
+                <a:solidFill>
+                  <a:srgbClr val="0F2B46"/>
+                </a:solidFill>
+                <a:latin typeface="微软雅黑"/>
+                <a:ea typeface="微软雅黑"/>
+                <a:cs typeface="微软雅黑"/>
+              </a:rPr>
+              <a:t>• 价值：巡检替代 30-50%</a:t>
+            </a:r>
+          </a:p>
+        </p:txBody>
+      </p:sp>
+      <p:sp>
+        <p:nvSpPr>
+          <p:cNvPr id="19" name="Rectangle 18"/>
+          <p:cNvSpPr/>
+          <p:nvPr/>
+        </p:nvSpPr>
+        <p:spPr>
+          <a:xfrm>
+            <a:off x="3200400" y="3063240"/>
+            <a:ext cx="2743200" cy="365760"/>
+          </a:xfrm>
+          <a:prstGeom prst="rect">
+            <a:avLst/>
+          </a:prstGeom>
+          <a:solidFill>
+            <a:srgbClr val="00366A"/>
+          </a:solidFill>
+          <a:ln>
+            <a:noFill/>
+          </a:ln>
+        </p:spPr>
+        <p:style>
+          <a:lnRef idx="1">
+            <a:schemeClr val="accent1"/>
+          </a:lnRef>
+          <a:fillRef idx="3">
+            <a:schemeClr val="accent1"/>
+          </a:fillRef>
+          <a:effectRef idx="2">
+            <a:schemeClr val="accent1"/>
+          </a:effectRef>
+          <a:fontRef idx="minor">
+            <a:schemeClr val="lt1"/>
+          </a:fontRef>
+        </p:style>
+        <p:txBody>
+          <a:bodyPr rtlCol="0" anchor="ctr" lIns="50000" rIns="50000" tIns="30000" bIns="30000"/>
+          <a:lstStyle/>
+          <a:p>
+            <a:pPr algn="ctr"/>
+            <a:r>
+              <a:rPr sz="1050" b="1">
+                <a:solidFill>
+                  <a:srgbClr val="FFFFFF"/>
+                </a:solidFill>
+                <a:latin typeface="微软雅黑"/>
+                <a:ea typeface="微软雅黑"/>
+                <a:cs typeface="微软雅黑"/>
+              </a:rPr>
+              <a:t>⑤ AI 培训内容生成</a:t>
+            </a:r>
+          </a:p>
+        </p:txBody>
+      </p:sp>
+      <p:sp>
+        <p:nvSpPr>
+          <p:cNvPr id="20" name="Rectangle 19"/>
+          <p:cNvSpPr/>
+          <p:nvPr/>
+        </p:nvSpPr>
+        <p:spPr>
+          <a:xfrm>
+            <a:off x="3200400" y="3429000"/>
+            <a:ext cx="2743200" cy="1508760"/>
+          </a:xfrm>
+          <a:prstGeom prst="rect">
+            <a:avLst/>
+          </a:prstGeom>
+          <a:solidFill>
+            <a:srgbClr val="FFFFFF"/>
+          </a:solidFill>
+          <a:ln w="9525">
+            <a:solidFill>
+              <a:srgbClr val="DCE3EF"/>
+            </a:solidFill>
+          </a:ln>
+        </p:spPr>
+        <p:style>
+          <a:lnRef idx="1">
+            <a:schemeClr val="accent1"/>
+          </a:lnRef>
+          <a:fillRef idx="3">
+            <a:schemeClr val="accent1"/>
+          </a:fillRef>
+          <a:effectRef idx="2">
+            <a:schemeClr val="accent1"/>
+          </a:effectRef>
+          <a:fontRef idx="minor">
+            <a:schemeClr val="lt1"/>
+          </a:fontRef>
+        </p:style>
+        <p:txBody>
+          <a:bodyPr rtlCol="0" anchor="ctr"/>
+          <a:lstStyle/>
+          <a:p>
+            <a:pPr algn="ctr"/>
+          </a:p>
+        </p:txBody>
+      </p:sp>
+      <p:sp>
+        <p:nvSpPr>
+          <p:cNvPr id="21" name="TextBox 20"/>
+          <p:cNvSpPr txBox="1"/>
+          <p:nvPr/>
+        </p:nvSpPr>
+        <p:spPr>
+          <a:xfrm>
+            <a:off x="3273552" y="3474720"/>
+            <a:ext cx="2596896" cy="1417319"/>
+          </a:xfrm>
+          <a:prstGeom prst="rect">
+            <a:avLst/>
+          </a:prstGeom>
+          <a:noFill/>
+        </p:spPr>
+        <p:txBody>
+          <a:bodyPr wrap="square" tIns="50000" lIns="0" rIns="0" bIns="50000">
+            <a:spAutoFit/>
+          </a:bodyPr>
+          <a:lstStyle/>
+          <a:p>
+            <a:pPr>
+              <a:lnSpc>
+                <a:spcPct val="130000"/>
+              </a:lnSpc>
+              <a:spcBef>
+                <a:spcPts val="0"/>
+              </a:spcBef>
+              <a:spcAft>
+                <a:spcPts val="200"/>
+              </a:spcAft>
+            </a:pPr>
+            <a:r>
+              <a:rPr sz="900" b="1">
+                <a:solidFill>
+                  <a:srgbClr val="3263A7"/>
+                </a:solidFill>
+                <a:latin typeface="微软雅黑"/>
+                <a:ea typeface="微软雅黑"/>
+                <a:cs typeface="微软雅黑"/>
+              </a:rPr>
+              <a:t>SOP → 数字人 → 视频</a:t>
+            </a:r>
+          </a:p>
+          <a:p>
+            <a:pPr>
+              <a:lnSpc>
+                <a:spcPct val="130000"/>
+              </a:lnSpc>
+              <a:spcBef>
+                <a:spcPts val="0"/>
+              </a:spcBef>
+              <a:spcAft>
+                <a:spcPts val="200"/>
+              </a:spcAft>
+            </a:pPr>
+            <a:r>
+              <a:rPr sz="400" b="0">
+                <a:solidFill>
+                  <a:srgbClr val="0F2B46"/>
+                </a:solidFill>
+                <a:latin typeface="微软雅黑"/>
+                <a:ea typeface="微软雅黑"/>
+                <a:cs typeface="微软雅黑"/>
+              </a:rPr>
+              <a:t/>
+            </a:r>
+          </a:p>
+          <a:p>
+            <a:pPr>
+              <a:lnSpc>
+                <a:spcPct val="130000"/>
+              </a:lnSpc>
+              <a:spcBef>
+                <a:spcPts val="0"/>
+              </a:spcBef>
+              <a:spcAft>
+                <a:spcPts val="200"/>
+              </a:spcAft>
+            </a:pPr>
+            <a:r>
+              <a:rPr sz="850" b="0">
+                <a:solidFill>
+                  <a:srgbClr val="0F2B46"/>
+                </a:solidFill>
+                <a:latin typeface="微软雅黑"/>
+                <a:ea typeface="微软雅黑"/>
+                <a:cs typeface="微软雅黑"/>
+              </a:rPr>
+              <a:t>• 输入：SOP 文档 + 素材库</a:t>
+            </a:r>
+          </a:p>
+          <a:p>
+            <a:pPr>
+              <a:lnSpc>
+                <a:spcPct val="130000"/>
+              </a:lnSpc>
+              <a:spcBef>
+                <a:spcPts val="0"/>
+              </a:spcBef>
+              <a:spcAft>
+                <a:spcPts val="200"/>
+              </a:spcAft>
+            </a:pPr>
+            <a:r>
+              <a:rPr sz="850" b="0">
+                <a:solidFill>
+                  <a:srgbClr val="0F2B46"/>
+                </a:solidFill>
+                <a:latin typeface="微软雅黑"/>
+                <a:ea typeface="微软雅黑"/>
+                <a:cs typeface="微软雅黑"/>
+              </a:rPr>
+              <a:t>• 输出：分镜脚本 + 视频</a:t>
+            </a:r>
+          </a:p>
+          <a:p>
+            <a:pPr>
+              <a:lnSpc>
+                <a:spcPct val="130000"/>
+              </a:lnSpc>
+              <a:spcBef>
+                <a:spcPts val="0"/>
+              </a:spcBef>
+              <a:spcAft>
+                <a:spcPts val="200"/>
+              </a:spcAft>
+            </a:pPr>
+            <a:r>
+              <a:rPr sz="850" b="0">
+                <a:solidFill>
+                  <a:srgbClr val="0F2B46"/>
+                </a:solidFill>
+                <a:latin typeface="微软雅黑"/>
+                <a:ea typeface="微软雅黑"/>
+                <a:cs typeface="微软雅黑"/>
+              </a:rPr>
+              <a:t>• 价值：制作周期 2 周 → 1 天</a:t>
+            </a:r>
+          </a:p>
+        </p:txBody>
+      </p:sp>
+      <p:sp>
+        <p:nvSpPr>
+          <p:cNvPr id="22" name="Rectangle 21"/>
+          <p:cNvSpPr/>
+          <p:nvPr/>
+        </p:nvSpPr>
+        <p:spPr>
+          <a:xfrm>
+            <a:off x="6126480" y="3063240"/>
+            <a:ext cx="2743200" cy="365760"/>
+          </a:xfrm>
+          <a:prstGeom prst="rect">
+            <a:avLst/>
+          </a:prstGeom>
+          <a:solidFill>
+            <a:srgbClr val="3263A7"/>
+          </a:solidFill>
+          <a:ln>
+            <a:noFill/>
+          </a:ln>
+        </p:spPr>
+        <p:style>
+          <a:lnRef idx="1">
+            <a:schemeClr val="accent1"/>
+          </a:lnRef>
+          <a:fillRef idx="3">
+            <a:schemeClr val="accent1"/>
+          </a:fillRef>
+          <a:effectRef idx="2">
+            <a:schemeClr val="accent1"/>
+          </a:effectRef>
+          <a:fontRef idx="minor">
+            <a:schemeClr val="lt1"/>
+          </a:fontRef>
+        </p:style>
+        <p:txBody>
+          <a:bodyPr rtlCol="0" anchor="ctr" lIns="50000" rIns="50000" tIns="30000" bIns="30000"/>
+          <a:lstStyle/>
+          <a:p>
+            <a:pPr algn="ctr"/>
+            <a:r>
+              <a:rPr sz="1050" b="1">
+                <a:solidFill>
+                  <a:srgbClr val="FFFFFF"/>
+                </a:solidFill>
+                <a:latin typeface="微软雅黑"/>
+                <a:ea typeface="微软雅黑"/>
+                <a:cs typeface="微软雅黑"/>
+              </a:rPr>
+              <a:t>⑥ QC 报告 AI 起草</a:t>
+            </a:r>
+          </a:p>
+        </p:txBody>
+      </p:sp>
+      <p:sp>
+        <p:nvSpPr>
+          <p:cNvPr id="23" name="Rectangle 22"/>
+          <p:cNvSpPr/>
+          <p:nvPr/>
+        </p:nvSpPr>
+        <p:spPr>
+          <a:xfrm>
+            <a:off x="6126480" y="3429000"/>
+            <a:ext cx="2743200" cy="1508760"/>
+          </a:xfrm>
+          <a:prstGeom prst="rect">
+            <a:avLst/>
+          </a:prstGeom>
+          <a:solidFill>
+            <a:srgbClr val="FFFFFF"/>
+          </a:solidFill>
+          <a:ln w="9525">
+            <a:solidFill>
+              <a:srgbClr val="DCE3EF"/>
+            </a:solidFill>
+          </a:ln>
+        </p:spPr>
+        <p:style>
+          <a:lnRef idx="1">
+            <a:schemeClr val="accent1"/>
+          </a:lnRef>
+          <a:fillRef idx="3">
+            <a:schemeClr val="accent1"/>
+          </a:fillRef>
+          <a:effectRef idx="2">
+            <a:schemeClr val="accent1"/>
+          </a:effectRef>
+          <a:fontRef idx="minor">
+            <a:schemeClr val="lt1"/>
+          </a:fontRef>
+        </p:style>
+        <p:txBody>
+          <a:bodyPr rtlCol="0" anchor="ctr"/>
+          <a:lstStyle/>
+          <a:p>
+            <a:pPr algn="ctr"/>
+          </a:p>
+        </p:txBody>
+      </p:sp>
+      <p:sp>
+        <p:nvSpPr>
+          <p:cNvPr id="24" name="TextBox 23"/>
+          <p:cNvSpPr txBox="1"/>
+          <p:nvPr/>
+        </p:nvSpPr>
+        <p:spPr>
+          <a:xfrm>
+            <a:off x="6199632" y="3474720"/>
+            <a:ext cx="2596896" cy="1417319"/>
+          </a:xfrm>
+          <a:prstGeom prst="rect">
+            <a:avLst/>
+          </a:prstGeom>
+          <a:noFill/>
+        </p:spPr>
+        <p:txBody>
+          <a:bodyPr wrap="square" tIns="50000" lIns="0" rIns="0" bIns="50000">
+            <a:spAutoFit/>
+          </a:bodyPr>
+          <a:lstStyle/>
+          <a:p>
+            <a:pPr>
+              <a:lnSpc>
+                <a:spcPct val="130000"/>
+              </a:lnSpc>
+              <a:spcBef>
+                <a:spcPts val="0"/>
+              </a:spcBef>
+              <a:spcAft>
+                <a:spcPts val="200"/>
+              </a:spcAft>
+            </a:pPr>
+            <a:r>
+              <a:rPr sz="900" b="1">
+                <a:solidFill>
+                  <a:srgbClr val="3263A7"/>
+                </a:solidFill>
+                <a:latin typeface="微软雅黑"/>
+                <a:ea typeface="微软雅黑"/>
+                <a:cs typeface="微软雅黑"/>
+              </a:rPr>
+              <a:t>BDCT 升级 · 预测放行</a:t>
+            </a:r>
+          </a:p>
+          <a:p>
+            <a:pPr>
+              <a:lnSpc>
+                <a:spcPct val="130000"/>
+              </a:lnSpc>
+              <a:spcBef>
+                <a:spcPts val="0"/>
+              </a:spcBef>
+              <a:spcAft>
+                <a:spcPts val="200"/>
+              </a:spcAft>
+            </a:pPr>
+            <a:r>
+              <a:rPr sz="400" b="0">
+                <a:solidFill>
+                  <a:srgbClr val="0F2B46"/>
+                </a:solidFill>
+                <a:latin typeface="微软雅黑"/>
+                <a:ea typeface="微软雅黑"/>
+                <a:cs typeface="微软雅黑"/>
+              </a:rPr>
+              <a:t/>
+            </a:r>
+          </a:p>
+          <a:p>
+            <a:pPr>
+              <a:lnSpc>
+                <a:spcPct val="130000"/>
+              </a:lnSpc>
+              <a:spcBef>
+                <a:spcPts val="0"/>
+              </a:spcBef>
+              <a:spcAft>
+                <a:spcPts val="200"/>
+              </a:spcAft>
+            </a:pPr>
+            <a:r>
+              <a:rPr sz="850" b="0">
+                <a:solidFill>
+                  <a:srgbClr val="0F2B46"/>
+                </a:solidFill>
+                <a:latin typeface="微软雅黑"/>
+                <a:ea typeface="微软雅黑"/>
+                <a:cs typeface="微软雅黑"/>
+              </a:rPr>
+              <a:t>• 数据源：LIMS + IPC + PAT</a:t>
+            </a:r>
+          </a:p>
+          <a:p>
+            <a:pPr>
+              <a:lnSpc>
+                <a:spcPct val="130000"/>
+              </a:lnSpc>
+              <a:spcBef>
+                <a:spcPts val="0"/>
+              </a:spcBef>
+              <a:spcAft>
+                <a:spcPts val="200"/>
+              </a:spcAft>
+            </a:pPr>
+            <a:r>
+              <a:rPr sz="850" b="0">
+                <a:solidFill>
+                  <a:srgbClr val="0F2B46"/>
+                </a:solidFill>
+                <a:latin typeface="微软雅黑"/>
+                <a:ea typeface="微软雅黑"/>
+                <a:cs typeface="微软雅黑"/>
+              </a:rPr>
+              <a:t>• 底座：多变量预测模型</a:t>
+            </a:r>
+          </a:p>
+          <a:p>
+            <a:pPr>
+              <a:lnSpc>
+                <a:spcPct val="130000"/>
+              </a:lnSpc>
+              <a:spcBef>
+                <a:spcPts val="0"/>
+              </a:spcBef>
+              <a:spcAft>
+                <a:spcPts val="200"/>
+              </a:spcAft>
+            </a:pPr>
+            <a:r>
+              <a:rPr sz="850" b="0">
+                <a:solidFill>
+                  <a:srgbClr val="0F2B46"/>
+                </a:solidFill>
+                <a:latin typeface="微软雅黑"/>
+                <a:ea typeface="微软雅黑"/>
+                <a:cs typeface="微软雅黑"/>
+              </a:rPr>
+              <a:t>• 价值：放行加速 + 报废预警</a:t>
             </a:r>
           </a:p>
         </p:txBody>
@@ -8054,7 +9809,7 @@
         </p:nvSpPr>
         <p:spPr>
           <a:xfrm>
-            <a:off x="457200" y="2011680"/>
+            <a:off x="457200" y="2194560"/>
             <a:ext cx="8229600" cy="822960"/>
           </a:xfrm>
           <a:prstGeom prst="rect">
@@ -8070,14 +9825,15 @@
           <a:p>
             <a:pPr algn="ctr"/>
             <a:r>
-              <a:rPr sz="3200" b="1">
+              <a:rPr sz="3400" b="1">
                 <a:solidFill>
                   <a:srgbClr val="FFFFFF"/>
                 </a:solidFill>
                 <a:latin typeface="微软雅黑"/>
                 <a:ea typeface="微软雅黑"/>
-              </a:rPr>
-              <a:t>设备预测性维护 · 重点推进</a:t>
+                <a:cs typeface="微软雅黑"/>
+              </a:rPr>
+              <a:t>外部合作 · 供应商深度评估</a:t>
             </a:r>
           </a:p>
         </p:txBody>
@@ -8241,8 +9997,9 @@
                 </a:solidFill>
                 <a:latin typeface="微软雅黑"/>
                 <a:ea typeface="微软雅黑"/>
-              </a:rPr>
-              <a:t>PdM 三方方案对比与下半年推进节奏</a:t>
+                <a:cs typeface="微软雅黑"/>
+              </a:rPr>
+              <a:t>2 家潜在合作商深度评估</a:t>
             </a:r>
           </a:p>
         </p:txBody>
@@ -8403,14 +10160,51 @@
       </p:sp>
       <p:sp>
         <p:nvSpPr>
-          <p:cNvPr id="7" name="Rectangle 6"/>
+          <p:cNvPr id="7" name="TextBox 6"/>
+          <p:cNvSpPr txBox="1"/>
+          <p:nvPr/>
+        </p:nvSpPr>
+        <p:spPr>
+          <a:xfrm>
+            <a:off x="274320" y="914400"/>
+            <a:ext cx="8595360" cy="457200"/>
+          </a:xfrm>
+          <a:prstGeom prst="rect">
+            <a:avLst/>
+          </a:prstGeom>
+          <a:noFill/>
+        </p:spPr>
+        <p:txBody>
+          <a:bodyPr wrap="none" lIns="0">
+            <a:spAutoFit/>
+          </a:bodyPr>
+          <a:lstStyle/>
+          <a:p>
+            <a:pPr algn="l"/>
+            <a:r>
+              <a:rPr sz="1100">
+                <a:solidFill>
+                  <a:srgbClr val="2C3E50"/>
+                </a:solidFill>
+                <a:latin typeface="微软雅黑"/>
+                <a:ea typeface="微软雅黑"/>
+                <a:cs typeface="微软雅黑"/>
+              </a:rPr>
+              <a:t>主导对智现未来（半导体 AI 跨域）与埃森哲（Industry X 智能资产管理）两家潜在合作商的深度评估，输出内部评估报告，形成"多供应商组合、凯莱英自主主导"的合作思路。</a:t>
+            </a:r>
+          </a:p>
+        </p:txBody>
+      </p:sp>
+      <p:sp>
+        <p:nvSpPr>
+          <p:cNvPr id="8" name="Rectangle 7"/>
           <p:cNvSpPr/>
           <p:nvPr/>
         </p:nvSpPr>
         <p:spPr>
           <a:xfrm>
-            <a:off x="274320" y="1051560"/>
-            <a:ext cx="4206240" cy="365760"/>
+            <a:off x="365760" y="1691640"/>
+            <a:ext cx="4114800" cy="457200"/>
           </a:xfrm>
           <a:prstGeom prst="rect">
             <a:avLst/>
@@ -8442,28 +10236,29 @@
           <a:p>
             <a:pPr algn="ctr"/>
             <a:r>
-              <a:rPr sz="1100" b="1">
+              <a:rPr sz="1500" b="1">
                 <a:solidFill>
                   <a:srgbClr val="FFFFFF"/>
                 </a:solidFill>
                 <a:latin typeface="微软雅黑"/>
                 <a:ea typeface="微软雅黑"/>
-              </a:rPr>
-              <a:t>PdM 三方方案对比</a:t>
-            </a:r>
-          </a:p>
-        </p:txBody>
-      </p:sp>
-      <p:sp>
-        <p:nvSpPr>
-          <p:cNvPr id="8" name="Rectangle 7"/>
+                <a:cs typeface="微软雅黑"/>
+              </a:rPr>
+              <a:t>智现未来</a:t>
+            </a:r>
+          </a:p>
+        </p:txBody>
+      </p:sp>
+      <p:sp>
+        <p:nvSpPr>
+          <p:cNvPr id="9" name="Rectangle 8"/>
           <p:cNvSpPr/>
           <p:nvPr/>
         </p:nvSpPr>
         <p:spPr>
           <a:xfrm>
-            <a:off x="274320" y="1417319"/>
-            <a:ext cx="4206240" cy="3063240"/>
+            <a:off x="365760" y="2148840"/>
+            <a:ext cx="4114800" cy="2423160"/>
           </a:xfrm>
           <a:prstGeom prst="rect">
             <a:avLst/>
@@ -8473,7 +10268,7 @@
           </a:solidFill>
           <a:ln w="9525">
             <a:solidFill>
-              <a:srgbClr val="F0F4FA"/>
+              <a:srgbClr val="DCE3EF"/>
             </a:solidFill>
           </a:ln>
         </p:spPr>
@@ -8501,14 +10296,14 @@
       </p:sp>
       <p:sp>
         <p:nvSpPr>
-          <p:cNvPr id="9" name="TextBox 8"/>
+          <p:cNvPr id="10" name="TextBox 9"/>
           <p:cNvSpPr txBox="1"/>
           <p:nvPr/>
         </p:nvSpPr>
         <p:spPr>
           <a:xfrm>
-            <a:off x="347472" y="1463039"/>
-            <a:ext cx="4059935" cy="2971800"/>
+            <a:off x="438912" y="2194560"/>
+            <a:ext cx="3968496" cy="274320"/>
           </a:xfrm>
           <a:prstGeom prst="rect">
             <a:avLst/>
@@ -8516,120 +10311,250 @@
           <a:noFill/>
         </p:spPr>
         <p:txBody>
-          <a:bodyPr wrap="square" tIns="50000" lIns="0" rIns="0" bIns="50000">
+          <a:bodyPr wrap="none" tIns="20000" lIns="30000">
             <a:spAutoFit/>
           </a:bodyPr>
           <a:lstStyle/>
           <a:p>
+            <a:pPr algn="l"/>
+            <a:r>
+              <a:rPr sz="1100" i="1">
+                <a:solidFill>
+                  <a:srgbClr val="3263A7"/>
+                </a:solidFill>
+                <a:latin typeface="微软雅黑"/>
+                <a:ea typeface="微软雅黑"/>
+                <a:cs typeface="微软雅黑"/>
+              </a:rPr>
+              <a:t>半导体 AI 跨域平移</a:t>
+            </a:r>
+          </a:p>
+        </p:txBody>
+      </p:sp>
+      <p:sp>
+        <p:nvSpPr>
+          <p:cNvPr id="11" name="TextBox 10"/>
+          <p:cNvSpPr txBox="1"/>
+          <p:nvPr/>
+        </p:nvSpPr>
+        <p:spPr>
+          <a:xfrm>
+            <a:off x="438912" y="2560320"/>
+            <a:ext cx="3968496" cy="594360"/>
+          </a:xfrm>
+          <a:prstGeom prst="rect">
+            <a:avLst/>
+          </a:prstGeom>
+          <a:noFill/>
+        </p:spPr>
+        <p:txBody>
+          <a:bodyPr wrap="square" lIns="30000" tIns="0">
+            <a:spAutoFit/>
+          </a:bodyPr>
+          <a:lstStyle/>
+          <a:p>
+            <a:pPr>
+              <a:spcAft>
+                <a:spcPts val="100"/>
+              </a:spcAft>
+            </a:pPr>
+            <a:r>
+              <a:rPr sz="900" b="1">
+                <a:solidFill>
+                  <a:srgbClr val="FF7E3D"/>
+                </a:solidFill>
+                <a:latin typeface="微软雅黑"/>
+                <a:ea typeface="微软雅黑"/>
+                <a:cs typeface="微软雅黑"/>
+              </a:rPr>
+              <a:t>定位</a:t>
+            </a:r>
+          </a:p>
+          <a:p>
             <a:pPr>
               <a:lnSpc>
-                <a:spcPct val="135000"/>
+                <a:spcPct val="130000"/>
               </a:lnSpc>
-              <a:spcBef>
-                <a:spcPts val="0"/>
-              </a:spcBef>
+            </a:pPr>
+            <a:r>
+              <a:rPr sz="1000">
+                <a:solidFill>
+                  <a:srgbClr val="0F2B46"/>
+                </a:solidFill>
+                <a:latin typeface="微软雅黑"/>
+                <a:ea typeface="微软雅黑"/>
+                <a:cs typeface="微软雅黑"/>
+              </a:rPr>
+              <a:t>半导体晶圆厂 AI 软件国产化领先者</a:t>
+            </a:r>
+          </a:p>
+        </p:txBody>
+      </p:sp>
+      <p:sp>
+        <p:nvSpPr>
+          <p:cNvPr id="12" name="TextBox 11"/>
+          <p:cNvSpPr txBox="1"/>
+          <p:nvPr/>
+        </p:nvSpPr>
+        <p:spPr>
+          <a:xfrm>
+            <a:off x="438912" y="3127248"/>
+            <a:ext cx="3968496" cy="594360"/>
+          </a:xfrm>
+          <a:prstGeom prst="rect">
+            <a:avLst/>
+          </a:prstGeom>
+          <a:noFill/>
+        </p:spPr>
+        <p:txBody>
+          <a:bodyPr wrap="square" lIns="30000" tIns="0">
+            <a:spAutoFit/>
+          </a:bodyPr>
+          <a:lstStyle/>
+          <a:p>
+            <a:pPr>
               <a:spcAft>
-                <a:spcPts val="200"/>
+                <a:spcPts val="100"/>
               </a:spcAft>
             </a:pPr>
             <a:r>
-              <a:rPr sz="1000" b="1">
-                <a:solidFill>
-                  <a:srgbClr val="3263A7"/>
-                </a:solidFill>
-                <a:latin typeface="微软雅黑"/>
-                <a:ea typeface="微软雅黑"/>
-                <a:cs typeface="微软雅黑"/>
-              </a:rPr>
-              <a:t>杭州和利时 · 已对接方案</a:t>
+              <a:rPr sz="900" b="1">
+                <a:solidFill>
+                  <a:srgbClr val="FF7E3D"/>
+                </a:solidFill>
+                <a:latin typeface="微软雅黑"/>
+                <a:ea typeface="微软雅黑"/>
+                <a:cs typeface="微软雅黑"/>
+              </a:rPr>
+              <a:t>核心能力</a:t>
             </a:r>
           </a:p>
           <a:p>
             <a:pPr>
               <a:lnSpc>
-                <a:spcPct val="135000"/>
+                <a:spcPct val="130000"/>
               </a:lnSpc>
-              <a:spcBef>
-                <a:spcPts val="0"/>
-              </a:spcBef>
+            </a:pPr>
+            <a:r>
+              <a:rPr sz="1000">
+                <a:solidFill>
+                  <a:srgbClr val="0F2B46"/>
+                </a:solidFill>
+                <a:latin typeface="微软雅黑"/>
+                <a:ea typeface="微软雅黑"/>
+                <a:cs typeface="微软雅黑"/>
+              </a:rPr>
+              <a:t>FDC / RMS / APC / 技术转移 / PdM 算法体系</a:t>
+            </a:r>
+          </a:p>
+        </p:txBody>
+      </p:sp>
+      <p:sp>
+        <p:nvSpPr>
+          <p:cNvPr id="13" name="TextBox 12"/>
+          <p:cNvSpPr txBox="1"/>
+          <p:nvPr/>
+        </p:nvSpPr>
+        <p:spPr>
+          <a:xfrm>
+            <a:off x="438912" y="3694176"/>
+            <a:ext cx="3968496" cy="594360"/>
+          </a:xfrm>
+          <a:prstGeom prst="rect">
+            <a:avLst/>
+          </a:prstGeom>
+          <a:noFill/>
+        </p:spPr>
+        <p:txBody>
+          <a:bodyPr wrap="square" lIns="30000" tIns="0">
+            <a:spAutoFit/>
+          </a:bodyPr>
+          <a:lstStyle/>
+          <a:p>
+            <a:pPr>
               <a:spcAft>
-                <a:spcPts val="200"/>
+                <a:spcPts val="100"/>
               </a:spcAft>
             </a:pPr>
             <a:r>
-              <a:rPr sz="850" b="0">
-                <a:solidFill>
-                  <a:srgbClr val="0F2B46"/>
-                </a:solidFill>
-                <a:latin typeface="微软雅黑"/>
-                <a:ea typeface="微软雅黑"/>
-                <a:cs typeface="微软雅黑"/>
-              </a:rPr>
-              <a:t>  聚焦 DH1 动力站关键动设备 PdM，含冰机、循环泵、凉水塔、真空泵、离心机等的智能监测与故障诊断</a:t>
+              <a:rPr sz="900" b="1">
+                <a:solidFill>
+                  <a:srgbClr val="FF7E3D"/>
+                </a:solidFill>
+                <a:latin typeface="微软雅黑"/>
+                <a:ea typeface="微软雅黑"/>
+                <a:cs typeface="微软雅黑"/>
+              </a:rPr>
+              <a:t>凯莱英适配</a:t>
             </a:r>
           </a:p>
           <a:p>
             <a:pPr>
               <a:lnSpc>
-                <a:spcPct val="135000"/>
+                <a:spcPct val="130000"/>
               </a:lnSpc>
-              <a:spcBef>
-                <a:spcPts val="0"/>
-              </a:spcBef>
+            </a:pPr>
+            <a:r>
+              <a:rPr sz="1000">
+                <a:solidFill>
+                  <a:srgbClr val="0F2B46"/>
+                </a:solidFill>
+                <a:latin typeface="微软雅黑"/>
+                <a:ea typeface="微软雅黑"/>
+                <a:cs typeface="微软雅黑"/>
+              </a:rPr>
+              <a:t>算法层深度突出，制药案例空白需 6-12 月跨域适配</a:t>
+            </a:r>
+          </a:p>
+        </p:txBody>
+      </p:sp>
+      <p:sp>
+        <p:nvSpPr>
+          <p:cNvPr id="14" name="TextBox 13"/>
+          <p:cNvSpPr txBox="1"/>
+          <p:nvPr/>
+        </p:nvSpPr>
+        <p:spPr>
+          <a:xfrm>
+            <a:off x="438912" y="4261103"/>
+            <a:ext cx="3968496" cy="594360"/>
+          </a:xfrm>
+          <a:prstGeom prst="rect">
+            <a:avLst/>
+          </a:prstGeom>
+          <a:noFill/>
+        </p:spPr>
+        <p:txBody>
+          <a:bodyPr wrap="square" lIns="30000" tIns="0">
+            <a:spAutoFit/>
+          </a:bodyPr>
+          <a:lstStyle/>
+          <a:p>
+            <a:pPr>
               <a:spcAft>
-                <a:spcPts val="200"/>
+                <a:spcPts val="100"/>
               </a:spcAft>
             </a:pPr>
             <a:r>
-              <a:rPr sz="300" b="0">
-                <a:solidFill>
-                  <a:srgbClr val="0F2B46"/>
-                </a:solidFill>
-                <a:latin typeface="微软雅黑"/>
-                <a:ea typeface="微软雅黑"/>
-                <a:cs typeface="微软雅黑"/>
-              </a:rPr>
-              <a:t/>
+              <a:rPr sz="900" b="1">
+                <a:solidFill>
+                  <a:srgbClr val="FF7E3D"/>
+                </a:solidFill>
+                <a:latin typeface="微软雅黑"/>
+                <a:ea typeface="微软雅黑"/>
+                <a:cs typeface="微软雅黑"/>
+              </a:rPr>
+              <a:t>合作定位</a:t>
             </a:r>
           </a:p>
           <a:p>
             <a:pPr>
               <a:lnSpc>
-                <a:spcPct val="135000"/>
+                <a:spcPct val="130000"/>
               </a:lnSpc>
-              <a:spcBef>
-                <a:spcPts val="0"/>
-              </a:spcBef>
-              <a:spcAft>
-                <a:spcPts val="200"/>
-              </a:spcAft>
             </a:pPr>
             <a:r>
-              <a:rPr sz="1000" b="1">
-                <a:solidFill>
-                  <a:srgbClr val="3263A7"/>
-                </a:solidFill>
-                <a:latin typeface="微软雅黑"/>
-                <a:ea typeface="微软雅黑"/>
-                <a:cs typeface="微软雅黑"/>
-              </a:rPr>
-              <a:t>安徽信力共擎 · 已对接方案</a:t>
-            </a:r>
-          </a:p>
-          <a:p>
-            <a:pPr>
-              <a:lnSpc>
-                <a:spcPct val="135000"/>
-              </a:lnSpc>
-              <a:spcBef>
-                <a:spcPts val="0"/>
-              </a:spcBef>
-              <a:spcAft>
-                <a:spcPts val="200"/>
-              </a:spcAft>
-            </a:pPr>
-            <a:r>
-              <a:rPr sz="850" b="0">
+              <a:rPr sz="1000">
                 <a:solidFill>
                   <a:srgbClr val="0F2B46"/>
                 </a:solidFill>
@@ -8637,430 +10562,21 @@
                 <a:ea typeface="微软雅黑"/>
                 <a:cs typeface="微软雅黑"/>
               </a:rPr>
-              <a:t>  关键设备智能监测解决方案，含硬件安装、软件设计、云平台数据分析与算法迭代</a:t>
-            </a:r>
-          </a:p>
-          <a:p>
-            <a:pPr>
-              <a:lnSpc>
-                <a:spcPct val="135000"/>
-              </a:lnSpc>
-              <a:spcBef>
-                <a:spcPts val="0"/>
-              </a:spcBef>
-              <a:spcAft>
-                <a:spcPts val="200"/>
-              </a:spcAft>
-            </a:pPr>
-            <a:r>
-              <a:rPr sz="300" b="0">
-                <a:solidFill>
-                  <a:srgbClr val="0F2B46"/>
-                </a:solidFill>
-                <a:latin typeface="微软雅黑"/>
-                <a:ea typeface="微软雅黑"/>
-                <a:cs typeface="微软雅黑"/>
-              </a:rPr>
-              <a:t/>
-            </a:r>
-          </a:p>
-          <a:p>
-            <a:pPr>
-              <a:lnSpc>
-                <a:spcPct val="135000"/>
-              </a:lnSpc>
-              <a:spcBef>
-                <a:spcPts val="0"/>
-              </a:spcBef>
-              <a:spcAft>
-                <a:spcPts val="200"/>
-              </a:spcAft>
-            </a:pPr>
-            <a:r>
-              <a:rPr sz="1000" b="1">
-                <a:solidFill>
-                  <a:srgbClr val="3263A7"/>
-                </a:solidFill>
-                <a:latin typeface="微软雅黑"/>
-                <a:ea typeface="微软雅黑"/>
-                <a:cs typeface="微软雅黑"/>
-              </a:rPr>
-              <a:t>埃森哲 · 会议交流方案</a:t>
-            </a:r>
-          </a:p>
-          <a:p>
-            <a:pPr>
-              <a:lnSpc>
-                <a:spcPct val="135000"/>
-              </a:lnSpc>
-              <a:spcBef>
-                <a:spcPts val="0"/>
-              </a:spcBef>
-              <a:spcAft>
-                <a:spcPts val="200"/>
-              </a:spcAft>
-            </a:pPr>
-            <a:r>
-              <a:rPr sz="850" b="0">
-                <a:solidFill>
-                  <a:srgbClr val="0F2B46"/>
-                </a:solidFill>
-                <a:latin typeface="微软雅黑"/>
-                <a:ea typeface="微软雅黑"/>
-                <a:cs typeface="微软雅黑"/>
-              </a:rPr>
-              <a:t>  5 层架构 + 6 阶段闭环：多源信号 → 健康分（Health Index 0-100）→ 业务影响评估 → 智能体根因分析 → 处置建议 → 人工核查</a:t>
-            </a:r>
-          </a:p>
-          <a:p>
-            <a:pPr>
-              <a:lnSpc>
-                <a:spcPct val="135000"/>
-              </a:lnSpc>
-              <a:spcBef>
-                <a:spcPts val="0"/>
-              </a:spcBef>
-              <a:spcAft>
-                <a:spcPts val="200"/>
-              </a:spcAft>
-            </a:pPr>
-            <a:r>
-              <a:rPr sz="850" b="0">
-                <a:solidFill>
-                  <a:srgbClr val="0F2B46"/>
-                </a:solidFill>
-                <a:latin typeface="微软雅黑"/>
-                <a:ea typeface="微软雅黑"/>
-                <a:cs typeface="微软雅黑"/>
-              </a:rPr>
-              <a:t>  底层：知识图谱与数据双向验证机制</a:t>
-            </a:r>
-          </a:p>
-        </p:txBody>
-      </p:sp>
-      <p:sp>
-        <p:nvSpPr>
-          <p:cNvPr id="10" name="Rectangle 9"/>
+              <a:t>算法层最深，可用作 PoC 对照方案</a:t>
+            </a:r>
+          </a:p>
+        </p:txBody>
+      </p:sp>
+      <p:sp>
+        <p:nvSpPr>
+          <p:cNvPr id="15" name="Rectangle 14"/>
           <p:cNvSpPr/>
           <p:nvPr/>
         </p:nvSpPr>
         <p:spPr>
           <a:xfrm>
-            <a:off x="4663440" y="1051560"/>
-            <a:ext cx="4206240" cy="365760"/>
-          </a:xfrm>
-          <a:prstGeom prst="rect">
-            <a:avLst/>
-          </a:prstGeom>
-          <a:solidFill>
-            <a:srgbClr val="FF7E3D"/>
-          </a:solidFill>
-          <a:ln>
-            <a:noFill/>
-          </a:ln>
-        </p:spPr>
-        <p:style>
-          <a:lnRef idx="1">
-            <a:schemeClr val="accent1"/>
-          </a:lnRef>
-          <a:fillRef idx="3">
-            <a:schemeClr val="accent1"/>
-          </a:fillRef>
-          <a:effectRef idx="2">
-            <a:schemeClr val="accent1"/>
-          </a:effectRef>
-          <a:fontRef idx="minor">
-            <a:schemeClr val="lt1"/>
-          </a:fontRef>
-        </p:style>
-        <p:txBody>
-          <a:bodyPr rtlCol="0" anchor="ctr" lIns="50000" rIns="50000" tIns="30000" bIns="30000"/>
-          <a:lstStyle/>
-          <a:p>
-            <a:pPr algn="ctr"/>
-            <a:r>
-              <a:rPr sz="1100" b="1">
-                <a:solidFill>
-                  <a:srgbClr val="FFFFFF"/>
-                </a:solidFill>
-                <a:latin typeface="微软雅黑"/>
-                <a:ea typeface="微软雅黑"/>
-              </a:rPr>
-              <a:t>启动前需整理 4 类信息</a:t>
-            </a:r>
-          </a:p>
-        </p:txBody>
-      </p:sp>
-      <p:sp>
-        <p:nvSpPr>
-          <p:cNvPr id="11" name="Rectangle 10"/>
-          <p:cNvSpPr/>
-          <p:nvPr/>
-        </p:nvSpPr>
-        <p:spPr>
-          <a:xfrm>
-            <a:off x="4663440" y="1417319"/>
-            <a:ext cx="4206240" cy="1280160"/>
-          </a:xfrm>
-          <a:prstGeom prst="rect">
-            <a:avLst/>
-          </a:prstGeom>
-          <a:solidFill>
-            <a:srgbClr val="FFFFFF"/>
-          </a:solidFill>
-          <a:ln w="9525">
-            <a:solidFill>
-              <a:srgbClr val="F0F4FA"/>
-            </a:solidFill>
-          </a:ln>
-        </p:spPr>
-        <p:style>
-          <a:lnRef idx="1">
-            <a:schemeClr val="accent1"/>
-          </a:lnRef>
-          <a:fillRef idx="3">
-            <a:schemeClr val="accent1"/>
-          </a:fillRef>
-          <a:effectRef idx="2">
-            <a:schemeClr val="accent1"/>
-          </a:effectRef>
-          <a:fontRef idx="minor">
-            <a:schemeClr val="lt1"/>
-          </a:fontRef>
-        </p:style>
-        <p:txBody>
-          <a:bodyPr rtlCol="0" anchor="ctr"/>
-          <a:lstStyle/>
-          <a:p>
-            <a:pPr algn="ctr"/>
-          </a:p>
-        </p:txBody>
-      </p:sp>
-      <p:sp>
-        <p:nvSpPr>
-          <p:cNvPr id="12" name="TextBox 11"/>
-          <p:cNvSpPr txBox="1"/>
-          <p:nvPr/>
-        </p:nvSpPr>
-        <p:spPr>
-          <a:xfrm>
-            <a:off x="4736592" y="1463039"/>
-            <a:ext cx="4059935" cy="1188719"/>
-          </a:xfrm>
-          <a:prstGeom prst="rect">
-            <a:avLst/>
-          </a:prstGeom>
-          <a:noFill/>
-        </p:spPr>
-        <p:txBody>
-          <a:bodyPr wrap="square" tIns="50000" lIns="0" rIns="0" bIns="50000">
-            <a:spAutoFit/>
-          </a:bodyPr>
-          <a:lstStyle/>
-          <a:p>
-            <a:pPr>
-              <a:lnSpc>
-                <a:spcPct val="135000"/>
-              </a:lnSpc>
-              <a:spcBef>
-                <a:spcPts val="0"/>
-              </a:spcBef>
-              <a:spcAft>
-                <a:spcPts val="200"/>
-              </a:spcAft>
-            </a:pPr>
-            <a:r>
-              <a:rPr sz="900" b="1">
-                <a:solidFill>
-                  <a:srgbClr val="00366A"/>
-                </a:solidFill>
-                <a:latin typeface="微软雅黑"/>
-                <a:ea typeface="微软雅黑"/>
-                <a:cs typeface="微软雅黑"/>
-              </a:rPr>
-              <a:t>① 设备清单</a:t>
-            </a:r>
-          </a:p>
-          <a:p>
-            <a:pPr>
-              <a:lnSpc>
-                <a:spcPct val="135000"/>
-              </a:lnSpc>
-              <a:spcBef>
-                <a:spcPts val="0"/>
-              </a:spcBef>
-              <a:spcAft>
-                <a:spcPts val="200"/>
-              </a:spcAft>
-            </a:pPr>
-            <a:r>
-              <a:rPr sz="850" b="0">
-                <a:solidFill>
-                  <a:srgbClr val="0F2B46"/>
-                </a:solidFill>
-                <a:latin typeface="微软雅黑"/>
-                <a:ea typeface="微软雅黑"/>
-                <a:cs typeface="微软雅黑"/>
-              </a:rPr>
-              <a:t>   厂区 + 设备类型 + 数量 + 关键作用 + 当前维护模式</a:t>
-            </a:r>
-          </a:p>
-          <a:p>
-            <a:pPr>
-              <a:lnSpc>
-                <a:spcPct val="135000"/>
-              </a:lnSpc>
-              <a:spcBef>
-                <a:spcPts val="0"/>
-              </a:spcBef>
-              <a:spcAft>
-                <a:spcPts val="200"/>
-              </a:spcAft>
-            </a:pPr>
-            <a:r>
-              <a:rPr sz="900" b="1">
-                <a:solidFill>
-                  <a:srgbClr val="00366A"/>
-                </a:solidFill>
-                <a:latin typeface="微软雅黑"/>
-                <a:ea typeface="微软雅黑"/>
-                <a:cs typeface="微软雅黑"/>
-              </a:rPr>
-              <a:t>② 主要故障</a:t>
-            </a:r>
-          </a:p>
-          <a:p>
-            <a:pPr>
-              <a:lnSpc>
-                <a:spcPct val="135000"/>
-              </a:lnSpc>
-              <a:spcBef>
-                <a:spcPts val="0"/>
-              </a:spcBef>
-              <a:spcAft>
-                <a:spcPts val="200"/>
-              </a:spcAft>
-            </a:pPr>
-            <a:r>
-              <a:rPr sz="850" b="0">
-                <a:solidFill>
-                  <a:srgbClr val="0F2B46"/>
-                </a:solidFill>
-                <a:latin typeface="微软雅黑"/>
-                <a:ea typeface="微软雅黑"/>
-                <a:cs typeface="微软雅黑"/>
-              </a:rPr>
-              <a:t>   按损失 / OEE 排序 Top 5 类故障 + 频次 + 损失估算</a:t>
-            </a:r>
-          </a:p>
-          <a:p>
-            <a:pPr>
-              <a:lnSpc>
-                <a:spcPct val="135000"/>
-              </a:lnSpc>
-              <a:spcBef>
-                <a:spcPts val="0"/>
-              </a:spcBef>
-              <a:spcAft>
-                <a:spcPts val="200"/>
-              </a:spcAft>
-            </a:pPr>
-            <a:r>
-              <a:rPr sz="900" b="1">
-                <a:solidFill>
-                  <a:srgbClr val="00366A"/>
-                </a:solidFill>
-                <a:latin typeface="微软雅黑"/>
-                <a:ea typeface="微软雅黑"/>
-                <a:cs typeface="微软雅黑"/>
-              </a:rPr>
-              <a:t>③ 数据基础</a:t>
-            </a:r>
-          </a:p>
-          <a:p>
-            <a:pPr>
-              <a:lnSpc>
-                <a:spcPct val="135000"/>
-              </a:lnSpc>
-              <a:spcBef>
-                <a:spcPts val="0"/>
-              </a:spcBef>
-              <a:spcAft>
-                <a:spcPts val="200"/>
-              </a:spcAft>
-            </a:pPr>
-            <a:r>
-              <a:rPr sz="850" b="0">
-                <a:solidFill>
-                  <a:srgbClr val="0F2B46"/>
-                </a:solidFill>
-                <a:latin typeface="微软雅黑"/>
-                <a:ea typeface="微软雅黑"/>
-                <a:cs typeface="微软雅黑"/>
-              </a:rPr>
-              <a:t>   传感器清单 + 采集频次 + 历史数据时长 + 异常案例</a:t>
-            </a:r>
-          </a:p>
-          <a:p>
-            <a:pPr>
-              <a:lnSpc>
-                <a:spcPct val="135000"/>
-              </a:lnSpc>
-              <a:spcBef>
-                <a:spcPts val="0"/>
-              </a:spcBef>
-              <a:spcAft>
-                <a:spcPts val="200"/>
-              </a:spcAft>
-            </a:pPr>
-            <a:r>
-              <a:rPr sz="900" b="1">
-                <a:solidFill>
-                  <a:srgbClr val="00366A"/>
-                </a:solidFill>
-                <a:latin typeface="微软雅黑"/>
-                <a:ea typeface="微软雅黑"/>
-                <a:cs typeface="微软雅黑"/>
-              </a:rPr>
-              <a:t>④ 先验知识</a:t>
-            </a:r>
-          </a:p>
-          <a:p>
-            <a:pPr>
-              <a:lnSpc>
-                <a:spcPct val="135000"/>
-              </a:lnSpc>
-              <a:spcBef>
-                <a:spcPts val="0"/>
-              </a:spcBef>
-              <a:spcAft>
-                <a:spcPts val="200"/>
-              </a:spcAft>
-            </a:pPr>
-            <a:r>
-              <a:rPr sz="850" b="0">
-                <a:solidFill>
-                  <a:srgbClr val="0F2B46"/>
-                </a:solidFill>
-                <a:latin typeface="微软雅黑"/>
-                <a:ea typeface="微软雅黑"/>
-                <a:cs typeface="微软雅黑"/>
-              </a:rPr>
-              <a:t>   RCA 报告 + 偏差报告 + FTA / FMEA + 供应商资料</a:t>
-            </a:r>
-          </a:p>
-        </p:txBody>
-      </p:sp>
-      <p:sp>
-        <p:nvSpPr>
-          <p:cNvPr id="13" name="Rectangle 12"/>
-          <p:cNvSpPr/>
-          <p:nvPr/>
-        </p:nvSpPr>
-        <p:spPr>
-          <a:xfrm>
-            <a:off x="4663440" y="2880360"/>
-            <a:ext cx="4206240" cy="365760"/>
+            <a:off x="4663440" y="1691640"/>
+            <a:ext cx="4114800" cy="457200"/>
           </a:xfrm>
           <a:prstGeom prst="rect">
             <a:avLst/>
@@ -9092,28 +10608,29 @@
           <a:p>
             <a:pPr algn="ctr"/>
             <a:r>
-              <a:rPr sz="1100" b="1">
+              <a:rPr sz="1500" b="1">
                 <a:solidFill>
                   <a:srgbClr val="FFFFFF"/>
                 </a:solidFill>
                 <a:latin typeface="微软雅黑"/>
                 <a:ea typeface="微软雅黑"/>
-              </a:rPr>
-              <a:t>下半年推进节奏</a:t>
-            </a:r>
-          </a:p>
-        </p:txBody>
-      </p:sp>
-      <p:sp>
-        <p:nvSpPr>
-          <p:cNvPr id="14" name="Rectangle 13"/>
+                <a:cs typeface="微软雅黑"/>
+              </a:rPr>
+              <a:t>埃森哲</a:t>
+            </a:r>
+          </a:p>
+        </p:txBody>
+      </p:sp>
+      <p:sp>
+        <p:nvSpPr>
+          <p:cNvPr id="16" name="Rectangle 15"/>
           <p:cNvSpPr/>
           <p:nvPr/>
         </p:nvSpPr>
         <p:spPr>
           <a:xfrm>
-            <a:off x="4663440" y="3246120"/>
-            <a:ext cx="4206240" cy="1234440"/>
+            <a:off x="4663440" y="2148840"/>
+            <a:ext cx="4114800" cy="2423160"/>
           </a:xfrm>
           <a:prstGeom prst="rect">
             <a:avLst/>
@@ -9123,7 +10640,7 @@
           </a:solidFill>
           <a:ln w="9525">
             <a:solidFill>
-              <a:srgbClr val="F0F4FA"/>
+              <a:srgbClr val="DCE3EF"/>
             </a:solidFill>
           </a:ln>
         </p:spPr>
@@ -9151,14 +10668,14 @@
       </p:sp>
       <p:sp>
         <p:nvSpPr>
-          <p:cNvPr id="15" name="TextBox 14"/>
+          <p:cNvPr id="17" name="TextBox 16"/>
           <p:cNvSpPr txBox="1"/>
           <p:nvPr/>
         </p:nvSpPr>
         <p:spPr>
           <a:xfrm>
-            <a:off x="4736592" y="3291839"/>
-            <a:ext cx="4059935" cy="1143000"/>
+            <a:off x="4736592" y="2194560"/>
+            <a:ext cx="3968496" cy="274320"/>
           </a:xfrm>
           <a:prstGeom prst="rect">
             <a:avLst/>
@@ -9166,120 +10683,250 @@
           <a:noFill/>
         </p:spPr>
         <p:txBody>
-          <a:bodyPr wrap="square" tIns="50000" lIns="0" rIns="0" bIns="50000">
+          <a:bodyPr wrap="none" tIns="20000" lIns="30000">
             <a:spAutoFit/>
           </a:bodyPr>
           <a:lstStyle/>
           <a:p>
+            <a:pPr algn="l"/>
+            <a:r>
+              <a:rPr sz="1100" i="1">
+                <a:solidFill>
+                  <a:srgbClr val="3263A7"/>
+                </a:solidFill>
+                <a:latin typeface="微软雅黑"/>
+                <a:ea typeface="微软雅黑"/>
+                <a:cs typeface="微软雅黑"/>
+              </a:rPr>
+              <a:t>Industry X 智能资产管理</a:t>
+            </a:r>
+          </a:p>
+        </p:txBody>
+      </p:sp>
+      <p:sp>
+        <p:nvSpPr>
+          <p:cNvPr id="18" name="TextBox 17"/>
+          <p:cNvSpPr txBox="1"/>
+          <p:nvPr/>
+        </p:nvSpPr>
+        <p:spPr>
+          <a:xfrm>
+            <a:off x="4736592" y="2560320"/>
+            <a:ext cx="3968496" cy="594360"/>
+          </a:xfrm>
+          <a:prstGeom prst="rect">
+            <a:avLst/>
+          </a:prstGeom>
+          <a:noFill/>
+        </p:spPr>
+        <p:txBody>
+          <a:bodyPr wrap="square" lIns="30000" tIns="0">
+            <a:spAutoFit/>
+          </a:bodyPr>
+          <a:lstStyle/>
+          <a:p>
+            <a:pPr>
+              <a:spcAft>
+                <a:spcPts val="100"/>
+              </a:spcAft>
+            </a:pPr>
+            <a:r>
+              <a:rPr sz="900" b="1">
+                <a:solidFill>
+                  <a:srgbClr val="FF7E3D"/>
+                </a:solidFill>
+                <a:latin typeface="微软雅黑"/>
+                <a:ea typeface="微软雅黑"/>
+                <a:cs typeface="微软雅黑"/>
+              </a:rPr>
+              <a:t>定位</a:t>
+            </a:r>
+          </a:p>
+          <a:p>
             <a:pPr>
               <a:lnSpc>
-                <a:spcPct val="135000"/>
+                <a:spcPct val="130000"/>
               </a:lnSpc>
-              <a:spcBef>
-                <a:spcPts val="0"/>
-              </a:spcBef>
+            </a:pPr>
+            <a:r>
+              <a:rPr sz="1000">
+                <a:solidFill>
+                  <a:srgbClr val="0F2B46"/>
+                </a:solidFill>
+                <a:latin typeface="微软雅黑"/>
+                <a:ea typeface="微软雅黑"/>
+                <a:cs typeface="微软雅黑"/>
+              </a:rPr>
+              <a:t>全球咨询与系统集成商 · Industry X 事业部</a:t>
+            </a:r>
+          </a:p>
+        </p:txBody>
+      </p:sp>
+      <p:sp>
+        <p:nvSpPr>
+          <p:cNvPr id="19" name="TextBox 18"/>
+          <p:cNvSpPr txBox="1"/>
+          <p:nvPr/>
+        </p:nvSpPr>
+        <p:spPr>
+          <a:xfrm>
+            <a:off x="4736592" y="3127248"/>
+            <a:ext cx="3968496" cy="594360"/>
+          </a:xfrm>
+          <a:prstGeom prst="rect">
+            <a:avLst/>
+          </a:prstGeom>
+          <a:noFill/>
+        </p:spPr>
+        <p:txBody>
+          <a:bodyPr wrap="square" lIns="30000" tIns="0">
+            <a:spAutoFit/>
+          </a:bodyPr>
+          <a:lstStyle/>
+          <a:p>
+            <a:pPr>
               <a:spcAft>
-                <a:spcPts val="200"/>
+                <a:spcPts val="100"/>
               </a:spcAft>
             </a:pPr>
             <a:r>
               <a:rPr sz="900" b="1">
                 <a:solidFill>
-                  <a:srgbClr val="00366A"/>
-                </a:solidFill>
-                <a:latin typeface="微软雅黑"/>
-                <a:ea typeface="微软雅黑"/>
-                <a:cs typeface="微软雅黑"/>
-              </a:rPr>
-              <a:t>第 3 季度 · 信息整理与方案对齐</a:t>
+                  <a:srgbClr val="FF7E3D"/>
+                </a:solidFill>
+                <a:latin typeface="微软雅黑"/>
+                <a:ea typeface="微软雅黑"/>
+                <a:cs typeface="微软雅黑"/>
+              </a:rPr>
+              <a:t>核心能力</a:t>
             </a:r>
           </a:p>
           <a:p>
             <a:pPr>
               <a:lnSpc>
-                <a:spcPct val="135000"/>
+                <a:spcPct val="130000"/>
               </a:lnSpc>
-              <a:spcBef>
-                <a:spcPts val="0"/>
-              </a:spcBef>
+            </a:pPr>
+            <a:r>
+              <a:rPr sz="1000">
+                <a:solidFill>
+                  <a:srgbClr val="0F2B46"/>
+                </a:solidFill>
+                <a:latin typeface="微软雅黑"/>
+                <a:ea typeface="微软雅黑"/>
+                <a:cs typeface="微软雅黑"/>
+              </a:rPr>
+              <a:t>5 智能体协作 · 健康分 + 知识图谱 · 端到端集成</a:t>
+            </a:r>
+          </a:p>
+        </p:txBody>
+      </p:sp>
+      <p:sp>
+        <p:nvSpPr>
+          <p:cNvPr id="20" name="TextBox 19"/>
+          <p:cNvSpPr txBox="1"/>
+          <p:nvPr/>
+        </p:nvSpPr>
+        <p:spPr>
+          <a:xfrm>
+            <a:off x="4736592" y="3694176"/>
+            <a:ext cx="3968496" cy="594360"/>
+          </a:xfrm>
+          <a:prstGeom prst="rect">
+            <a:avLst/>
+          </a:prstGeom>
+          <a:noFill/>
+        </p:spPr>
+        <p:txBody>
+          <a:bodyPr wrap="square" lIns="30000" tIns="0">
+            <a:spAutoFit/>
+          </a:bodyPr>
+          <a:lstStyle/>
+          <a:p>
+            <a:pPr>
               <a:spcAft>
-                <a:spcPts val="200"/>
+                <a:spcPts val="100"/>
               </a:spcAft>
             </a:pPr>
             <a:r>
-              <a:rPr sz="850" b="0">
-                <a:solidFill>
-                  <a:srgbClr val="0F2B46"/>
-                </a:solidFill>
-                <a:latin typeface="微软雅黑"/>
-                <a:ea typeface="微软雅黑"/>
-                <a:cs typeface="微软雅黑"/>
-              </a:rPr>
-              <a:t>   完成 4 类信息内部整理 + 三方方案深度对比 + 选定 1 个起步设备类型</a:t>
+              <a:rPr sz="900" b="1">
+                <a:solidFill>
+                  <a:srgbClr val="FF7E3D"/>
+                </a:solidFill>
+                <a:latin typeface="微软雅黑"/>
+                <a:ea typeface="微软雅黑"/>
+                <a:cs typeface="微软雅黑"/>
+              </a:rPr>
+              <a:t>凯莱英适配</a:t>
             </a:r>
           </a:p>
           <a:p>
             <a:pPr>
               <a:lnSpc>
-                <a:spcPct val="135000"/>
+                <a:spcPct val="130000"/>
               </a:lnSpc>
-              <a:spcBef>
-                <a:spcPts val="0"/>
-              </a:spcBef>
+            </a:pPr>
+            <a:r>
+              <a:rPr sz="1000">
+                <a:solidFill>
+                  <a:srgbClr val="0F2B46"/>
+                </a:solidFill>
+                <a:latin typeface="微软雅黑"/>
+                <a:ea typeface="微软雅黑"/>
+                <a:cs typeface="微软雅黑"/>
+              </a:rPr>
+              <a:t>不卖硬件不持模型，做端到端集成与变革管理</a:t>
+            </a:r>
+          </a:p>
+        </p:txBody>
+      </p:sp>
+      <p:sp>
+        <p:nvSpPr>
+          <p:cNvPr id="21" name="TextBox 20"/>
+          <p:cNvSpPr txBox="1"/>
+          <p:nvPr/>
+        </p:nvSpPr>
+        <p:spPr>
+          <a:xfrm>
+            <a:off x="4736592" y="4261103"/>
+            <a:ext cx="3968496" cy="594360"/>
+          </a:xfrm>
+          <a:prstGeom prst="rect">
+            <a:avLst/>
+          </a:prstGeom>
+          <a:noFill/>
+        </p:spPr>
+        <p:txBody>
+          <a:bodyPr wrap="square" lIns="30000" tIns="0">
+            <a:spAutoFit/>
+          </a:bodyPr>
+          <a:lstStyle/>
+          <a:p>
+            <a:pPr>
               <a:spcAft>
-                <a:spcPts val="200"/>
+                <a:spcPts val="100"/>
               </a:spcAft>
             </a:pPr>
             <a:r>
-              <a:rPr sz="300" b="0">
-                <a:solidFill>
-                  <a:srgbClr val="0F2B46"/>
-                </a:solidFill>
-                <a:latin typeface="微软雅黑"/>
-                <a:ea typeface="微软雅黑"/>
-                <a:cs typeface="微软雅黑"/>
-              </a:rPr>
-              <a:t/>
+              <a:rPr sz="900" b="1">
+                <a:solidFill>
+                  <a:srgbClr val="FF7E3D"/>
+                </a:solidFill>
+                <a:latin typeface="微软雅黑"/>
+                <a:ea typeface="微软雅黑"/>
+                <a:cs typeface="微软雅黑"/>
+              </a:rPr>
+              <a:t>合作定位</a:t>
             </a:r>
           </a:p>
           <a:p>
             <a:pPr>
               <a:lnSpc>
-                <a:spcPct val="135000"/>
+                <a:spcPct val="130000"/>
               </a:lnSpc>
-              <a:spcBef>
-                <a:spcPts val="0"/>
-              </a:spcBef>
-              <a:spcAft>
-                <a:spcPts val="200"/>
-              </a:spcAft>
             </a:pPr>
             <a:r>
-              <a:rPr sz="900" b="1">
-                <a:solidFill>
-                  <a:srgbClr val="00366A"/>
-                </a:solidFill>
-                <a:latin typeface="微软雅黑"/>
-                <a:ea typeface="微软雅黑"/>
-                <a:cs typeface="微软雅黑"/>
-              </a:rPr>
-              <a:t>第 4 季度 · PoC 启动</a:t>
-            </a:r>
-          </a:p>
-          <a:p>
-            <a:pPr>
-              <a:lnSpc>
-                <a:spcPct val="135000"/>
-              </a:lnSpc>
-              <a:spcBef>
-                <a:spcPts val="0"/>
-              </a:spcBef>
-              <a:spcAft>
-                <a:spcPts val="200"/>
-              </a:spcAft>
-            </a:pPr>
-            <a:r>
-              <a:rPr sz="850" b="0">
+              <a:rPr sz="1000">
                 <a:solidFill>
                   <a:srgbClr val="0F2B46"/>
                 </a:solidFill>
@@ -9287,79 +10934,221 @@
                 <a:ea typeface="微软雅黑"/>
                 <a:cs typeface="微软雅黑"/>
               </a:rPr>
-              <a:t>   数据采集 + 算法建模 + 知识图谱搭建，闭环跑通"预警 → 根因 → 处置"</a:t>
-            </a:r>
-          </a:p>
-          <a:p>
-            <a:pPr>
-              <a:lnSpc>
-                <a:spcPct val="135000"/>
-              </a:lnSpc>
-              <a:spcBef>
-                <a:spcPts val="0"/>
-              </a:spcBef>
-              <a:spcAft>
-                <a:spcPts val="200"/>
-              </a:spcAft>
-            </a:pPr>
-            <a:r>
-              <a:rPr sz="300" b="0">
-                <a:solidFill>
-                  <a:srgbClr val="0F2B46"/>
-                </a:solidFill>
-                <a:latin typeface="微软雅黑"/>
-                <a:ea typeface="微软雅黑"/>
-                <a:cs typeface="微软雅黑"/>
-              </a:rPr>
-              <a:t/>
-            </a:r>
-          </a:p>
-          <a:p>
-            <a:pPr>
-              <a:lnSpc>
-                <a:spcPct val="135000"/>
-              </a:lnSpc>
-              <a:spcBef>
-                <a:spcPts val="0"/>
-              </a:spcBef>
-              <a:spcAft>
-                <a:spcPts val="200"/>
-              </a:spcAft>
-            </a:pPr>
-            <a:r>
-              <a:rPr sz="900" b="1">
-                <a:solidFill>
-                  <a:srgbClr val="00366A"/>
-                </a:solidFill>
-                <a:latin typeface="微软雅黑"/>
-                <a:ea typeface="微软雅黑"/>
-                <a:cs typeface="微软雅黑"/>
-              </a:rPr>
-              <a:t>明年 · 试点评估与推广</a:t>
-            </a:r>
-          </a:p>
-          <a:p>
-            <a:pPr>
-              <a:lnSpc>
-                <a:spcPct val="135000"/>
-              </a:lnSpc>
-              <a:spcBef>
-                <a:spcPts val="0"/>
-              </a:spcBef>
-              <a:spcAft>
-                <a:spcPts val="200"/>
-              </a:spcAft>
-            </a:pPr>
-            <a:r>
-              <a:rPr sz="850" b="0">
-                <a:solidFill>
-                  <a:srgbClr val="0F2B46"/>
-                </a:solidFill>
-                <a:latin typeface="微软雅黑"/>
-                <a:ea typeface="微软雅黑"/>
-                <a:cs typeface="微软雅黑"/>
-              </a:rPr>
-              <a:t>   PoC 效果评估 → 决定扩展至其他设备类型 / 厂区</a:t>
+              <a:t>端到端能力最完整，PdM 推进节奏清晰</a:t>
+            </a:r>
+          </a:p>
+        </p:txBody>
+      </p:sp>
+    </p:spTree>
+  </p:cSld>
+  <p:clrMapOvr>
+    <a:masterClrMapping/>
+  </p:clrMapOvr>
+</p:sld>
+</file>
+
+<file path=ppt/slides/slide9.xml><?xml version="1.0" encoding="utf-8"?>
+<p:sld xmlns:a="http://schemas.openxmlformats.org/drawingml/2006/main" xmlns:p="http://schemas.openxmlformats.org/presentationml/2006/main" xmlns:r="http://schemas.openxmlformats.org/officeDocument/2006/relationships">
+  <p:cSld>
+    <p:spTree>
+      <p:nvGrpSpPr>
+        <p:cNvPr id="1" name=""/>
+        <p:cNvGrpSpPr/>
+        <p:nvPr/>
+      </p:nvGrpSpPr>
+      <p:grpSpPr/>
+      <p:pic>
+        <p:nvPicPr>
+          <p:cNvPr id="2" name="Picture 1" descr="image16.jpg"/>
+          <p:cNvPicPr>
+            <a:picLocks noChangeAspect="1"/>
+          </p:cNvPicPr>
+          <p:nvPr/>
+        </p:nvPicPr>
+        <p:blipFill>
+          <a:blip r:embed="rId2"/>
+          <a:stretch>
+            <a:fillRect/>
+          </a:stretch>
+        </p:blipFill>
+        <p:spPr>
+          <a:xfrm>
+            <a:off x="0" y="0"/>
+            <a:ext cx="9144000" cy="5143500"/>
+          </a:xfrm>
+          <a:prstGeom prst="rect">
+            <a:avLst/>
+          </a:prstGeom>
+        </p:spPr>
+      </p:pic>
+      <p:pic>
+        <p:nvPicPr>
+          <p:cNvPr id="3" name="Picture 2" descr="slide1_shape1.png"/>
+          <p:cNvPicPr>
+            <a:picLocks noChangeAspect="1"/>
+          </p:cNvPicPr>
+          <p:nvPr/>
+        </p:nvPicPr>
+        <p:blipFill>
+          <a:blip r:embed="rId3"/>
+          <a:stretch>
+            <a:fillRect/>
+          </a:stretch>
+        </p:blipFill>
+        <p:spPr>
+          <a:xfrm>
+            <a:off x="274320" y="274320"/>
+            <a:ext cx="3474720" cy="640080"/>
+          </a:xfrm>
+          <a:prstGeom prst="rect">
+            <a:avLst/>
+          </a:prstGeom>
+        </p:spPr>
+      </p:pic>
+      <p:sp>
+        <p:nvSpPr>
+          <p:cNvPr id="4" name="TextBox 3"/>
+          <p:cNvSpPr txBox="1"/>
+          <p:nvPr/>
+        </p:nvSpPr>
+        <p:spPr>
+          <a:xfrm>
+            <a:off x="457200" y="2194560"/>
+            <a:ext cx="8229600" cy="822960"/>
+          </a:xfrm>
+          <a:prstGeom prst="rect">
+            <a:avLst/>
+          </a:prstGeom>
+          <a:noFill/>
+        </p:spPr>
+        <p:txBody>
+          <a:bodyPr wrap="none" lIns="0" rIns="0">
+            <a:spAutoFit/>
+          </a:bodyPr>
+          <a:lstStyle/>
+          <a:p>
+            <a:pPr algn="ctr"/>
+            <a:r>
+              <a:rPr sz="3400" b="1">
+                <a:solidFill>
+                  <a:srgbClr val="FFFFFF"/>
+                </a:solidFill>
+                <a:latin typeface="微软雅黑"/>
+                <a:ea typeface="微软雅黑"/>
+                <a:cs typeface="微软雅黑"/>
+              </a:rPr>
+              <a:t>设备预测性维护 · 重点推进</a:t>
+            </a:r>
+          </a:p>
+        </p:txBody>
+      </p:sp>
+      <p:sp>
+        <p:nvSpPr>
+          <p:cNvPr id="5" name="TextBox 4"/>
+          <p:cNvSpPr txBox="1"/>
+          <p:nvPr/>
+        </p:nvSpPr>
+        <p:spPr>
+          <a:xfrm>
+            <a:off x="274320" y="4892040"/>
+            <a:ext cx="2103120" cy="182880"/>
+          </a:xfrm>
+          <a:prstGeom prst="rect">
+            <a:avLst/>
+          </a:prstGeom>
+          <a:noFill/>
+        </p:spPr>
+        <p:txBody>
+          <a:bodyPr wrap="square" lIns="0" rIns="0" tIns="0" bIns="0">
+            <a:spAutoFit/>
+          </a:bodyPr>
+          <a:lstStyle/>
+          <a:p>
+            <a:pPr algn="l"/>
+            <a:r>
+              <a:rPr sz="750" b="0">
+                <a:solidFill>
+                  <a:srgbClr val="FFFFFF"/>
+                </a:solidFill>
+                <a:latin typeface="Arial"/>
+                <a:ea typeface="微软雅黑"/>
+                <a:cs typeface="微软雅黑"/>
+              </a:rPr>
+              <a:t>www.asymchem.com.cn</a:t>
+            </a:r>
+          </a:p>
+        </p:txBody>
+      </p:sp>
+      <p:sp>
+        <p:nvSpPr>
+          <p:cNvPr id="6" name="TextBox 5"/>
+          <p:cNvSpPr txBox="1"/>
+          <p:nvPr/>
+        </p:nvSpPr>
+        <p:spPr>
+          <a:xfrm>
+            <a:off x="2377440" y="4892040"/>
+            <a:ext cx="2286000" cy="182880"/>
+          </a:xfrm>
+          <a:prstGeom prst="rect">
+            <a:avLst/>
+          </a:prstGeom>
+          <a:noFill/>
+        </p:spPr>
+        <p:txBody>
+          <a:bodyPr wrap="square" lIns="0" rIns="0" tIns="0" bIns="0">
+            <a:spAutoFit/>
+          </a:bodyPr>
+          <a:lstStyle/>
+          <a:p>
+            <a:pPr algn="l"/>
+            <a:r>
+              <a:rPr sz="700" b="0">
+                <a:solidFill>
+                  <a:srgbClr val="FFFFFF"/>
+                </a:solidFill>
+                <a:latin typeface="Arial"/>
+                <a:ea typeface="微软雅黑"/>
+                <a:cs typeface="微软雅黑"/>
+              </a:rPr>
+              <a:t>Stock Code: 002821.SZ / 6821.HK</a:t>
+            </a:r>
+          </a:p>
+        </p:txBody>
+      </p:sp>
+      <p:sp>
+        <p:nvSpPr>
+          <p:cNvPr id="7" name="TextBox 6"/>
+          <p:cNvSpPr txBox="1"/>
+          <p:nvPr/>
+        </p:nvSpPr>
+        <p:spPr>
+          <a:xfrm>
+            <a:off x="8595360" y="4892040"/>
+            <a:ext cx="457200" cy="182880"/>
+          </a:xfrm>
+          <a:prstGeom prst="rect">
+            <a:avLst/>
+          </a:prstGeom>
+          <a:noFill/>
+        </p:spPr>
+        <p:txBody>
+          <a:bodyPr wrap="square" lIns="0" rIns="0" tIns="0" bIns="0">
+            <a:spAutoFit/>
+          </a:bodyPr>
+          <a:lstStyle/>
+          <a:p>
+            <a:pPr algn="r"/>
+            <a:r>
+              <a:rPr sz="800" b="0">
+                <a:solidFill>
+                  <a:srgbClr val="FFFFFF"/>
+                </a:solidFill>
+                <a:latin typeface="Arial"/>
+                <a:ea typeface="微软雅黑"/>
+                <a:cs typeface="微软雅黑"/>
+              </a:rPr>
+              <a:t>9</a:t>
             </a:r>
           </a:p>
         </p:txBody>
